--- a/Design Specifications/AMBA_ABP.pptx
+++ b/Design Specifications/AMBA_ABP.pptx
@@ -37,13 +37,16 @@
     <p:sldId id="300" r:id="rId31"/>
     <p:sldId id="264" r:id="rId32"/>
     <p:sldId id="265" r:id="rId33"/>
-    <p:sldId id="297" r:id="rId34"/>
-    <p:sldId id="269" r:id="rId35"/>
-    <p:sldId id="270" r:id="rId36"/>
-    <p:sldId id="302" r:id="rId37"/>
-    <p:sldId id="303" r:id="rId38"/>
-    <p:sldId id="305" r:id="rId39"/>
-    <p:sldId id="273" r:id="rId40"/>
+    <p:sldId id="308" r:id="rId34"/>
+    <p:sldId id="297" r:id="rId35"/>
+    <p:sldId id="306" r:id="rId36"/>
+    <p:sldId id="269" r:id="rId37"/>
+    <p:sldId id="270" r:id="rId38"/>
+    <p:sldId id="302" r:id="rId39"/>
+    <p:sldId id="307" r:id="rId40"/>
+    <p:sldId id="303" r:id="rId41"/>
+    <p:sldId id="305" r:id="rId42"/>
+    <p:sldId id="273" r:id="rId43"/>
   </p:sldIdLst>
   <p:sldSz cx="12192000" cy="6858000"/>
   <p:notesSz cx="12192000" cy="6858000"/>
@@ -19468,6 +19471,439 @@
         <p:cNvPr id="1" name="">
           <a:extLst>
             <a:ext uri="{FF2B5EF4-FFF2-40B4-BE49-F238E27FC236}">
+              <a16:creationId xmlns:a16="http://schemas.microsoft.com/office/drawing/2014/main" id="{08C75B35-4FBE-E803-7FF6-EB4FFBF8BE3F}"/>
+            </a:ext>
+          </a:extLst>
+        </p:cNvPr>
+        <p:cNvGrpSpPr/>
+        <p:nvPr/>
+      </p:nvGrpSpPr>
+      <p:grpSpPr>
+        <a:xfrm>
+          <a:off x="0" y="0"/>
+          <a:ext cx="0" cy="0"/>
+          <a:chOff x="0" y="0"/>
+          <a:chExt cx="0" cy="0"/>
+        </a:xfrm>
+      </p:grpSpPr>
+      <p:sp>
+        <p:nvSpPr>
+          <p:cNvPr id="2" name="object 2">
+            <a:extLst>
+              <a:ext uri="{FF2B5EF4-FFF2-40B4-BE49-F238E27FC236}">
+                <a16:creationId xmlns:a16="http://schemas.microsoft.com/office/drawing/2014/main" id="{E06F985F-1D5A-AD64-BE10-CB479672D97D}"/>
+              </a:ext>
+            </a:extLst>
+          </p:cNvPr>
+          <p:cNvSpPr txBox="1">
+            <a:spLocks noGrp="1"/>
+          </p:cNvSpPr>
+          <p:nvPr>
+            <p:ph type="ctrTitle"/>
+          </p:nvPr>
+        </p:nvSpPr>
+        <p:spPr>
+          <a:prstGeom prst="rect">
+            <a:avLst/>
+          </a:prstGeom>
+        </p:spPr>
+        <p:txBody>
+          <a:bodyPr vert="horz" wrap="square" lIns="0" tIns="13335" rIns="0" bIns="0" rtlCol="0">
+            <a:spAutoFit/>
+          </a:bodyPr>
+          <a:lstStyle/>
+          <a:p>
+            <a:pPr marL="12700">
+              <a:lnSpc>
+                <a:spcPct val="100000"/>
+              </a:lnSpc>
+              <a:spcBef>
+                <a:spcPts val="105"/>
+              </a:spcBef>
+            </a:pPr>
+            <a:r>
+              <a:rPr dirty="0"/>
+              <a:t>3.</a:t>
+            </a:r>
+            <a:r>
+              <a:rPr spc="-70" dirty="0"/>
+              <a:t> </a:t>
+            </a:r>
+            <a:r>
+              <a:rPr dirty="0"/>
+              <a:t>Low</a:t>
+            </a:r>
+            <a:r>
+              <a:rPr spc="10" dirty="0"/>
+              <a:t> </a:t>
+            </a:r>
+            <a:r>
+              <a:rPr dirty="0"/>
+              <a:t>Level</a:t>
+            </a:r>
+            <a:r>
+              <a:rPr spc="10" dirty="0"/>
+              <a:t> </a:t>
+            </a:r>
+            <a:r>
+              <a:rPr dirty="0"/>
+              <a:t>Block</a:t>
+            </a:r>
+            <a:r>
+              <a:rPr spc="-10" dirty="0"/>
+              <a:t> Design</a:t>
+            </a:r>
+          </a:p>
+        </p:txBody>
+      </p:sp>
+      <p:sp>
+        <p:nvSpPr>
+          <p:cNvPr id="3" name="object 3">
+            <a:extLst>
+              <a:ext uri="{FF2B5EF4-FFF2-40B4-BE49-F238E27FC236}">
+                <a16:creationId xmlns:a16="http://schemas.microsoft.com/office/drawing/2014/main" id="{7692DB19-2F2A-CD30-D0A9-66A46DCA9375}"/>
+              </a:ext>
+            </a:extLst>
+          </p:cNvPr>
+          <p:cNvSpPr txBox="1"/>
+          <p:nvPr/>
+        </p:nvSpPr>
+        <p:spPr>
+          <a:xfrm>
+            <a:off x="508317" y="1121155"/>
+            <a:ext cx="5435283" cy="475130"/>
+          </a:xfrm>
+          <a:prstGeom prst="rect">
+            <a:avLst/>
+          </a:prstGeom>
+        </p:spPr>
+        <p:txBody>
+          <a:bodyPr vert="horz" wrap="square" lIns="0" tIns="13335" rIns="0" bIns="0" rtlCol="0">
+            <a:spAutoFit/>
+          </a:bodyPr>
+          <a:lstStyle/>
+          <a:p>
+            <a:pPr marL="12700">
+              <a:lnSpc>
+                <a:spcPct val="100000"/>
+              </a:lnSpc>
+              <a:spcBef>
+                <a:spcPts val="105"/>
+              </a:spcBef>
+            </a:pPr>
+            <a:r>
+              <a:rPr sz="3000" b="1">
+                <a:solidFill>
+                  <a:srgbClr val="7C45AD"/>
+                </a:solidFill>
+                <a:latin typeface="Arial"/>
+                <a:cs typeface="Arial"/>
+              </a:rPr>
+              <a:t>3.</a:t>
+            </a:r>
+            <a:r>
+              <a:rPr lang="en-US" sz="3000" b="1">
+                <a:solidFill>
+                  <a:srgbClr val="7C45AD"/>
+                </a:solidFill>
+                <a:latin typeface="Arial"/>
+                <a:cs typeface="Arial"/>
+              </a:rPr>
+              <a:t>2 APB Slave block</a:t>
+            </a:r>
+            <a:endParaRPr sz="3000">
+              <a:latin typeface="Arial"/>
+              <a:cs typeface="Arial"/>
+            </a:endParaRPr>
+          </a:p>
+        </p:txBody>
+      </p:sp>
+      <p:sp>
+        <p:nvSpPr>
+          <p:cNvPr id="6" name="object 6">
+            <a:extLst>
+              <a:ext uri="{FF2B5EF4-FFF2-40B4-BE49-F238E27FC236}">
+                <a16:creationId xmlns:a16="http://schemas.microsoft.com/office/drawing/2014/main" id="{4DE72323-33F8-5BE4-F650-28B907811173}"/>
+              </a:ext>
+            </a:extLst>
+          </p:cNvPr>
+          <p:cNvSpPr txBox="1">
+            <a:spLocks noGrp="1"/>
+          </p:cNvSpPr>
+          <p:nvPr>
+            <p:ph type="dt" sz="half" idx="6"/>
+          </p:nvPr>
+        </p:nvSpPr>
+        <p:spPr>
+          <a:prstGeom prst="rect">
+            <a:avLst/>
+          </a:prstGeom>
+        </p:spPr>
+        <p:txBody>
+          <a:bodyPr vert="horz" wrap="square" lIns="0" tIns="6350" rIns="0" bIns="0" rtlCol="0">
+            <a:spAutoFit/>
+          </a:bodyPr>
+          <a:lstStyle/>
+          <a:p>
+            <a:pPr marL="12700">
+              <a:lnSpc>
+                <a:spcPct val="100000"/>
+              </a:lnSpc>
+              <a:spcBef>
+                <a:spcPts val="50"/>
+              </a:spcBef>
+            </a:pPr>
+            <a:r>
+              <a:rPr dirty="0"/>
+              <a:t>Thiết</a:t>
+            </a:r>
+            <a:r>
+              <a:rPr spc="-20" dirty="0"/>
+              <a:t> </a:t>
+            </a:r>
+            <a:r>
+              <a:rPr dirty="0"/>
+              <a:t>Kế</a:t>
+            </a:r>
+            <a:r>
+              <a:rPr spc="-40" dirty="0"/>
+              <a:t> </a:t>
+            </a:r>
+            <a:r>
+              <a:rPr dirty="0"/>
+              <a:t>Vi</a:t>
+            </a:r>
+            <a:r>
+              <a:rPr spc="10" dirty="0"/>
+              <a:t> </a:t>
+            </a:r>
+            <a:r>
+              <a:rPr spc="-20" dirty="0"/>
+              <a:t>Mạch</a:t>
+            </a:r>
+          </a:p>
+        </p:txBody>
+      </p:sp>
+      <p:sp>
+        <p:nvSpPr>
+          <p:cNvPr id="7" name="object 7">
+            <a:extLst>
+              <a:ext uri="{FF2B5EF4-FFF2-40B4-BE49-F238E27FC236}">
+                <a16:creationId xmlns:a16="http://schemas.microsoft.com/office/drawing/2014/main" id="{FFAD6242-3F08-6B6B-3418-C316F8509D21}"/>
+              </a:ext>
+            </a:extLst>
+          </p:cNvPr>
+          <p:cNvSpPr txBox="1">
+            <a:spLocks noGrp="1"/>
+          </p:cNvSpPr>
+          <p:nvPr>
+            <p:ph type="sldNum" sz="quarter" idx="7"/>
+          </p:nvPr>
+        </p:nvSpPr>
+        <p:spPr>
+          <a:prstGeom prst="rect">
+            <a:avLst/>
+          </a:prstGeom>
+        </p:spPr>
+        <p:txBody>
+          <a:bodyPr vert="horz" wrap="square" lIns="0" tIns="6350" rIns="0" bIns="0" rtlCol="0">
+            <a:spAutoFit/>
+          </a:bodyPr>
+          <a:lstStyle/>
+          <a:p>
+            <a:pPr marL="38100">
+              <a:lnSpc>
+                <a:spcPct val="100000"/>
+              </a:lnSpc>
+              <a:spcBef>
+                <a:spcPts val="50"/>
+              </a:spcBef>
+            </a:pPr>
+            <a:fld id="{81D60167-4931-47E6-BA6A-407CBD079E47}" type="slidenum">
+              <a:rPr spc="-25" dirty="0"/>
+              <a:t>33</a:t>
+            </a:fld>
+            <a:endParaRPr spc="-25" dirty="0"/>
+          </a:p>
+        </p:txBody>
+      </p:sp>
+      <p:sp>
+        <p:nvSpPr>
+          <p:cNvPr id="8" name="object 8">
+            <a:extLst>
+              <a:ext uri="{FF2B5EF4-FFF2-40B4-BE49-F238E27FC236}">
+                <a16:creationId xmlns:a16="http://schemas.microsoft.com/office/drawing/2014/main" id="{A8C09E0C-391D-6EC8-052D-3FA108F50786}"/>
+              </a:ext>
+            </a:extLst>
+          </p:cNvPr>
+          <p:cNvSpPr txBox="1">
+            <a:spLocks noGrp="1"/>
+          </p:cNvSpPr>
+          <p:nvPr>
+            <p:ph type="ftr" sz="quarter" idx="5"/>
+          </p:nvPr>
+        </p:nvSpPr>
+        <p:spPr>
+          <a:prstGeom prst="rect">
+            <a:avLst/>
+          </a:prstGeom>
+        </p:spPr>
+        <p:txBody>
+          <a:bodyPr vert="horz" wrap="square" lIns="0" tIns="5715" rIns="0" bIns="0" rtlCol="0">
+            <a:spAutoFit/>
+          </a:bodyPr>
+          <a:lstStyle/>
+          <a:p>
+            <a:pPr marL="12700">
+              <a:lnSpc>
+                <a:spcPct val="100000"/>
+              </a:lnSpc>
+              <a:spcBef>
+                <a:spcPts val="45"/>
+              </a:spcBef>
+            </a:pPr>
+            <a:r>
+              <a:rPr dirty="0"/>
+              <a:t>©</a:t>
+            </a:r>
+            <a:r>
+              <a:rPr spc="-45" dirty="0"/>
+              <a:t> </a:t>
+            </a:r>
+            <a:r>
+              <a:rPr dirty="0"/>
+              <a:t>2025</a:t>
+            </a:r>
+            <a:r>
+              <a:rPr spc="-15" dirty="0"/>
+              <a:t> </a:t>
+            </a:r>
+            <a:r>
+              <a:rPr dirty="0"/>
+              <a:t>–</a:t>
+            </a:r>
+            <a:r>
+              <a:rPr spc="-20" dirty="0"/>
+              <a:t> </a:t>
+            </a:r>
+            <a:r>
+              <a:rPr dirty="0"/>
+              <a:t>Long</a:t>
+            </a:r>
+            <a:r>
+              <a:rPr spc="-10" dirty="0"/>
+              <a:t> Hoang</a:t>
+            </a:r>
+          </a:p>
+        </p:txBody>
+      </p:sp>
+      <p:sp>
+        <p:nvSpPr>
+          <p:cNvPr id="5" name="TextBox 4">
+            <a:extLst>
+              <a:ext uri="{FF2B5EF4-FFF2-40B4-BE49-F238E27FC236}">
+                <a16:creationId xmlns:a16="http://schemas.microsoft.com/office/drawing/2014/main" id="{251DC559-EC2C-4BD2-7148-D04131C7E769}"/>
+              </a:ext>
+            </a:extLst>
+          </p:cNvPr>
+          <p:cNvSpPr txBox="1"/>
+          <p:nvPr/>
+        </p:nvSpPr>
+        <p:spPr>
+          <a:xfrm>
+            <a:off x="2896362" y="5486400"/>
+            <a:ext cx="6094476" cy="369332"/>
+          </a:xfrm>
+          <a:prstGeom prst="rect">
+            <a:avLst/>
+          </a:prstGeom>
+          <a:noFill/>
+        </p:spPr>
+        <p:txBody>
+          <a:bodyPr wrap="square">
+            <a:spAutoFit/>
+          </a:bodyPr>
+          <a:lstStyle/>
+          <a:p>
+            <a:pPr algn="ctr"/>
+            <a:r>
+              <a:rPr lang="en-US" b="1" i="1">
+                <a:latin typeface="Arial" panose="020B0604020202020204" pitchFamily="34" charset="0"/>
+                <a:cs typeface="Arial" panose="020B0604020202020204" pitchFamily="34" charset="0"/>
+              </a:rPr>
+              <a:t>APB PADDR Config</a:t>
+            </a:r>
+          </a:p>
+        </p:txBody>
+      </p:sp>
+      <p:pic>
+        <p:nvPicPr>
+          <p:cNvPr id="3074" name="Picture 2">
+            <a:extLst>
+              <a:ext uri="{FF2B5EF4-FFF2-40B4-BE49-F238E27FC236}">
+                <a16:creationId xmlns:a16="http://schemas.microsoft.com/office/drawing/2014/main" id="{03F16699-2631-7A94-AED5-1A6F1A313251}"/>
+              </a:ext>
+            </a:extLst>
+          </p:cNvPr>
+          <p:cNvPicPr>
+            <a:picLocks noChangeAspect="1" noChangeArrowheads="1"/>
+          </p:cNvPicPr>
+          <p:nvPr/>
+        </p:nvPicPr>
+        <p:blipFill>
+          <a:blip r:embed="rId2" cstate="print">
+            <a:extLst>
+              <a:ext uri="{28A0092B-C50C-407E-A947-70E740481C1C}">
+                <a14:useLocalDpi xmlns:a14="http://schemas.microsoft.com/office/drawing/2010/main" val="0"/>
+              </a:ext>
+            </a:extLst>
+          </a:blip>
+          <a:srcRect/>
+          <a:stretch>
+            <a:fillRect/>
+          </a:stretch>
+        </p:blipFill>
+        <p:spPr bwMode="auto">
+          <a:xfrm>
+            <a:off x="1924888" y="1905000"/>
+            <a:ext cx="8037423" cy="3436691"/>
+          </a:xfrm>
+          <a:prstGeom prst="rect">
+            <a:avLst/>
+          </a:prstGeom>
+          <a:noFill/>
+          <a:extLst>
+            <a:ext uri="{909E8E84-426E-40DD-AFC4-6F175D3DCCD1}">
+              <a14:hiddenFill xmlns:a14="http://schemas.microsoft.com/office/drawing/2010/main">
+                <a:solidFill>
+                  <a:srgbClr val="FFFFFF"/>
+                </a:solidFill>
+              </a14:hiddenFill>
+            </a:ext>
+          </a:extLst>
+        </p:spPr>
+      </p:pic>
+    </p:spTree>
+    <p:extLst>
+      <p:ext uri="{BB962C8B-B14F-4D97-AF65-F5344CB8AC3E}">
+        <p14:creationId xmlns:p14="http://schemas.microsoft.com/office/powerpoint/2010/main" val="1431107117"/>
+      </p:ext>
+    </p:extLst>
+  </p:cSld>
+  <p:clrMapOvr>
+    <a:masterClrMapping/>
+  </p:clrMapOvr>
+</p:sld>
+</file>
+
+<file path=ppt/slides/slide34.xml><?xml version="1.0" encoding="utf-8"?>
+<p:sld xmlns:a="http://schemas.openxmlformats.org/drawingml/2006/main" xmlns:r="http://schemas.openxmlformats.org/officeDocument/2006/relationships" xmlns:p="http://schemas.openxmlformats.org/presentationml/2006/main" showMasterSp="0">
+  <p:cSld>
+    <p:spTree>
+      <p:nvGrpSpPr>
+        <p:cNvPr id="1" name="">
+          <a:extLst>
+            <a:ext uri="{FF2B5EF4-FFF2-40B4-BE49-F238E27FC236}">
               <a16:creationId xmlns:a16="http://schemas.microsoft.com/office/drawing/2014/main" id="{76B777D0-C1EE-D4CD-9E47-3D3FD96B1BD2}"/>
             </a:ext>
           </a:extLst>
@@ -19718,7 +20154,7 @@
             </a:pPr>
             <a:fld id="{81D60167-4931-47E6-BA6A-407CBD079E47}" type="slidenum">
               <a:rPr spc="-25" dirty="0"/>
-              <a:t>33</a:t>
+              <a:t>34</a:t>
             </a:fld>
             <a:endParaRPr spc="-25" dirty="0"/>
           </a:p>
@@ -19808,7 +20244,7 @@
         </p:nvSpPr>
         <p:spPr>
           <a:xfrm>
-            <a:off x="1143618" y="5870245"/>
+            <a:off x="4430473" y="5740214"/>
             <a:ext cx="4164680" cy="369332"/>
           </a:xfrm>
           <a:prstGeom prst="rect">
@@ -19833,51 +20269,12 @@
           </a:p>
         </p:txBody>
       </p:sp>
-      <p:sp>
-        <p:nvSpPr>
-          <p:cNvPr id="10" name="TextBox 9">
+      <p:pic>
+        <p:nvPicPr>
+          <p:cNvPr id="1028" name="Picture 4">
             <a:extLst>
               <a:ext uri="{FF2B5EF4-FFF2-40B4-BE49-F238E27FC236}">
-                <a16:creationId xmlns:a16="http://schemas.microsoft.com/office/drawing/2014/main" id="{FCB61C70-FA45-DF4B-E0D1-DC50FA1B29F3}"/>
-              </a:ext>
-            </a:extLst>
-          </p:cNvPr>
-          <p:cNvSpPr txBox="1"/>
-          <p:nvPr/>
-        </p:nvSpPr>
-        <p:spPr>
-          <a:xfrm>
-            <a:off x="7139149" y="5866685"/>
-            <a:ext cx="4164680" cy="369332"/>
-          </a:xfrm>
-          <a:prstGeom prst="rect">
-            <a:avLst/>
-          </a:prstGeom>
-          <a:noFill/>
-        </p:spPr>
-        <p:txBody>
-          <a:bodyPr wrap="square">
-            <a:spAutoFit/>
-          </a:bodyPr>
-          <a:lstStyle/>
-          <a:p>
-            <a:pPr algn="ctr"/>
-            <a:r>
-              <a:rPr lang="en-US" b="1" i="1">
-                <a:latin typeface="Arial" panose="020B0604020202020204" pitchFamily="34" charset="0"/>
-                <a:cs typeface="Arial" panose="020B0604020202020204" pitchFamily="34" charset="0"/>
-              </a:rPr>
-              <a:t>APB Slave Output signals</a:t>
-            </a:r>
-          </a:p>
-        </p:txBody>
-      </p:sp>
-      <p:pic>
-        <p:nvPicPr>
-          <p:cNvPr id="5" name="Picture 2">
-            <a:extLst>
-              <a:ext uri="{FF2B5EF4-FFF2-40B4-BE49-F238E27FC236}">
-                <a16:creationId xmlns:a16="http://schemas.microsoft.com/office/drawing/2014/main" id="{193D47D3-6A18-7F6D-2899-4A653C292FAE}"/>
+                <a16:creationId xmlns:a16="http://schemas.microsoft.com/office/drawing/2014/main" id="{4C8EBBED-6302-88B8-6825-4531FE97F869}"/>
               </a:ext>
             </a:extLst>
           </p:cNvPr>
@@ -19894,62 +20291,15 @@
               </a:ext>
             </a:extLst>
           </a:blip>
-          <a:srcRect b="53529"/>
+          <a:srcRect b="53042"/>
           <a:stretch>
             <a:fillRect/>
           </a:stretch>
         </p:blipFill>
         <p:spPr bwMode="auto">
           <a:xfrm>
-            <a:off x="444658" y="2286000"/>
-            <a:ext cx="5562600" cy="3314084"/>
-          </a:xfrm>
-          <a:prstGeom prst="rect">
-            <a:avLst/>
-          </a:prstGeom>
-          <a:noFill/>
-          <a:extLst>
-            <a:ext uri="{909E8E84-426E-40DD-AFC4-6F175D3DCCD1}">
-              <a14:hiddenFill xmlns:a14="http://schemas.microsoft.com/office/drawing/2010/main">
-                <a:solidFill>
-                  <a:srgbClr val="FFFFFF"/>
-                </a:solidFill>
-              </a14:hiddenFill>
-            </a:ext>
-          </a:extLst>
-        </p:spPr>
-      </p:pic>
-      <p:pic>
-        <p:nvPicPr>
-          <p:cNvPr id="9" name="Picture 4">
-            <a:extLst>
-              <a:ext uri="{FF2B5EF4-FFF2-40B4-BE49-F238E27FC236}">
-                <a16:creationId xmlns:a16="http://schemas.microsoft.com/office/drawing/2014/main" id="{59886231-2577-FD30-BCEB-2489D66608F5}"/>
-              </a:ext>
-            </a:extLst>
-          </p:cNvPr>
-          <p:cNvPicPr>
-            <a:picLocks noChangeAspect="1" noChangeArrowheads="1"/>
-          </p:cNvPicPr>
-          <p:nvPr/>
-        </p:nvPicPr>
-        <p:blipFill rotWithShape="1">
-          <a:blip r:embed="rId3" cstate="print">
-            <a:extLst>
-              <a:ext uri="{28A0092B-C50C-407E-A947-70E740481C1C}">
-                <a14:useLocalDpi xmlns:a14="http://schemas.microsoft.com/office/drawing/2010/main" val="0"/>
-              </a:ext>
-            </a:extLst>
-          </a:blip>
-          <a:srcRect l="4942" t="46256" r="13517"/>
-          <a:stretch>
-            <a:fillRect/>
-          </a:stretch>
-        </p:blipFill>
-        <p:spPr bwMode="auto">
-          <a:xfrm>
-            <a:off x="7009830" y="1973392"/>
-            <a:ext cx="4423318" cy="3737715"/>
+            <a:off x="2243835" y="2206750"/>
+            <a:ext cx="8537956" cy="3661240"/>
           </a:xfrm>
           <a:prstGeom prst="rect">
             <a:avLst/>
@@ -19979,7 +20329,440 @@
 </p:sld>
 </file>
 
-<file path=ppt/slides/slide34.xml><?xml version="1.0" encoding="utf-8"?>
+<file path=ppt/slides/slide35.xml><?xml version="1.0" encoding="utf-8"?>
+<p:sld xmlns:a="http://schemas.openxmlformats.org/drawingml/2006/main" xmlns:r="http://schemas.openxmlformats.org/officeDocument/2006/relationships" xmlns:p="http://schemas.openxmlformats.org/presentationml/2006/main" showMasterSp="0">
+  <p:cSld>
+    <p:spTree>
+      <p:nvGrpSpPr>
+        <p:cNvPr id="1" name="">
+          <a:extLst>
+            <a:ext uri="{FF2B5EF4-FFF2-40B4-BE49-F238E27FC236}">
+              <a16:creationId xmlns:a16="http://schemas.microsoft.com/office/drawing/2014/main" id="{EB610CBD-6D54-C3EF-752B-9A6FCC22F8E7}"/>
+            </a:ext>
+          </a:extLst>
+        </p:cNvPr>
+        <p:cNvGrpSpPr/>
+        <p:nvPr/>
+      </p:nvGrpSpPr>
+      <p:grpSpPr>
+        <a:xfrm>
+          <a:off x="0" y="0"/>
+          <a:ext cx="0" cy="0"/>
+          <a:chOff x="0" y="0"/>
+          <a:chExt cx="0" cy="0"/>
+        </a:xfrm>
+      </p:grpSpPr>
+      <p:sp>
+        <p:nvSpPr>
+          <p:cNvPr id="2" name="object 2">
+            <a:extLst>
+              <a:ext uri="{FF2B5EF4-FFF2-40B4-BE49-F238E27FC236}">
+                <a16:creationId xmlns:a16="http://schemas.microsoft.com/office/drawing/2014/main" id="{7F801990-DE4B-C4AF-D27A-CF4CED4F4B8E}"/>
+              </a:ext>
+            </a:extLst>
+          </p:cNvPr>
+          <p:cNvSpPr txBox="1">
+            <a:spLocks noGrp="1"/>
+          </p:cNvSpPr>
+          <p:nvPr>
+            <p:ph type="ctrTitle"/>
+          </p:nvPr>
+        </p:nvSpPr>
+        <p:spPr>
+          <a:prstGeom prst="rect">
+            <a:avLst/>
+          </a:prstGeom>
+        </p:spPr>
+        <p:txBody>
+          <a:bodyPr vert="horz" wrap="square" lIns="0" tIns="13335" rIns="0" bIns="0" rtlCol="0">
+            <a:spAutoFit/>
+          </a:bodyPr>
+          <a:lstStyle/>
+          <a:p>
+            <a:pPr marL="12700">
+              <a:lnSpc>
+                <a:spcPct val="100000"/>
+              </a:lnSpc>
+              <a:spcBef>
+                <a:spcPts val="105"/>
+              </a:spcBef>
+            </a:pPr>
+            <a:r>
+              <a:rPr dirty="0"/>
+              <a:t>3.</a:t>
+            </a:r>
+            <a:r>
+              <a:rPr spc="-70" dirty="0"/>
+              <a:t> </a:t>
+            </a:r>
+            <a:r>
+              <a:rPr dirty="0"/>
+              <a:t>Low</a:t>
+            </a:r>
+            <a:r>
+              <a:rPr spc="10" dirty="0"/>
+              <a:t> </a:t>
+            </a:r>
+            <a:r>
+              <a:rPr dirty="0"/>
+              <a:t>Level</a:t>
+            </a:r>
+            <a:r>
+              <a:rPr spc="10" dirty="0"/>
+              <a:t> </a:t>
+            </a:r>
+            <a:r>
+              <a:rPr dirty="0"/>
+              <a:t>Block</a:t>
+            </a:r>
+            <a:r>
+              <a:rPr spc="-10" dirty="0"/>
+              <a:t> Design</a:t>
+            </a:r>
+          </a:p>
+        </p:txBody>
+      </p:sp>
+      <p:sp>
+        <p:nvSpPr>
+          <p:cNvPr id="3" name="object 3">
+            <a:extLst>
+              <a:ext uri="{FF2B5EF4-FFF2-40B4-BE49-F238E27FC236}">
+                <a16:creationId xmlns:a16="http://schemas.microsoft.com/office/drawing/2014/main" id="{59141278-9D7D-6B9A-625C-093836F15304}"/>
+              </a:ext>
+            </a:extLst>
+          </p:cNvPr>
+          <p:cNvSpPr txBox="1"/>
+          <p:nvPr/>
+        </p:nvSpPr>
+        <p:spPr>
+          <a:xfrm>
+            <a:off x="508317" y="1121155"/>
+            <a:ext cx="5435283" cy="475130"/>
+          </a:xfrm>
+          <a:prstGeom prst="rect">
+            <a:avLst/>
+          </a:prstGeom>
+        </p:spPr>
+        <p:txBody>
+          <a:bodyPr vert="horz" wrap="square" lIns="0" tIns="13335" rIns="0" bIns="0" rtlCol="0">
+            <a:spAutoFit/>
+          </a:bodyPr>
+          <a:lstStyle/>
+          <a:p>
+            <a:pPr marL="12700">
+              <a:lnSpc>
+                <a:spcPct val="100000"/>
+              </a:lnSpc>
+              <a:spcBef>
+                <a:spcPts val="105"/>
+              </a:spcBef>
+            </a:pPr>
+            <a:r>
+              <a:rPr sz="3000" b="1">
+                <a:solidFill>
+                  <a:srgbClr val="7C45AD"/>
+                </a:solidFill>
+                <a:latin typeface="Arial"/>
+                <a:cs typeface="Arial"/>
+              </a:rPr>
+              <a:t>3.</a:t>
+            </a:r>
+            <a:r>
+              <a:rPr lang="en-US" sz="3000" b="1">
+                <a:solidFill>
+                  <a:srgbClr val="7C45AD"/>
+                </a:solidFill>
+                <a:latin typeface="Arial"/>
+                <a:cs typeface="Arial"/>
+              </a:rPr>
+              <a:t>2 APB Slave block</a:t>
+            </a:r>
+            <a:endParaRPr sz="3000">
+              <a:latin typeface="Arial"/>
+              <a:cs typeface="Arial"/>
+            </a:endParaRPr>
+          </a:p>
+        </p:txBody>
+      </p:sp>
+      <p:sp>
+        <p:nvSpPr>
+          <p:cNvPr id="6" name="object 6">
+            <a:extLst>
+              <a:ext uri="{FF2B5EF4-FFF2-40B4-BE49-F238E27FC236}">
+                <a16:creationId xmlns:a16="http://schemas.microsoft.com/office/drawing/2014/main" id="{60107494-257E-AEA7-38F9-F3EF5631DE6D}"/>
+              </a:ext>
+            </a:extLst>
+          </p:cNvPr>
+          <p:cNvSpPr txBox="1">
+            <a:spLocks noGrp="1"/>
+          </p:cNvSpPr>
+          <p:nvPr>
+            <p:ph type="dt" sz="half" idx="6"/>
+          </p:nvPr>
+        </p:nvSpPr>
+        <p:spPr>
+          <a:prstGeom prst="rect">
+            <a:avLst/>
+          </a:prstGeom>
+        </p:spPr>
+        <p:txBody>
+          <a:bodyPr vert="horz" wrap="square" lIns="0" tIns="6350" rIns="0" bIns="0" rtlCol="0">
+            <a:spAutoFit/>
+          </a:bodyPr>
+          <a:lstStyle/>
+          <a:p>
+            <a:pPr marL="12700">
+              <a:lnSpc>
+                <a:spcPct val="100000"/>
+              </a:lnSpc>
+              <a:spcBef>
+                <a:spcPts val="50"/>
+              </a:spcBef>
+            </a:pPr>
+            <a:r>
+              <a:rPr dirty="0"/>
+              <a:t>Thiết</a:t>
+            </a:r>
+            <a:r>
+              <a:rPr spc="-20" dirty="0"/>
+              <a:t> </a:t>
+            </a:r>
+            <a:r>
+              <a:rPr dirty="0"/>
+              <a:t>Kế</a:t>
+            </a:r>
+            <a:r>
+              <a:rPr spc="-40" dirty="0"/>
+              <a:t> </a:t>
+            </a:r>
+            <a:r>
+              <a:rPr dirty="0"/>
+              <a:t>Vi</a:t>
+            </a:r>
+            <a:r>
+              <a:rPr spc="10" dirty="0"/>
+              <a:t> </a:t>
+            </a:r>
+            <a:r>
+              <a:rPr spc="-20" dirty="0"/>
+              <a:t>Mạch</a:t>
+            </a:r>
+          </a:p>
+        </p:txBody>
+      </p:sp>
+      <p:sp>
+        <p:nvSpPr>
+          <p:cNvPr id="7" name="object 7">
+            <a:extLst>
+              <a:ext uri="{FF2B5EF4-FFF2-40B4-BE49-F238E27FC236}">
+                <a16:creationId xmlns:a16="http://schemas.microsoft.com/office/drawing/2014/main" id="{8D8C5BDC-1C28-3DDD-DD44-C0200373BC09}"/>
+              </a:ext>
+            </a:extLst>
+          </p:cNvPr>
+          <p:cNvSpPr txBox="1">
+            <a:spLocks noGrp="1"/>
+          </p:cNvSpPr>
+          <p:nvPr>
+            <p:ph type="sldNum" sz="quarter" idx="7"/>
+          </p:nvPr>
+        </p:nvSpPr>
+        <p:spPr>
+          <a:prstGeom prst="rect">
+            <a:avLst/>
+          </a:prstGeom>
+        </p:spPr>
+        <p:txBody>
+          <a:bodyPr vert="horz" wrap="square" lIns="0" tIns="6350" rIns="0" bIns="0" rtlCol="0">
+            <a:spAutoFit/>
+          </a:bodyPr>
+          <a:lstStyle/>
+          <a:p>
+            <a:pPr marL="38100">
+              <a:lnSpc>
+                <a:spcPct val="100000"/>
+              </a:lnSpc>
+              <a:spcBef>
+                <a:spcPts val="50"/>
+              </a:spcBef>
+            </a:pPr>
+            <a:fld id="{81D60167-4931-47E6-BA6A-407CBD079E47}" type="slidenum">
+              <a:rPr spc="-25" dirty="0"/>
+              <a:t>35</a:t>
+            </a:fld>
+            <a:endParaRPr spc="-25" dirty="0"/>
+          </a:p>
+        </p:txBody>
+      </p:sp>
+      <p:sp>
+        <p:nvSpPr>
+          <p:cNvPr id="8" name="object 8">
+            <a:extLst>
+              <a:ext uri="{FF2B5EF4-FFF2-40B4-BE49-F238E27FC236}">
+                <a16:creationId xmlns:a16="http://schemas.microsoft.com/office/drawing/2014/main" id="{F2D32195-DF7A-01FC-5B79-DF8C43734955}"/>
+              </a:ext>
+            </a:extLst>
+          </p:cNvPr>
+          <p:cNvSpPr txBox="1">
+            <a:spLocks noGrp="1"/>
+          </p:cNvSpPr>
+          <p:nvPr>
+            <p:ph type="ftr" sz="quarter" idx="5"/>
+          </p:nvPr>
+        </p:nvSpPr>
+        <p:spPr>
+          <a:prstGeom prst="rect">
+            <a:avLst/>
+          </a:prstGeom>
+        </p:spPr>
+        <p:txBody>
+          <a:bodyPr vert="horz" wrap="square" lIns="0" tIns="5715" rIns="0" bIns="0" rtlCol="0">
+            <a:spAutoFit/>
+          </a:bodyPr>
+          <a:lstStyle/>
+          <a:p>
+            <a:pPr marL="12700">
+              <a:lnSpc>
+                <a:spcPct val="100000"/>
+              </a:lnSpc>
+              <a:spcBef>
+                <a:spcPts val="45"/>
+              </a:spcBef>
+            </a:pPr>
+            <a:r>
+              <a:rPr dirty="0"/>
+              <a:t>©</a:t>
+            </a:r>
+            <a:r>
+              <a:rPr spc="-45" dirty="0"/>
+              <a:t> </a:t>
+            </a:r>
+            <a:r>
+              <a:rPr dirty="0"/>
+              <a:t>2025</a:t>
+            </a:r>
+            <a:r>
+              <a:rPr spc="-15" dirty="0"/>
+              <a:t> </a:t>
+            </a:r>
+            <a:r>
+              <a:rPr dirty="0"/>
+              <a:t>–</a:t>
+            </a:r>
+            <a:r>
+              <a:rPr spc="-20" dirty="0"/>
+              <a:t> </a:t>
+            </a:r>
+            <a:r>
+              <a:rPr dirty="0"/>
+              <a:t>Long</a:t>
+            </a:r>
+            <a:r>
+              <a:rPr spc="-10" dirty="0"/>
+              <a:t> Hoang</a:t>
+            </a:r>
+          </a:p>
+        </p:txBody>
+      </p:sp>
+      <p:sp>
+        <p:nvSpPr>
+          <p:cNvPr id="4" name="TextBox 3">
+            <a:extLst>
+              <a:ext uri="{FF2B5EF4-FFF2-40B4-BE49-F238E27FC236}">
+                <a16:creationId xmlns:a16="http://schemas.microsoft.com/office/drawing/2014/main" id="{6AF70D63-48AB-5B32-F7B1-575ADA8D85DD}"/>
+              </a:ext>
+            </a:extLst>
+          </p:cNvPr>
+          <p:cNvSpPr txBox="1"/>
+          <p:nvPr/>
+        </p:nvSpPr>
+        <p:spPr>
+          <a:xfrm>
+            <a:off x="4013596" y="6019075"/>
+            <a:ext cx="4164680" cy="369332"/>
+          </a:xfrm>
+          <a:prstGeom prst="rect">
+            <a:avLst/>
+          </a:prstGeom>
+          <a:noFill/>
+        </p:spPr>
+        <p:txBody>
+          <a:bodyPr wrap="square">
+            <a:spAutoFit/>
+          </a:bodyPr>
+          <a:lstStyle/>
+          <a:p>
+            <a:pPr algn="ctr"/>
+            <a:r>
+              <a:rPr lang="en-US" b="1" i="1">
+                <a:latin typeface="Arial" panose="020B0604020202020204" pitchFamily="34" charset="0"/>
+                <a:cs typeface="Arial" panose="020B0604020202020204" pitchFamily="34" charset="0"/>
+              </a:rPr>
+              <a:t>APB Output signals</a:t>
+            </a:r>
+          </a:p>
+        </p:txBody>
+      </p:sp>
+      <p:pic>
+        <p:nvPicPr>
+          <p:cNvPr id="2052" name="Picture 4">
+            <a:extLst>
+              <a:ext uri="{FF2B5EF4-FFF2-40B4-BE49-F238E27FC236}">
+                <a16:creationId xmlns:a16="http://schemas.microsoft.com/office/drawing/2014/main" id="{1DFC5836-031D-A6B7-EB28-7E93A6AE618C}"/>
+              </a:ext>
+            </a:extLst>
+          </p:cNvPr>
+          <p:cNvPicPr>
+            <a:picLocks noChangeAspect="1" noChangeArrowheads="1"/>
+          </p:cNvPicPr>
+          <p:nvPr/>
+        </p:nvPicPr>
+        <p:blipFill rotWithShape="1">
+          <a:blip r:embed="rId2" cstate="print">
+            <a:extLst>
+              <a:ext uri="{28A0092B-C50C-407E-A947-70E740481C1C}">
+                <a14:useLocalDpi xmlns:a14="http://schemas.microsoft.com/office/drawing/2010/main" val="0"/>
+              </a:ext>
+            </a:extLst>
+          </a:blip>
+          <a:srcRect t="46958" r="30556"/>
+          <a:stretch>
+            <a:fillRect/>
+          </a:stretch>
+        </p:blipFill>
+        <p:spPr bwMode="auto">
+          <a:xfrm>
+            <a:off x="2871050" y="1760298"/>
+            <a:ext cx="6145100" cy="4286209"/>
+          </a:xfrm>
+          <a:prstGeom prst="rect">
+            <a:avLst/>
+          </a:prstGeom>
+          <a:noFill/>
+          <a:extLst>
+            <a:ext uri="{909E8E84-426E-40DD-AFC4-6F175D3DCCD1}">
+              <a14:hiddenFill xmlns:a14="http://schemas.microsoft.com/office/drawing/2010/main">
+                <a:solidFill>
+                  <a:srgbClr val="FFFFFF"/>
+                </a:solidFill>
+              </a14:hiddenFill>
+            </a:ext>
+          </a:extLst>
+        </p:spPr>
+      </p:pic>
+    </p:spTree>
+    <p:extLst>
+      <p:ext uri="{BB962C8B-B14F-4D97-AF65-F5344CB8AC3E}">
+        <p14:creationId xmlns:p14="http://schemas.microsoft.com/office/powerpoint/2010/main" val="775485728"/>
+      </p:ext>
+    </p:extLst>
+  </p:cSld>
+  <p:clrMapOvr>
+    <a:masterClrMapping/>
+  </p:clrMapOvr>
+</p:sld>
+</file>
+
+<file path=ppt/slides/slide36.xml><?xml version="1.0" encoding="utf-8"?>
 <p:sld xmlns:a="http://schemas.openxmlformats.org/drawingml/2006/main" xmlns:r="http://schemas.openxmlformats.org/officeDocument/2006/relationships" xmlns:p="http://schemas.openxmlformats.org/presentationml/2006/main">
   <p:cSld>
     <p:spTree>
@@ -20143,7 +20926,7 @@
             </a:pPr>
             <a:fld id="{81D60167-4931-47E6-BA6A-407CBD079E47}" type="slidenum">
               <a:rPr spc="-25" dirty="0"/>
-              <a:t>34</a:t>
+              <a:t>36</a:t>
             </a:fld>
             <a:endParaRPr spc="-25" dirty="0"/>
           </a:p>
@@ -20221,7 +21004,7 @@
 </p:sld>
 </file>
 
-<file path=ppt/slides/slide35.xml><?xml version="1.0" encoding="utf-8"?>
+<file path=ppt/slides/slide37.xml><?xml version="1.0" encoding="utf-8"?>
 <p:sld xmlns:a="http://schemas.openxmlformats.org/drawingml/2006/main" xmlns:r="http://schemas.openxmlformats.org/officeDocument/2006/relationships" xmlns:p="http://schemas.openxmlformats.org/presentationml/2006/main" showMasterSp="0">
   <p:cSld>
     <p:spTree>
@@ -20386,7 +21169,7 @@
             </a:pPr>
             <a:fld id="{81D60167-4931-47E6-BA6A-407CBD079E47}" type="slidenum">
               <a:rPr spc="-25" dirty="0"/>
-              <a:t>35</a:t>
+              <a:t>37</a:t>
             </a:fld>
             <a:endParaRPr spc="-25" dirty="0"/>
           </a:p>
@@ -20723,7 +21506,7 @@
 </p:sld>
 </file>
 
-<file path=ppt/slides/slide36.xml><?xml version="1.0" encoding="utf-8"?>
+<file path=ppt/slides/slide38.xml><?xml version="1.0" encoding="utf-8"?>
 <p:sld xmlns:a="http://schemas.openxmlformats.org/drawingml/2006/main" xmlns:r="http://schemas.openxmlformats.org/officeDocument/2006/relationships" xmlns:p="http://schemas.openxmlformats.org/presentationml/2006/main" showMasterSp="0">
   <p:cSld>
     <p:spTree>
@@ -20912,7 +21695,7 @@
             </a:pPr>
             <a:fld id="{81D60167-4931-47E6-BA6A-407CBD079E47}" type="slidenum">
               <a:rPr spc="-25" dirty="0"/>
-              <a:t>36</a:t>
+              <a:t>38</a:t>
             </a:fld>
             <a:endParaRPr spc="-25" dirty="0"/>
           </a:p>
@@ -21055,14 +21838,14 @@
           <p:nvPr>
             <p:extLst>
               <p:ext uri="{D42A27DB-BD31-4B8C-83A1-F6EECF244321}">
-                <p14:modId xmlns:p14="http://schemas.microsoft.com/office/powerpoint/2010/main" val="880756405"/>
+                <p14:modId xmlns:p14="http://schemas.microsoft.com/office/powerpoint/2010/main" val="2630032821"/>
               </p:ext>
             </p:extLst>
           </p:nvPr>
         </p:nvGraphicFramePr>
         <p:xfrm>
-          <a:off x="508317" y="1901523"/>
-          <a:ext cx="11199176" cy="4084320"/>
+          <a:off x="508317" y="1668593"/>
+          <a:ext cx="11199176" cy="4572000"/>
         </p:xfrm>
         <a:graphic>
           <a:graphicData uri="http://schemas.openxmlformats.org/drawingml/2006/table">
@@ -21171,13 +21954,12 @@
                     <a:p>
                       <a:pPr algn="ctr"/>
                       <a:r>
-                        <a:rPr lang="en-US" sz="1600"/>
+                        <a:rPr lang="en-US" sz="1600">
+                          <a:latin typeface="Arial" panose="020B0604020202020204" pitchFamily="34" charset="0"/>
+                          <a:cs typeface="Arial" panose="020B0604020202020204" pitchFamily="34" charset="0"/>
+                        </a:rPr>
                         <a:t>Write/Read Slave 0</a:t>
                       </a:r>
-                      <a:endParaRPr lang="en-US" sz="1600">
-                        <a:latin typeface="Arial" panose="020B0604020202020204" pitchFamily="34" charset="0"/>
-                        <a:cs typeface="Arial" panose="020B0604020202020204" pitchFamily="34" charset="0"/>
-                      </a:endParaRPr>
                     </a:p>
                   </a:txBody>
                   <a:tcPr anchor="ctr"/>
@@ -21189,7 +21971,10 @@
                     <a:p>
                       <a:pPr algn="just"/>
                       <a:r>
-                        <a:rPr lang="en-US" sz="1600"/>
+                        <a:rPr lang="en-US" sz="1600">
+                          <a:latin typeface="Arial" panose="020B0604020202020204" pitchFamily="34" charset="0"/>
+                          <a:cs typeface="Arial" panose="020B0604020202020204" pitchFamily="34" charset="0"/>
+                        </a:rPr>
                         <a:t>Perform a write of </a:t>
                       </a:r>
                       <a:r>
@@ -21197,14 +21982,17 @@
                           <a:solidFill>
                             <a:schemeClr val="dk1"/>
                           </a:solidFill>
-                          <a:latin typeface="+mn-lt"/>
+                          <a:latin typeface="Arial" panose="020B0604020202020204" pitchFamily="34" charset="0"/>
                           <a:ea typeface="+mn-ea"/>
-                          <a:cs typeface="+mn-cs"/>
+                          <a:cs typeface="Arial" panose="020B0604020202020204" pitchFamily="34" charset="0"/>
                         </a:rPr>
                         <a:t>0xDEADBEEF</a:t>
                       </a:r>
                       <a:r>
-                        <a:rPr lang="en-US" sz="1600"/>
+                        <a:rPr lang="en-US" sz="1600">
+                          <a:latin typeface="Arial" panose="020B0604020202020204" pitchFamily="34" charset="0"/>
+                          <a:cs typeface="Arial" panose="020B0604020202020204" pitchFamily="34" charset="0"/>
+                        </a:rPr>
                         <a:t> to address </a:t>
                       </a:r>
                       <a:r>
@@ -21212,20 +22000,19 @@
                           <a:solidFill>
                             <a:schemeClr val="dk1"/>
                           </a:solidFill>
-                          <a:latin typeface="+mn-lt"/>
+                          <a:latin typeface="Arial" panose="020B0604020202020204" pitchFamily="34" charset="0"/>
                           <a:ea typeface="+mn-ea"/>
-                          <a:cs typeface="+mn-cs"/>
+                          <a:cs typeface="Arial" panose="020B0604020202020204" pitchFamily="34" charset="0"/>
                         </a:rPr>
                         <a:t>0xA</a:t>
                       </a:r>
                       <a:r>
-                        <a:rPr lang="en-US" sz="1600"/>
+                        <a:rPr lang="en-US" sz="1600">
+                          <a:latin typeface="Arial" panose="020B0604020202020204" pitchFamily="34" charset="0"/>
+                          <a:cs typeface="Arial" panose="020B0604020202020204" pitchFamily="34" charset="0"/>
+                        </a:rPr>
                         <a:t> of Slave 0, followed by a read from the same address.</a:t>
                       </a:r>
-                      <a:endParaRPr lang="en-US" sz="1600">
-                        <a:latin typeface="Arial" panose="020B0604020202020204" pitchFamily="34" charset="0"/>
-                        <a:cs typeface="Arial" panose="020B0604020202020204" pitchFamily="34" charset="0"/>
-                      </a:endParaRPr>
                     </a:p>
                   </a:txBody>
                   <a:tcPr/>
@@ -21329,7 +22116,10 @@
                         <a:defRPr/>
                       </a:pPr>
                       <a:r>
-                        <a:rPr lang="en-US" sz="1600"/>
+                        <a:rPr lang="en-US" sz="1600">
+                          <a:latin typeface="Arial" panose="020B0604020202020204" pitchFamily="34" charset="0"/>
+                          <a:cs typeface="Arial" panose="020B0604020202020204" pitchFamily="34" charset="0"/>
+                        </a:rPr>
                         <a:t>Read data must match the written value (</a:t>
                       </a:r>
                       <a:r>
@@ -21337,14 +22127,17 @@
                           <a:solidFill>
                             <a:schemeClr val="dk1"/>
                           </a:solidFill>
-                          <a:latin typeface="+mn-lt"/>
+                          <a:latin typeface="Arial" panose="020B0604020202020204" pitchFamily="34" charset="0"/>
                           <a:ea typeface="+mn-ea"/>
-                          <a:cs typeface="+mn-cs"/>
+                          <a:cs typeface="Arial" panose="020B0604020202020204" pitchFamily="34" charset="0"/>
                         </a:rPr>
                         <a:t>0xDEADBEEF</a:t>
                       </a:r>
                       <a:r>
-                        <a:rPr lang="en-US" sz="1600"/>
+                        <a:rPr lang="en-US" sz="1600">
+                          <a:latin typeface="Arial" panose="020B0604020202020204" pitchFamily="34" charset="0"/>
+                          <a:cs typeface="Arial" panose="020B0604020202020204" pitchFamily="34" charset="0"/>
+                        </a:rPr>
                         <a:t>).</a:t>
                       </a:r>
                     </a:p>
@@ -21413,14 +22206,17 @@
                           <a:solidFill>
                             <a:schemeClr val="dk1"/>
                           </a:solidFill>
-                          <a:latin typeface="+mn-lt"/>
+                          <a:latin typeface="Arial" panose="020B0604020202020204" pitchFamily="34" charset="0"/>
                           <a:ea typeface="+mn-ea"/>
-                          <a:cs typeface="+mn-cs"/>
+                          <a:cs typeface="Arial" panose="020B0604020202020204" pitchFamily="34" charset="0"/>
                         </a:rPr>
                         <a:t>PSLVERR</a:t>
                       </a:r>
                       <a:r>
-                        <a:rPr lang="en-US" sz="1600"/>
+                        <a:rPr lang="en-US" sz="1600">
+                          <a:latin typeface="Arial" panose="020B0604020202020204" pitchFamily="34" charset="0"/>
+                          <a:cs typeface="Arial" panose="020B0604020202020204" pitchFamily="34" charset="0"/>
+                        </a:rPr>
                         <a:t> must be </a:t>
                       </a:r>
                       <a:r>
@@ -21428,14 +22224,17 @@
                           <a:solidFill>
                             <a:schemeClr val="dk1"/>
                           </a:solidFill>
-                          <a:latin typeface="+mn-lt"/>
+                          <a:latin typeface="Arial" panose="020B0604020202020204" pitchFamily="34" charset="0"/>
                           <a:ea typeface="+mn-ea"/>
-                          <a:cs typeface="+mn-cs"/>
+                          <a:cs typeface="Arial" panose="020B0604020202020204" pitchFamily="34" charset="0"/>
                         </a:rPr>
                         <a:t>0</a:t>
                       </a:r>
                       <a:r>
-                        <a:rPr lang="en-US" sz="1600"/>
+                        <a:rPr lang="en-US" sz="1600">
+                          <a:latin typeface="Arial" panose="020B0604020202020204" pitchFamily="34" charset="0"/>
+                          <a:cs typeface="Arial" panose="020B0604020202020204" pitchFamily="34" charset="0"/>
+                        </a:rPr>
                         <a:t>.</a:t>
                       </a:r>
                     </a:p>
@@ -21456,13 +22255,12 @@
                     <a:p>
                       <a:pPr algn="ctr"/>
                       <a:r>
-                        <a:rPr lang="en-US" sz="1600"/>
+                        <a:rPr lang="en-US" sz="1600">
+                          <a:latin typeface="Arial" panose="020B0604020202020204" pitchFamily="34" charset="0"/>
+                          <a:cs typeface="Arial" panose="020B0604020202020204" pitchFamily="34" charset="0"/>
+                        </a:rPr>
                         <a:t>Write/Read Slave 1</a:t>
                       </a:r>
-                      <a:endParaRPr lang="en-US" sz="1600">
-                        <a:latin typeface="Arial" panose="020B0604020202020204" pitchFamily="34" charset="0"/>
-                        <a:cs typeface="Arial" panose="020B0604020202020204" pitchFamily="34" charset="0"/>
-                      </a:endParaRPr>
                     </a:p>
                   </a:txBody>
                   <a:tcPr anchor="ctr"/>
@@ -21490,7 +22288,10 @@
                         <a:defRPr/>
                       </a:pPr>
                       <a:r>
-                        <a:rPr lang="en-US" sz="1600"/>
+                        <a:rPr lang="en-US" sz="1600">
+                          <a:latin typeface="Arial" panose="020B0604020202020204" pitchFamily="34" charset="0"/>
+                          <a:cs typeface="Arial" panose="020B0604020202020204" pitchFamily="34" charset="0"/>
+                        </a:rPr>
                         <a:t>Perform a write of </a:t>
                       </a:r>
                       <a:r>
@@ -21498,14 +22299,17 @@
                           <a:solidFill>
                             <a:schemeClr val="dk1"/>
                           </a:solidFill>
-                          <a:latin typeface="+mn-lt"/>
+                          <a:latin typeface="Arial" panose="020B0604020202020204" pitchFamily="34" charset="0"/>
                           <a:ea typeface="+mn-ea"/>
-                          <a:cs typeface="+mn-cs"/>
+                          <a:cs typeface="Arial" panose="020B0604020202020204" pitchFamily="34" charset="0"/>
                         </a:rPr>
                         <a:t>0xCAFEBABE</a:t>
                       </a:r>
                       <a:r>
-                        <a:rPr lang="en-US" sz="1600"/>
+                        <a:rPr lang="en-US" sz="1600">
+                          <a:latin typeface="Arial" panose="020B0604020202020204" pitchFamily="34" charset="0"/>
+                          <a:cs typeface="Arial" panose="020B0604020202020204" pitchFamily="34" charset="0"/>
+                        </a:rPr>
                         <a:t> to address </a:t>
                       </a:r>
                       <a:r>
@@ -21513,20 +22317,19 @@
                           <a:solidFill>
                             <a:schemeClr val="dk1"/>
                           </a:solidFill>
-                          <a:latin typeface="+mn-lt"/>
+                          <a:latin typeface="Arial" panose="020B0604020202020204" pitchFamily="34" charset="0"/>
                           <a:ea typeface="+mn-ea"/>
-                          <a:cs typeface="+mn-cs"/>
+                          <a:cs typeface="Arial" panose="020B0604020202020204" pitchFamily="34" charset="0"/>
                         </a:rPr>
                         <a:t>0x8000_0005</a:t>
                       </a:r>
                       <a:r>
-                        <a:rPr lang="en-US" sz="1600"/>
+                        <a:rPr lang="en-US" sz="1600">
+                          <a:latin typeface="Arial" panose="020B0604020202020204" pitchFamily="34" charset="0"/>
+                          <a:cs typeface="Arial" panose="020B0604020202020204" pitchFamily="34" charset="0"/>
+                        </a:rPr>
                         <a:t> (Slave 1), followed by a read from the same address.</a:t>
                       </a:r>
-                      <a:endParaRPr lang="en-US" sz="1600">
-                        <a:latin typeface="Arial" panose="020B0604020202020204" pitchFamily="34" charset="0"/>
-                        <a:cs typeface="Arial" panose="020B0604020202020204" pitchFamily="34" charset="0"/>
-                      </a:endParaRPr>
                     </a:p>
                   </a:txBody>
                   <a:tcPr/>
@@ -21542,20 +22345,19 @@
                           <a:solidFill>
                             <a:schemeClr val="dk1"/>
                           </a:solidFill>
-                          <a:latin typeface="+mn-lt"/>
+                          <a:latin typeface="Arial" panose="020B0604020202020204" pitchFamily="34" charset="0"/>
                           <a:ea typeface="+mn-ea"/>
-                          <a:cs typeface="+mn-cs"/>
+                          <a:cs typeface="Arial" panose="020B0604020202020204" pitchFamily="34" charset="0"/>
                         </a:rPr>
                         <a:t>PSELx[1]</a:t>
                       </a:r>
                       <a:r>
-                        <a:rPr lang="en-US" sz="1600"/>
+                        <a:rPr lang="en-US" sz="1600">
+                          <a:latin typeface="Arial" panose="020B0604020202020204" pitchFamily="34" charset="0"/>
+                          <a:cs typeface="Arial" panose="020B0604020202020204" pitchFamily="34" charset="0"/>
+                        </a:rPr>
                         <a:t> must be asserted.</a:t>
                       </a:r>
-                      <a:endParaRPr lang="en-US" sz="1600">
-                        <a:latin typeface="Arial" panose="020B0604020202020204" pitchFamily="34" charset="0"/>
-                        <a:cs typeface="Arial" panose="020B0604020202020204" pitchFamily="34" charset="0"/>
-                      </a:endParaRPr>
                     </a:p>
                   </a:txBody>
                   <a:tcPr/>
@@ -21601,7 +22403,10 @@
                     <a:p>
                       <a:pPr algn="just"/>
                       <a:r>
-                        <a:rPr lang="en-US" sz="1600"/>
+                        <a:rPr lang="en-US" sz="1600">
+                          <a:latin typeface="Arial" panose="020B0604020202020204" pitchFamily="34" charset="0"/>
+                          <a:cs typeface="Arial" panose="020B0604020202020204" pitchFamily="34" charset="0"/>
+                        </a:rPr>
                         <a:t>Read data must match the written value (</a:t>
                       </a:r>
                       <a:r>
@@ -21609,20 +22414,19 @@
                           <a:solidFill>
                             <a:schemeClr val="dk1"/>
                           </a:solidFill>
-                          <a:latin typeface="+mn-lt"/>
+                          <a:latin typeface="Arial" panose="020B0604020202020204" pitchFamily="34" charset="0"/>
                           <a:ea typeface="+mn-ea"/>
-                          <a:cs typeface="+mn-cs"/>
+                          <a:cs typeface="Arial" panose="020B0604020202020204" pitchFamily="34" charset="0"/>
                         </a:rPr>
                         <a:t>0xCAFEBABE</a:t>
                       </a:r>
                       <a:r>
-                        <a:rPr lang="en-US" sz="1600"/>
+                        <a:rPr lang="en-US" sz="1600">
+                          <a:latin typeface="Arial" panose="020B0604020202020204" pitchFamily="34" charset="0"/>
+                          <a:cs typeface="Arial" panose="020B0604020202020204" pitchFamily="34" charset="0"/>
+                        </a:rPr>
                         <a:t>).</a:t>
                       </a:r>
-                      <a:endParaRPr lang="en-US" sz="1600">
-                        <a:latin typeface="Arial" panose="020B0604020202020204" pitchFamily="34" charset="0"/>
-                        <a:cs typeface="Arial" panose="020B0604020202020204" pitchFamily="34" charset="0"/>
-                      </a:endParaRPr>
                     </a:p>
                   </a:txBody>
                   <a:tcPr/>
@@ -21672,14 +22476,17 @@
                           <a:solidFill>
                             <a:schemeClr val="dk1"/>
                           </a:solidFill>
-                          <a:latin typeface="+mn-lt"/>
+                          <a:latin typeface="Arial" panose="020B0604020202020204" pitchFamily="34" charset="0"/>
                           <a:ea typeface="+mn-ea"/>
-                          <a:cs typeface="+mn-cs"/>
+                          <a:cs typeface="Arial" panose="020B0604020202020204" pitchFamily="34" charset="0"/>
                         </a:rPr>
                         <a:t>PSLVERR</a:t>
                       </a:r>
                       <a:r>
-                        <a:rPr lang="en-US" sz="1600"/>
+                        <a:rPr lang="en-US" sz="1600">
+                          <a:latin typeface="Arial" panose="020B0604020202020204" pitchFamily="34" charset="0"/>
+                          <a:cs typeface="Arial" panose="020B0604020202020204" pitchFamily="34" charset="0"/>
+                        </a:rPr>
                         <a:t> must be </a:t>
                       </a:r>
                       <a:r>
@@ -21687,20 +22494,19 @@
                           <a:solidFill>
                             <a:schemeClr val="dk1"/>
                           </a:solidFill>
-                          <a:latin typeface="+mn-lt"/>
+                          <a:latin typeface="Arial" panose="020B0604020202020204" pitchFamily="34" charset="0"/>
                           <a:ea typeface="+mn-ea"/>
-                          <a:cs typeface="+mn-cs"/>
+                          <a:cs typeface="Arial" panose="020B0604020202020204" pitchFamily="34" charset="0"/>
                         </a:rPr>
                         <a:t>0</a:t>
                       </a:r>
                       <a:r>
-                        <a:rPr lang="en-US" sz="1600"/>
+                        <a:rPr lang="en-US" sz="1600">
+                          <a:latin typeface="Arial" panose="020B0604020202020204" pitchFamily="34" charset="0"/>
+                          <a:cs typeface="Arial" panose="020B0604020202020204" pitchFamily="34" charset="0"/>
+                        </a:rPr>
                         <a:t>.</a:t>
                       </a:r>
-                      <a:endParaRPr lang="en-US" sz="1600">
-                        <a:latin typeface="Arial" panose="020B0604020202020204" pitchFamily="34" charset="0"/>
-                        <a:cs typeface="Arial" panose="020B0604020202020204" pitchFamily="34" charset="0"/>
-                      </a:endParaRPr>
                     </a:p>
                   </a:txBody>
                   <a:tcPr/>
@@ -21719,13 +22525,12 @@
                     <a:p>
                       <a:pPr algn="ctr"/>
                       <a:r>
-                        <a:rPr lang="en-US" sz="1600"/>
+                        <a:rPr lang="en-US" sz="1600">
+                          <a:latin typeface="Arial" panose="020B0604020202020204" pitchFamily="34" charset="0"/>
+                          <a:cs typeface="Arial" panose="020B0604020202020204" pitchFamily="34" charset="0"/>
+                        </a:rPr>
                         <a:t>Address Range Error</a:t>
                       </a:r>
-                      <a:endParaRPr lang="en-US" sz="1600">
-                        <a:latin typeface="Arial" panose="020B0604020202020204" pitchFamily="34" charset="0"/>
-                        <a:cs typeface="Arial" panose="020B0604020202020204" pitchFamily="34" charset="0"/>
-                      </a:endParaRPr>
                     </a:p>
                   </a:txBody>
                   <a:tcPr anchor="ctr"/>
@@ -21736,7 +22541,10 @@
                     <a:lstStyle/>
                     <a:p>
                       <a:r>
-                        <a:rPr lang="en-US" sz="1600"/>
+                        <a:rPr lang="en-US" sz="1600">
+                          <a:latin typeface="Arial" panose="020B0604020202020204" pitchFamily="34" charset="0"/>
+                          <a:cs typeface="Arial" panose="020B0604020202020204" pitchFamily="34" charset="0"/>
+                        </a:rPr>
                         <a:t>Access (Read/Write) address </a:t>
                       </a:r>
                       <a:r>
@@ -21744,20 +22552,19 @@
                           <a:solidFill>
                             <a:schemeClr val="dk1"/>
                           </a:solidFill>
-                          <a:latin typeface="+mn-lt"/>
+                          <a:latin typeface="Arial" panose="020B0604020202020204" pitchFamily="34" charset="0"/>
                           <a:ea typeface="+mn-ea"/>
-                          <a:cs typeface="+mn-cs"/>
+                          <a:cs typeface="Arial" panose="020B0604020202020204" pitchFamily="34" charset="0"/>
                         </a:rPr>
                         <a:t>0x500</a:t>
                       </a:r>
                       <a:r>
-                        <a:rPr lang="en-US" sz="1600"/>
+                        <a:rPr lang="en-US" sz="1600">
+                          <a:latin typeface="Arial" panose="020B0604020202020204" pitchFamily="34" charset="0"/>
+                          <a:cs typeface="Arial" panose="020B0604020202020204" pitchFamily="34" charset="0"/>
+                        </a:rPr>
                         <a:t> (decimal 1280), which exceeds the memory size (1024) of the Slave.</a:t>
                       </a:r>
-                      <a:endParaRPr lang="en-US" sz="1600">
-                        <a:latin typeface="Arial" panose="020B0604020202020204" pitchFamily="34" charset="0"/>
-                        <a:cs typeface="Arial" panose="020B0604020202020204" pitchFamily="34" charset="0"/>
-                      </a:endParaRPr>
                     </a:p>
                   </a:txBody>
                   <a:tcPr/>
@@ -21769,7 +22576,10 @@
                     <a:p>
                       <a:pPr algn="just"/>
                       <a:r>
-                        <a:rPr lang="en-US" sz="1600"/>
+                        <a:rPr lang="en-US" sz="1600">
+                          <a:latin typeface="Arial" panose="020B0604020202020204" pitchFamily="34" charset="0"/>
+                          <a:cs typeface="Arial" panose="020B0604020202020204" pitchFamily="34" charset="0"/>
+                        </a:rPr>
                         <a:t>Slave must still respond with </a:t>
                       </a:r>
                       <a:r>
@@ -21777,20 +22587,19 @@
                           <a:solidFill>
                             <a:schemeClr val="dk1"/>
                           </a:solidFill>
-                          <a:latin typeface="+mn-lt"/>
+                          <a:latin typeface="Arial" panose="020B0604020202020204" pitchFamily="34" charset="0"/>
                           <a:ea typeface="+mn-ea"/>
-                          <a:cs typeface="+mn-cs"/>
+                          <a:cs typeface="Arial" panose="020B0604020202020204" pitchFamily="34" charset="0"/>
                         </a:rPr>
                         <a:t>PREADY = 1</a:t>
                       </a:r>
                       <a:r>
-                        <a:rPr lang="en-US" sz="1600"/>
+                        <a:rPr lang="en-US" sz="1600">
+                          <a:latin typeface="Arial" panose="020B0604020202020204" pitchFamily="34" charset="0"/>
+                          <a:cs typeface="Arial" panose="020B0604020202020204" pitchFamily="34" charset="0"/>
+                        </a:rPr>
                         <a:t>.</a:t>
                       </a:r>
-                      <a:endParaRPr lang="en-US" sz="1600">
-                        <a:latin typeface="Arial" panose="020B0604020202020204" pitchFamily="34" charset="0"/>
-                        <a:cs typeface="Arial" panose="020B0604020202020204" pitchFamily="34" charset="0"/>
-                      </a:endParaRPr>
                     </a:p>
                   </a:txBody>
                   <a:tcPr/>
@@ -21840,20 +22649,19 @@
                           <a:solidFill>
                             <a:schemeClr val="dk1"/>
                           </a:solidFill>
-                          <a:latin typeface="+mn-lt"/>
+                          <a:latin typeface="Arial" panose="020B0604020202020204" pitchFamily="34" charset="0"/>
                           <a:ea typeface="+mn-ea"/>
-                          <a:cs typeface="+mn-cs"/>
+                          <a:cs typeface="Arial" panose="020B0604020202020204" pitchFamily="34" charset="0"/>
                         </a:rPr>
                         <a:t>PSLVERR</a:t>
                       </a:r>
                       <a:r>
-                        <a:rPr lang="en-US" sz="1600"/>
+                        <a:rPr lang="en-US" sz="1600">
+                          <a:latin typeface="Arial" panose="020B0604020202020204" pitchFamily="34" charset="0"/>
+                          <a:cs typeface="Arial" panose="020B0604020202020204" pitchFamily="34" charset="0"/>
+                        </a:rPr>
                         <a:t> signal must be asserted (logic 1) during both Write and Read cycles.</a:t>
                       </a:r>
-                      <a:endParaRPr lang="en-US" sz="1600">
-                        <a:latin typeface="Arial" panose="020B0604020202020204" pitchFamily="34" charset="0"/>
-                        <a:cs typeface="Arial" panose="020B0604020202020204" pitchFamily="34" charset="0"/>
-                      </a:endParaRPr>
                     </a:p>
                   </a:txBody>
                   <a:tcPr/>
@@ -21899,7 +22707,10 @@
                     <a:p>
                       <a:pPr algn="just"/>
                       <a:r>
-                        <a:rPr lang="en-US" sz="1600"/>
+                        <a:rPr lang="en-US" sz="1600">
+                          <a:latin typeface="Arial" panose="020B0604020202020204" pitchFamily="34" charset="0"/>
+                          <a:cs typeface="Arial" panose="020B0604020202020204" pitchFamily="34" charset="0"/>
+                        </a:rPr>
                         <a:t>Read data should return </a:t>
                       </a:r>
                       <a:r>
@@ -21907,20 +22718,19 @@
                           <a:solidFill>
                             <a:schemeClr val="dk1"/>
                           </a:solidFill>
-                          <a:latin typeface="+mn-lt"/>
+                          <a:latin typeface="Arial" panose="020B0604020202020204" pitchFamily="34" charset="0"/>
                           <a:ea typeface="+mn-ea"/>
-                          <a:cs typeface="+mn-cs"/>
+                          <a:cs typeface="Arial" panose="020B0604020202020204" pitchFamily="34" charset="0"/>
                         </a:rPr>
                         <a:t>0</a:t>
                       </a:r>
                       <a:r>
-                        <a:rPr lang="en-US" sz="1600"/>
+                        <a:rPr lang="en-US" sz="1600">
+                          <a:latin typeface="Arial" panose="020B0604020202020204" pitchFamily="34" charset="0"/>
+                          <a:cs typeface="Arial" panose="020B0604020202020204" pitchFamily="34" charset="0"/>
+                        </a:rPr>
                         <a:t>.</a:t>
                       </a:r>
-                      <a:endParaRPr lang="en-US" sz="1600">
-                        <a:latin typeface="Arial" panose="020B0604020202020204" pitchFamily="34" charset="0"/>
-                        <a:cs typeface="Arial" panose="020B0604020202020204" pitchFamily="34" charset="0"/>
-                      </a:endParaRPr>
                     </a:p>
                   </a:txBody>
                   <a:tcPr/>
@@ -21948,7 +22758,1209 @@
 </p:sld>
 </file>
 
-<file path=ppt/slides/slide37.xml><?xml version="1.0" encoding="utf-8"?>
+<file path=ppt/slides/slide39.xml><?xml version="1.0" encoding="utf-8"?>
+<p:sld xmlns:a="http://schemas.openxmlformats.org/drawingml/2006/main" xmlns:r="http://schemas.openxmlformats.org/officeDocument/2006/relationships" xmlns:p="http://schemas.openxmlformats.org/presentationml/2006/main" showMasterSp="0">
+  <p:cSld>
+    <p:spTree>
+      <p:nvGrpSpPr>
+        <p:cNvPr id="1" name="">
+          <a:extLst>
+            <a:ext uri="{FF2B5EF4-FFF2-40B4-BE49-F238E27FC236}">
+              <a16:creationId xmlns:a16="http://schemas.microsoft.com/office/drawing/2014/main" id="{6E7A0446-7F17-5564-A7F0-1527D8CD7999}"/>
+            </a:ext>
+          </a:extLst>
+        </p:cNvPr>
+        <p:cNvGrpSpPr/>
+        <p:nvPr/>
+      </p:nvGrpSpPr>
+      <p:grpSpPr>
+        <a:xfrm>
+          <a:off x="0" y="0"/>
+          <a:ext cx="0" cy="0"/>
+          <a:chOff x="0" y="0"/>
+          <a:chExt cx="0" cy="0"/>
+        </a:xfrm>
+      </p:grpSpPr>
+      <p:sp>
+        <p:nvSpPr>
+          <p:cNvPr id="2" name="object 2">
+            <a:extLst>
+              <a:ext uri="{FF2B5EF4-FFF2-40B4-BE49-F238E27FC236}">
+                <a16:creationId xmlns:a16="http://schemas.microsoft.com/office/drawing/2014/main" id="{255B472B-C6B7-169E-2948-2DAEA8F78BFB}"/>
+              </a:ext>
+            </a:extLst>
+          </p:cNvPr>
+          <p:cNvSpPr txBox="1">
+            <a:spLocks noGrp="1"/>
+          </p:cNvSpPr>
+          <p:nvPr>
+            <p:ph type="title"/>
+          </p:nvPr>
+        </p:nvSpPr>
+        <p:spPr>
+          <a:xfrm>
+            <a:off x="508317" y="370616"/>
+            <a:ext cx="7871459" cy="678231"/>
+          </a:xfrm>
+          <a:prstGeom prst="rect">
+            <a:avLst/>
+          </a:prstGeom>
+        </p:spPr>
+        <p:txBody>
+          <a:bodyPr vert="horz" wrap="square" lIns="0" tIns="123032" rIns="0" bIns="0" rtlCol="0">
+            <a:spAutoFit/>
+          </a:bodyPr>
+          <a:lstStyle/>
+          <a:p>
+            <a:pPr marL="12700">
+              <a:lnSpc>
+                <a:spcPct val="100000"/>
+              </a:lnSpc>
+              <a:spcBef>
+                <a:spcPts val="105"/>
+              </a:spcBef>
+            </a:pPr>
+            <a:r>
+              <a:rPr lang="en-US"/>
+              <a:t>4.</a:t>
+            </a:r>
+            <a:r>
+              <a:rPr lang="en-US" spc="-85"/>
+              <a:t> </a:t>
+            </a:r>
+            <a:r>
+              <a:rPr lang="en-US"/>
+              <a:t>RTL</a:t>
+            </a:r>
+            <a:r>
+              <a:rPr lang="en-US" spc="-110"/>
+              <a:t> </a:t>
+            </a:r>
+            <a:r>
+              <a:rPr lang="en-US" spc="-20"/>
+              <a:t>Verification</a:t>
+            </a:r>
+            <a:endParaRPr spc="-10" dirty="0"/>
+          </a:p>
+        </p:txBody>
+      </p:sp>
+      <p:sp>
+        <p:nvSpPr>
+          <p:cNvPr id="7" name="object 7">
+            <a:extLst>
+              <a:ext uri="{FF2B5EF4-FFF2-40B4-BE49-F238E27FC236}">
+                <a16:creationId xmlns:a16="http://schemas.microsoft.com/office/drawing/2014/main" id="{9FAD5252-EAA5-0AE2-F84F-C1BF282E2708}"/>
+              </a:ext>
+            </a:extLst>
+          </p:cNvPr>
+          <p:cNvSpPr txBox="1">
+            <a:spLocks noGrp="1"/>
+          </p:cNvSpPr>
+          <p:nvPr>
+            <p:ph type="dt" sz="half" idx="6"/>
+          </p:nvPr>
+        </p:nvSpPr>
+        <p:spPr>
+          <a:prstGeom prst="rect">
+            <a:avLst/>
+          </a:prstGeom>
+        </p:spPr>
+        <p:txBody>
+          <a:bodyPr vert="horz" wrap="square" lIns="0" tIns="6350" rIns="0" bIns="0" rtlCol="0">
+            <a:spAutoFit/>
+          </a:bodyPr>
+          <a:lstStyle/>
+          <a:p>
+            <a:pPr marL="12700">
+              <a:lnSpc>
+                <a:spcPct val="100000"/>
+              </a:lnSpc>
+              <a:spcBef>
+                <a:spcPts val="50"/>
+              </a:spcBef>
+            </a:pPr>
+            <a:r>
+              <a:rPr dirty="0"/>
+              <a:t>Thiết</a:t>
+            </a:r>
+            <a:r>
+              <a:rPr spc="-20" dirty="0"/>
+              <a:t> </a:t>
+            </a:r>
+            <a:r>
+              <a:rPr dirty="0"/>
+              <a:t>Kế</a:t>
+            </a:r>
+            <a:r>
+              <a:rPr spc="-40" dirty="0"/>
+              <a:t> </a:t>
+            </a:r>
+            <a:r>
+              <a:rPr dirty="0"/>
+              <a:t>Vi</a:t>
+            </a:r>
+            <a:r>
+              <a:rPr spc="10" dirty="0"/>
+              <a:t> </a:t>
+            </a:r>
+            <a:r>
+              <a:rPr spc="-20" dirty="0"/>
+              <a:t>Mạch</a:t>
+            </a:r>
+          </a:p>
+        </p:txBody>
+      </p:sp>
+      <p:sp>
+        <p:nvSpPr>
+          <p:cNvPr id="8" name="object 8">
+            <a:extLst>
+              <a:ext uri="{FF2B5EF4-FFF2-40B4-BE49-F238E27FC236}">
+                <a16:creationId xmlns:a16="http://schemas.microsoft.com/office/drawing/2014/main" id="{676CC1E4-BAE9-F21D-1C9F-2791B7C2CF3C}"/>
+              </a:ext>
+            </a:extLst>
+          </p:cNvPr>
+          <p:cNvSpPr txBox="1">
+            <a:spLocks noGrp="1"/>
+          </p:cNvSpPr>
+          <p:nvPr>
+            <p:ph type="sldNum" sz="quarter" idx="7"/>
+          </p:nvPr>
+        </p:nvSpPr>
+        <p:spPr>
+          <a:prstGeom prst="rect">
+            <a:avLst/>
+          </a:prstGeom>
+        </p:spPr>
+        <p:txBody>
+          <a:bodyPr vert="horz" wrap="square" lIns="0" tIns="6350" rIns="0" bIns="0" rtlCol="0">
+            <a:spAutoFit/>
+          </a:bodyPr>
+          <a:lstStyle/>
+          <a:p>
+            <a:pPr marL="38100">
+              <a:lnSpc>
+                <a:spcPct val="100000"/>
+              </a:lnSpc>
+              <a:spcBef>
+                <a:spcPts val="50"/>
+              </a:spcBef>
+            </a:pPr>
+            <a:fld id="{81D60167-4931-47E6-BA6A-407CBD079E47}" type="slidenum">
+              <a:rPr spc="-25" dirty="0"/>
+              <a:t>39</a:t>
+            </a:fld>
+            <a:endParaRPr spc="-25" dirty="0"/>
+          </a:p>
+        </p:txBody>
+      </p:sp>
+      <p:sp>
+        <p:nvSpPr>
+          <p:cNvPr id="9" name="object 9">
+            <a:extLst>
+              <a:ext uri="{FF2B5EF4-FFF2-40B4-BE49-F238E27FC236}">
+                <a16:creationId xmlns:a16="http://schemas.microsoft.com/office/drawing/2014/main" id="{504A900D-6706-3210-B994-B9B506635B19}"/>
+              </a:ext>
+            </a:extLst>
+          </p:cNvPr>
+          <p:cNvSpPr txBox="1">
+            <a:spLocks noGrp="1"/>
+          </p:cNvSpPr>
+          <p:nvPr>
+            <p:ph type="ftr" sz="quarter" idx="5"/>
+          </p:nvPr>
+        </p:nvSpPr>
+        <p:spPr>
+          <a:prstGeom prst="rect">
+            <a:avLst/>
+          </a:prstGeom>
+        </p:spPr>
+        <p:txBody>
+          <a:bodyPr vert="horz" wrap="square" lIns="0" tIns="5715" rIns="0" bIns="0" rtlCol="0">
+            <a:spAutoFit/>
+          </a:bodyPr>
+          <a:lstStyle/>
+          <a:p>
+            <a:pPr marL="12700">
+              <a:lnSpc>
+                <a:spcPct val="100000"/>
+              </a:lnSpc>
+              <a:spcBef>
+                <a:spcPts val="45"/>
+              </a:spcBef>
+            </a:pPr>
+            <a:r>
+              <a:rPr dirty="0"/>
+              <a:t>©</a:t>
+            </a:r>
+            <a:r>
+              <a:rPr spc="-45" dirty="0"/>
+              <a:t> </a:t>
+            </a:r>
+            <a:r>
+              <a:rPr dirty="0"/>
+              <a:t>2025</a:t>
+            </a:r>
+            <a:r>
+              <a:rPr spc="-15" dirty="0"/>
+              <a:t> </a:t>
+            </a:r>
+            <a:r>
+              <a:rPr dirty="0"/>
+              <a:t>–</a:t>
+            </a:r>
+            <a:r>
+              <a:rPr spc="-20" dirty="0"/>
+              <a:t> </a:t>
+            </a:r>
+            <a:r>
+              <a:rPr dirty="0"/>
+              <a:t>Long</a:t>
+            </a:r>
+            <a:r>
+              <a:rPr spc="-10" dirty="0"/>
+              <a:t> Hoang</a:t>
+            </a:r>
+          </a:p>
+        </p:txBody>
+      </p:sp>
+      <p:sp>
+        <p:nvSpPr>
+          <p:cNvPr id="3" name="object 3">
+            <a:extLst>
+              <a:ext uri="{FF2B5EF4-FFF2-40B4-BE49-F238E27FC236}">
+                <a16:creationId xmlns:a16="http://schemas.microsoft.com/office/drawing/2014/main" id="{FDF47E7D-FE0D-706A-FE80-ED446F54EE74}"/>
+              </a:ext>
+            </a:extLst>
+          </p:cNvPr>
+          <p:cNvSpPr txBox="1"/>
+          <p:nvPr/>
+        </p:nvSpPr>
+        <p:spPr>
+          <a:xfrm>
+            <a:off x="508317" y="1121155"/>
+            <a:ext cx="5435283" cy="475130"/>
+          </a:xfrm>
+          <a:prstGeom prst="rect">
+            <a:avLst/>
+          </a:prstGeom>
+        </p:spPr>
+        <p:txBody>
+          <a:bodyPr vert="horz" wrap="square" lIns="0" tIns="13335" rIns="0" bIns="0" rtlCol="0">
+            <a:spAutoFit/>
+          </a:bodyPr>
+          <a:lstStyle/>
+          <a:p>
+            <a:pPr marL="12700">
+              <a:lnSpc>
+                <a:spcPct val="100000"/>
+              </a:lnSpc>
+              <a:spcBef>
+                <a:spcPts val="105"/>
+              </a:spcBef>
+            </a:pPr>
+            <a:r>
+              <a:rPr lang="en-US" sz="3000" b="1">
+                <a:solidFill>
+                  <a:srgbClr val="7C45AD"/>
+                </a:solidFill>
+                <a:latin typeface="Arial"/>
+                <a:cs typeface="Arial"/>
+              </a:rPr>
+              <a:t>4.2 Verification Plans</a:t>
+            </a:r>
+            <a:endParaRPr sz="3000">
+              <a:latin typeface="Arial"/>
+              <a:cs typeface="Arial"/>
+            </a:endParaRPr>
+          </a:p>
+        </p:txBody>
+      </p:sp>
+      <p:graphicFrame>
+        <p:nvGraphicFramePr>
+          <p:cNvPr id="4" name="Table 3">
+            <a:extLst>
+              <a:ext uri="{FF2B5EF4-FFF2-40B4-BE49-F238E27FC236}">
+                <a16:creationId xmlns:a16="http://schemas.microsoft.com/office/drawing/2014/main" id="{DF5D3D98-8FFF-1B29-4739-D65A08825AB7}"/>
+              </a:ext>
+            </a:extLst>
+          </p:cNvPr>
+          <p:cNvGraphicFramePr>
+            <a:graphicFrameLocks noGrp="1"/>
+          </p:cNvGraphicFramePr>
+          <p:nvPr>
+            <p:extLst>
+              <p:ext uri="{D42A27DB-BD31-4B8C-83A1-F6EECF244321}">
+                <p14:modId xmlns:p14="http://schemas.microsoft.com/office/powerpoint/2010/main" val="477032141"/>
+              </p:ext>
+            </p:extLst>
+          </p:nvPr>
+        </p:nvGraphicFramePr>
+        <p:xfrm>
+          <a:off x="508317" y="1668593"/>
+          <a:ext cx="11199176" cy="3535680"/>
+        </p:xfrm>
+        <a:graphic>
+          <a:graphicData uri="http://schemas.openxmlformats.org/drawingml/2006/table">
+            <a:tbl>
+              <a:tblPr firstRow="1" bandRow="1">
+                <a:tableStyleId>{00A15C55-8517-42AA-B614-E9B94910E393}</a:tableStyleId>
+              </a:tblPr>
+              <a:tblGrid>
+                <a:gridCol w="1930083">
+                  <a:extLst>
+                    <a:ext uri="{9D8B030D-6E8A-4147-A177-3AD203B41FA5}">
+                      <a16:colId xmlns:a16="http://schemas.microsoft.com/office/drawing/2014/main" val="579931218"/>
+                    </a:ext>
+                  </a:extLst>
+                </a:gridCol>
+                <a:gridCol w="5536034">
+                  <a:extLst>
+                    <a:ext uri="{9D8B030D-6E8A-4147-A177-3AD203B41FA5}">
+                      <a16:colId xmlns:a16="http://schemas.microsoft.com/office/drawing/2014/main" val="1158279828"/>
+                    </a:ext>
+                  </a:extLst>
+                </a:gridCol>
+                <a:gridCol w="3733059">
+                  <a:extLst>
+                    <a:ext uri="{9D8B030D-6E8A-4147-A177-3AD203B41FA5}">
+                      <a16:colId xmlns:a16="http://schemas.microsoft.com/office/drawing/2014/main" val="1379675645"/>
+                    </a:ext>
+                  </a:extLst>
+                </a:gridCol>
+              </a:tblGrid>
+              <a:tr h="198120">
+                <a:tc>
+                  <a:txBody>
+                    <a:bodyPr/>
+                    <a:lstStyle/>
+                    <a:p>
+                      <a:pPr algn="ctr"/>
+                      <a:r>
+                        <a:rPr lang="en-US" sz="1600">
+                          <a:latin typeface="Arial" panose="020B0604020202020204" pitchFamily="34" charset="0"/>
+                          <a:cs typeface="Arial" panose="020B0604020202020204" pitchFamily="34" charset="0"/>
+                        </a:rPr>
+                        <a:t>Test case</a:t>
+                      </a:r>
+                    </a:p>
+                  </a:txBody>
+                  <a:tcPr>
+                    <a:solidFill>
+                      <a:srgbClr val="7030A0"/>
+                    </a:solidFill>
+                  </a:tcPr>
+                </a:tc>
+                <a:tc>
+                  <a:txBody>
+                    <a:bodyPr/>
+                    <a:lstStyle/>
+                    <a:p>
+                      <a:pPr algn="ctr"/>
+                      <a:r>
+                        <a:rPr lang="en-US" sz="1600">
+                          <a:latin typeface="Arial" panose="020B0604020202020204" pitchFamily="34" charset="0"/>
+                          <a:cs typeface="Arial" panose="020B0604020202020204" pitchFamily="34" charset="0"/>
+                        </a:rPr>
+                        <a:t>Descriptions</a:t>
+                      </a:r>
+                    </a:p>
+                  </a:txBody>
+                  <a:tcPr>
+                    <a:solidFill>
+                      <a:srgbClr val="7030A0"/>
+                    </a:solidFill>
+                  </a:tcPr>
+                </a:tc>
+                <a:tc>
+                  <a:txBody>
+                    <a:bodyPr/>
+                    <a:lstStyle/>
+                    <a:p>
+                      <a:pPr algn="ctr"/>
+                      <a:r>
+                        <a:rPr lang="en-US" sz="1600">
+                          <a:latin typeface="Arial" panose="020B0604020202020204" pitchFamily="34" charset="0"/>
+                          <a:cs typeface="Arial" panose="020B0604020202020204" pitchFamily="34" charset="0"/>
+                        </a:rPr>
+                        <a:t>Expected results</a:t>
+                      </a:r>
+                    </a:p>
+                  </a:txBody>
+                  <a:tcPr>
+                    <a:solidFill>
+                      <a:srgbClr val="7030A0"/>
+                    </a:solidFill>
+                  </a:tcPr>
+                </a:tc>
+                <a:extLst>
+                  <a:ext uri="{0D108BD9-81ED-4DB2-BD59-A6C34878D82A}">
+                    <a16:rowId xmlns:a16="http://schemas.microsoft.com/office/drawing/2014/main" val="539352098"/>
+                  </a:ext>
+                </a:extLst>
+              </a:tr>
+              <a:tr h="0">
+                <a:tc rowSpan="3">
+                  <a:txBody>
+                    <a:bodyPr/>
+                    <a:lstStyle/>
+                    <a:p>
+                      <a:pPr algn="ctr"/>
+                      <a:r>
+                        <a:rPr lang="en-US" sz="1600">
+                          <a:latin typeface="Arial" panose="020B0604020202020204" pitchFamily="34" charset="0"/>
+                          <a:cs typeface="Arial" panose="020B0604020202020204" pitchFamily="34" charset="0"/>
+                        </a:rPr>
+                        <a:t>Write/Read with Dynamic Wait States</a:t>
+                      </a:r>
+                    </a:p>
+                  </a:txBody>
+                  <a:tcPr anchor="ctr"/>
+                </a:tc>
+                <a:tc rowSpan="3">
+                  <a:txBody>
+                    <a:bodyPr/>
+                    <a:lstStyle/>
+                    <a:p>
+                      <a:pPr algn="just"/>
+                      <a:r>
+                        <a:rPr lang="en-US" sz="1600">
+                          <a:latin typeface="Arial" panose="020B0604020202020204" pitchFamily="34" charset="0"/>
+                          <a:cs typeface="Arial" panose="020B0604020202020204" pitchFamily="34" charset="0"/>
+                        </a:rPr>
+                        <a:t>Perform Write and Read transactions using addresses with specific last two bits (</a:t>
+                      </a:r>
+                      <a:r>
+                        <a:rPr lang="en-US" sz="1600">
+                          <a:solidFill>
+                            <a:schemeClr val="dk1"/>
+                          </a:solidFill>
+                          <a:latin typeface="Arial" panose="020B0604020202020204" pitchFamily="34" charset="0"/>
+                          <a:ea typeface="+mn-ea"/>
+                          <a:cs typeface="Arial" panose="020B0604020202020204" pitchFamily="34" charset="0"/>
+                        </a:rPr>
+                        <a:t>PADDR[1:0]</a:t>
+                      </a:r>
+                      <a:r>
+                        <a:rPr lang="en-US" sz="1600">
+                          <a:latin typeface="Arial" panose="020B0604020202020204" pitchFamily="34" charset="0"/>
+                          <a:cs typeface="Arial" panose="020B0604020202020204" pitchFamily="34" charset="0"/>
+                        </a:rPr>
+                        <a:t>, e.g., </a:t>
+                      </a:r>
+                      <a:r>
+                        <a:rPr lang="en-US" sz="1600">
+                          <a:solidFill>
+                            <a:schemeClr val="dk1"/>
+                          </a:solidFill>
+                          <a:latin typeface="Arial" panose="020B0604020202020204" pitchFamily="34" charset="0"/>
+                          <a:ea typeface="+mn-ea"/>
+                          <a:cs typeface="Arial" panose="020B0604020202020204" pitchFamily="34" charset="0"/>
+                        </a:rPr>
+                        <a:t>...03</a:t>
+                      </a:r>
+                      <a:r>
+                        <a:rPr lang="en-US" sz="1600">
+                          <a:latin typeface="Arial" panose="020B0604020202020204" pitchFamily="34" charset="0"/>
+                          <a:cs typeface="Arial" panose="020B0604020202020204" pitchFamily="34" charset="0"/>
+                        </a:rPr>
+                        <a:t> and </a:t>
+                      </a:r>
+                      <a:r>
+                        <a:rPr lang="en-US" sz="1600">
+                          <a:solidFill>
+                            <a:schemeClr val="dk1"/>
+                          </a:solidFill>
+                          <a:latin typeface="Arial" panose="020B0604020202020204" pitchFamily="34" charset="0"/>
+                          <a:ea typeface="+mn-ea"/>
+                          <a:cs typeface="Arial" panose="020B0604020202020204" pitchFamily="34" charset="0"/>
+                        </a:rPr>
+                        <a:t>...01</a:t>
+                      </a:r>
+                      <a:r>
+                        <a:rPr lang="en-US" sz="1600">
+                          <a:latin typeface="Arial" panose="020B0604020202020204" pitchFamily="34" charset="0"/>
+                          <a:cs typeface="Arial" panose="020B0604020202020204" pitchFamily="34" charset="0"/>
+                        </a:rPr>
+                        <a:t>) to trigger the Slave's delayed response mechanism.</a:t>
+                      </a:r>
+                    </a:p>
+                  </a:txBody>
+                  <a:tcPr/>
+                </a:tc>
+                <a:tc>
+                  <a:txBody>
+                    <a:bodyPr/>
+                    <a:lstStyle/>
+                    <a:p>
+                      <a:pPr marL="0" marR="0" lvl="0" indent="0" algn="just" defTabSz="914400" eaLnBrk="1" fontAlgn="auto" latinLnBrk="0" hangingPunct="1">
+                        <a:lnSpc>
+                          <a:spcPct val="100000"/>
+                        </a:lnSpc>
+                        <a:spcBef>
+                          <a:spcPts val="0"/>
+                        </a:spcBef>
+                        <a:spcAft>
+                          <a:spcPts val="0"/>
+                        </a:spcAft>
+                        <a:buClrTx/>
+                        <a:buSzTx/>
+                        <a:buFontTx/>
+                        <a:buNone/>
+                        <a:tabLst/>
+                        <a:defRPr/>
+                      </a:pPr>
+                      <a:r>
+                        <a:rPr lang="en-US" sz="1600">
+                          <a:latin typeface="Arial" panose="020B0604020202020204" pitchFamily="34" charset="0"/>
+                          <a:cs typeface="Arial" panose="020B0604020202020204" pitchFamily="34" charset="0"/>
+                        </a:rPr>
+                        <a:t>Master must maintain the </a:t>
+                      </a:r>
+                      <a:r>
+                        <a:rPr lang="en-US" sz="1600" b="1">
+                          <a:latin typeface="Arial" panose="020B0604020202020204" pitchFamily="34" charset="0"/>
+                          <a:cs typeface="Arial" panose="020B0604020202020204" pitchFamily="34" charset="0"/>
+                        </a:rPr>
+                        <a:t>ACCESS</a:t>
+                      </a:r>
+                      <a:r>
+                        <a:rPr lang="en-US" sz="1600">
+                          <a:latin typeface="Arial" panose="020B0604020202020204" pitchFamily="34" charset="0"/>
+                          <a:cs typeface="Arial" panose="020B0604020202020204" pitchFamily="34" charset="0"/>
+                        </a:rPr>
+                        <a:t> state (PENABLE=1) and keep address/data stable throughout the wait cycles.</a:t>
+                      </a:r>
+                    </a:p>
+                  </a:txBody>
+                  <a:tcPr/>
+                </a:tc>
+                <a:extLst>
+                  <a:ext uri="{0D108BD9-81ED-4DB2-BD59-A6C34878D82A}">
+                    <a16:rowId xmlns:a16="http://schemas.microsoft.com/office/drawing/2014/main" val="1815105458"/>
+                  </a:ext>
+                </a:extLst>
+              </a:tr>
+              <a:tr h="0">
+                <a:tc vMerge="1">
+                  <a:txBody>
+                    <a:bodyPr/>
+                    <a:lstStyle/>
+                    <a:p>
+                      <a:pPr algn="ctr"/>
+                      <a:endParaRPr lang="en-US" sz="1600">
+                        <a:latin typeface="Arial" panose="020B0604020202020204" pitchFamily="34" charset="0"/>
+                        <a:cs typeface="Arial" panose="020B0604020202020204" pitchFamily="34" charset="0"/>
+                      </a:endParaRPr>
+                    </a:p>
+                  </a:txBody>
+                  <a:tcPr anchor="ctr"/>
+                </a:tc>
+                <a:tc vMerge="1">
+                  <a:txBody>
+                    <a:bodyPr/>
+                    <a:lstStyle/>
+                    <a:p>
+                      <a:pPr algn="just"/>
+                      <a:endParaRPr lang="en-US" sz="1600">
+                        <a:latin typeface="Arial" panose="020B0604020202020204" pitchFamily="34" charset="0"/>
+                        <a:cs typeface="Arial" panose="020B0604020202020204" pitchFamily="34" charset="0"/>
+                      </a:endParaRPr>
+                    </a:p>
+                  </a:txBody>
+                  <a:tcPr/>
+                </a:tc>
+                <a:tc>
+                  <a:txBody>
+                    <a:bodyPr/>
+                    <a:lstStyle/>
+                    <a:p>
+                      <a:pPr marL="0" marR="0" lvl="0" indent="0" algn="just" defTabSz="914400" eaLnBrk="1" fontAlgn="auto" latinLnBrk="0" hangingPunct="1">
+                        <a:lnSpc>
+                          <a:spcPct val="100000"/>
+                        </a:lnSpc>
+                        <a:spcBef>
+                          <a:spcPts val="0"/>
+                        </a:spcBef>
+                        <a:spcAft>
+                          <a:spcPts val="0"/>
+                        </a:spcAft>
+                        <a:buClrTx/>
+                        <a:buSzTx/>
+                        <a:buFontTx/>
+                        <a:buNone/>
+                        <a:tabLst/>
+                        <a:defRPr/>
+                      </a:pPr>
+                      <a:r>
+                        <a:rPr lang="en-US" sz="1600">
+                          <a:latin typeface="Arial" panose="020B0604020202020204" pitchFamily="34" charset="0"/>
+                          <a:cs typeface="Arial" panose="020B0604020202020204" pitchFamily="34" charset="0"/>
+                        </a:rPr>
+                        <a:t>For an address ending in </a:t>
+                      </a:r>
+                      <a:r>
+                        <a:rPr lang="en-US" sz="1600">
+                          <a:solidFill>
+                            <a:schemeClr val="dk1"/>
+                          </a:solidFill>
+                          <a:latin typeface="Arial" panose="020B0604020202020204" pitchFamily="34" charset="0"/>
+                          <a:ea typeface="+mn-ea"/>
+                          <a:cs typeface="Arial" panose="020B0604020202020204" pitchFamily="34" charset="0"/>
+                        </a:rPr>
+                        <a:t>...03</a:t>
+                      </a:r>
+                      <a:r>
+                        <a:rPr lang="en-US" sz="1600">
+                          <a:latin typeface="Arial" panose="020B0604020202020204" pitchFamily="34" charset="0"/>
+                          <a:cs typeface="Arial" panose="020B0604020202020204" pitchFamily="34" charset="0"/>
+                        </a:rPr>
+                        <a:t>, the Slave must hold </a:t>
+                      </a:r>
+                      <a:r>
+                        <a:rPr lang="en-US" sz="1600">
+                          <a:solidFill>
+                            <a:schemeClr val="dk1"/>
+                          </a:solidFill>
+                          <a:latin typeface="Arial" panose="020B0604020202020204" pitchFamily="34" charset="0"/>
+                          <a:ea typeface="+mn-ea"/>
+                          <a:cs typeface="Arial" panose="020B0604020202020204" pitchFamily="34" charset="0"/>
+                        </a:rPr>
+                        <a:t>PREADY</a:t>
+                      </a:r>
+                      <a:r>
+                        <a:rPr lang="en-US" sz="1600">
+                          <a:latin typeface="Arial" panose="020B0604020202020204" pitchFamily="34" charset="0"/>
+                          <a:cs typeface="Arial" panose="020B0604020202020204" pitchFamily="34" charset="0"/>
+                        </a:rPr>
+                        <a:t> low for exactly 3 clock cycles before completion.</a:t>
+                      </a:r>
+                    </a:p>
+                  </a:txBody>
+                  <a:tcPr/>
+                </a:tc>
+                <a:extLst>
+                  <a:ext uri="{0D108BD9-81ED-4DB2-BD59-A6C34878D82A}">
+                    <a16:rowId xmlns:a16="http://schemas.microsoft.com/office/drawing/2014/main" val="3378172955"/>
+                  </a:ext>
+                </a:extLst>
+              </a:tr>
+              <a:tr h="0">
+                <a:tc vMerge="1">
+                  <a:txBody>
+                    <a:bodyPr/>
+                    <a:lstStyle/>
+                    <a:p>
+                      <a:pPr algn="ctr"/>
+                      <a:endParaRPr lang="en-US" sz="1600">
+                        <a:latin typeface="Arial" panose="020B0604020202020204" pitchFamily="34" charset="0"/>
+                        <a:cs typeface="Arial" panose="020B0604020202020204" pitchFamily="34" charset="0"/>
+                      </a:endParaRPr>
+                    </a:p>
+                  </a:txBody>
+                  <a:tcPr anchor="ctr"/>
+                </a:tc>
+                <a:tc vMerge="1">
+                  <a:txBody>
+                    <a:bodyPr/>
+                    <a:lstStyle/>
+                    <a:p>
+                      <a:pPr algn="just"/>
+                      <a:endParaRPr lang="en-US" sz="1600">
+                        <a:latin typeface="Arial" panose="020B0604020202020204" pitchFamily="34" charset="0"/>
+                        <a:cs typeface="Arial" panose="020B0604020202020204" pitchFamily="34" charset="0"/>
+                      </a:endParaRPr>
+                    </a:p>
+                  </a:txBody>
+                  <a:tcPr/>
+                </a:tc>
+                <a:tc>
+                  <a:txBody>
+                    <a:bodyPr/>
+                    <a:lstStyle/>
+                    <a:p>
+                      <a:pPr marL="0" marR="0" lvl="0" indent="0" algn="just" defTabSz="914400" eaLnBrk="1" fontAlgn="auto" latinLnBrk="0" hangingPunct="1">
+                        <a:lnSpc>
+                          <a:spcPct val="100000"/>
+                        </a:lnSpc>
+                        <a:spcBef>
+                          <a:spcPts val="0"/>
+                        </a:spcBef>
+                        <a:spcAft>
+                          <a:spcPts val="0"/>
+                        </a:spcAft>
+                        <a:buClrTx/>
+                        <a:buSzTx/>
+                        <a:buFontTx/>
+                        <a:buNone/>
+                        <a:tabLst/>
+                        <a:defRPr/>
+                      </a:pPr>
+                      <a:r>
+                        <a:rPr lang="en-US" sz="1600">
+                          <a:latin typeface="Arial" panose="020B0604020202020204" pitchFamily="34" charset="0"/>
+                          <a:cs typeface="Arial" panose="020B0604020202020204" pitchFamily="34" charset="0"/>
+                        </a:rPr>
+                        <a:t>The simulation log must display </a:t>
+                      </a:r>
+                      <a:r>
+                        <a:rPr lang="en-US" sz="1600">
+                          <a:solidFill>
+                            <a:schemeClr val="dk1"/>
+                          </a:solidFill>
+                          <a:latin typeface="Arial" panose="020B0604020202020204" pitchFamily="34" charset="0"/>
+                          <a:ea typeface="+mn-ea"/>
+                          <a:cs typeface="Arial" panose="020B0604020202020204" pitchFamily="34" charset="0"/>
+                        </a:rPr>
+                        <a:t>[WAITING]</a:t>
+                      </a:r>
+                      <a:r>
+                        <a:rPr lang="en-US" sz="1600">
+                          <a:latin typeface="Arial" panose="020B0604020202020204" pitchFamily="34" charset="0"/>
+                          <a:cs typeface="Arial" panose="020B0604020202020204" pitchFamily="34" charset="0"/>
+                        </a:rPr>
+                        <a:t> messages corresponding to the actual number of wait cycles injected.</a:t>
+                      </a:r>
+                    </a:p>
+                  </a:txBody>
+                  <a:tcPr/>
+                </a:tc>
+                <a:extLst>
+                  <a:ext uri="{0D108BD9-81ED-4DB2-BD59-A6C34878D82A}">
+                    <a16:rowId xmlns:a16="http://schemas.microsoft.com/office/drawing/2014/main" val="4059865615"/>
+                  </a:ext>
+                </a:extLst>
+              </a:tr>
+            </a:tbl>
+          </a:graphicData>
+        </a:graphic>
+      </p:graphicFrame>
+    </p:spTree>
+    <p:extLst>
+      <p:ext uri="{BB962C8B-B14F-4D97-AF65-F5344CB8AC3E}">
+        <p14:creationId xmlns:p14="http://schemas.microsoft.com/office/powerpoint/2010/main" val="2744067928"/>
+      </p:ext>
+    </p:extLst>
+  </p:cSld>
+  <p:clrMapOvr>
+    <a:masterClrMapping/>
+  </p:clrMapOvr>
+</p:sld>
+</file>
+
+<file path=ppt/slides/slide4.xml><?xml version="1.0" encoding="utf-8"?>
+<p:sld xmlns:a="http://schemas.openxmlformats.org/drawingml/2006/main" xmlns:r="http://schemas.openxmlformats.org/officeDocument/2006/relationships" xmlns:p="http://schemas.openxmlformats.org/presentationml/2006/main" showMasterSp="0">
+  <p:cSld>
+    <p:spTree>
+      <p:nvGrpSpPr>
+        <p:cNvPr id="1" name=""/>
+        <p:cNvGrpSpPr/>
+        <p:nvPr/>
+      </p:nvGrpSpPr>
+      <p:grpSpPr>
+        <a:xfrm>
+          <a:off x="0" y="0"/>
+          <a:ext cx="0" cy="0"/>
+          <a:chOff x="0" y="0"/>
+          <a:chExt cx="0" cy="0"/>
+        </a:xfrm>
+      </p:grpSpPr>
+      <p:sp>
+        <p:nvSpPr>
+          <p:cNvPr id="4" name="object 4"/>
+          <p:cNvSpPr txBox="1">
+            <a:spLocks noGrp="1"/>
+          </p:cNvSpPr>
+          <p:nvPr>
+            <p:ph type="dt" sz="half" idx="6"/>
+          </p:nvPr>
+        </p:nvSpPr>
+        <p:spPr>
+          <a:prstGeom prst="rect">
+            <a:avLst/>
+          </a:prstGeom>
+        </p:spPr>
+        <p:txBody>
+          <a:bodyPr vert="horz" wrap="square" lIns="0" tIns="6350" rIns="0" bIns="0" rtlCol="0">
+            <a:spAutoFit/>
+          </a:bodyPr>
+          <a:lstStyle/>
+          <a:p>
+            <a:pPr marL="12700">
+              <a:lnSpc>
+                <a:spcPct val="100000"/>
+              </a:lnSpc>
+              <a:spcBef>
+                <a:spcPts val="50"/>
+              </a:spcBef>
+            </a:pPr>
+            <a:r>
+              <a:rPr dirty="0"/>
+              <a:t>Thiết</a:t>
+            </a:r>
+            <a:r>
+              <a:rPr spc="-20" dirty="0"/>
+              <a:t> </a:t>
+            </a:r>
+            <a:r>
+              <a:rPr dirty="0"/>
+              <a:t>Kế</a:t>
+            </a:r>
+            <a:r>
+              <a:rPr spc="-40" dirty="0"/>
+              <a:t> </a:t>
+            </a:r>
+            <a:r>
+              <a:rPr dirty="0"/>
+              <a:t>Vi</a:t>
+            </a:r>
+            <a:r>
+              <a:rPr spc="10" dirty="0"/>
+              <a:t> </a:t>
+            </a:r>
+            <a:r>
+              <a:rPr spc="-20" dirty="0"/>
+              <a:t>Mạch</a:t>
+            </a:r>
+          </a:p>
+        </p:txBody>
+      </p:sp>
+      <p:sp>
+        <p:nvSpPr>
+          <p:cNvPr id="5" name="object 5"/>
+          <p:cNvSpPr txBox="1">
+            <a:spLocks noGrp="1"/>
+          </p:cNvSpPr>
+          <p:nvPr>
+            <p:ph type="sldNum" sz="quarter" idx="7"/>
+          </p:nvPr>
+        </p:nvSpPr>
+        <p:spPr>
+          <a:prstGeom prst="rect">
+            <a:avLst/>
+          </a:prstGeom>
+        </p:spPr>
+        <p:txBody>
+          <a:bodyPr vert="horz" wrap="square" lIns="0" tIns="6350" rIns="0" bIns="0" rtlCol="0">
+            <a:spAutoFit/>
+          </a:bodyPr>
+          <a:lstStyle/>
+          <a:p>
+            <a:pPr marL="38100">
+              <a:lnSpc>
+                <a:spcPct val="100000"/>
+              </a:lnSpc>
+              <a:spcBef>
+                <a:spcPts val="50"/>
+              </a:spcBef>
+            </a:pPr>
+            <a:fld id="{81D60167-4931-47E6-BA6A-407CBD079E47}" type="slidenum">
+              <a:rPr spc="-25" dirty="0"/>
+              <a:t>4</a:t>
+            </a:fld>
+            <a:endParaRPr spc="-25" dirty="0"/>
+          </a:p>
+        </p:txBody>
+      </p:sp>
+      <p:sp>
+        <p:nvSpPr>
+          <p:cNvPr id="6" name="object 6"/>
+          <p:cNvSpPr txBox="1">
+            <a:spLocks noGrp="1"/>
+          </p:cNvSpPr>
+          <p:nvPr>
+            <p:ph type="ftr" sz="quarter" idx="5"/>
+          </p:nvPr>
+        </p:nvSpPr>
+        <p:spPr>
+          <a:prstGeom prst="rect">
+            <a:avLst/>
+          </a:prstGeom>
+        </p:spPr>
+        <p:txBody>
+          <a:bodyPr vert="horz" wrap="square" lIns="0" tIns="5715" rIns="0" bIns="0" rtlCol="0">
+            <a:spAutoFit/>
+          </a:bodyPr>
+          <a:lstStyle/>
+          <a:p>
+            <a:pPr marL="12700">
+              <a:lnSpc>
+                <a:spcPct val="100000"/>
+              </a:lnSpc>
+              <a:spcBef>
+                <a:spcPts val="45"/>
+              </a:spcBef>
+            </a:pPr>
+            <a:r>
+              <a:rPr dirty="0"/>
+              <a:t>©</a:t>
+            </a:r>
+            <a:r>
+              <a:rPr spc="-45" dirty="0"/>
+              <a:t> </a:t>
+            </a:r>
+            <a:r>
+              <a:rPr dirty="0"/>
+              <a:t>2025</a:t>
+            </a:r>
+            <a:r>
+              <a:rPr spc="-15" dirty="0"/>
+              <a:t> </a:t>
+            </a:r>
+            <a:r>
+              <a:rPr dirty="0"/>
+              <a:t>–</a:t>
+            </a:r>
+            <a:r>
+              <a:rPr spc="-20" dirty="0"/>
+              <a:t> </a:t>
+            </a:r>
+            <a:r>
+              <a:rPr dirty="0"/>
+              <a:t>Long</a:t>
+            </a:r>
+            <a:r>
+              <a:rPr spc="-10" dirty="0"/>
+              <a:t> Hoang</a:t>
+            </a:r>
+          </a:p>
+        </p:txBody>
+      </p:sp>
+      <p:sp>
+        <p:nvSpPr>
+          <p:cNvPr id="2" name="object 2"/>
+          <p:cNvSpPr txBox="1">
+            <a:spLocks noGrp="1"/>
+          </p:cNvSpPr>
+          <p:nvPr>
+            <p:ph type="title"/>
+          </p:nvPr>
+        </p:nvSpPr>
+        <p:spPr>
+          <a:xfrm>
+            <a:off x="508317" y="480313"/>
+            <a:ext cx="3589654" cy="575310"/>
+          </a:xfrm>
+          <a:prstGeom prst="rect">
+            <a:avLst/>
+          </a:prstGeom>
+        </p:spPr>
+        <p:txBody>
+          <a:bodyPr vert="horz" wrap="square" lIns="0" tIns="13335" rIns="0" bIns="0" rtlCol="0">
+            <a:spAutoFit/>
+          </a:bodyPr>
+          <a:lstStyle/>
+          <a:p>
+            <a:pPr marL="12700">
+              <a:lnSpc>
+                <a:spcPct val="100000"/>
+              </a:lnSpc>
+              <a:spcBef>
+                <a:spcPts val="105"/>
+              </a:spcBef>
+            </a:pPr>
+            <a:r>
+              <a:rPr dirty="0"/>
+              <a:t>1.</a:t>
+            </a:r>
+            <a:r>
+              <a:rPr spc="-105" dirty="0"/>
+              <a:t> </a:t>
+            </a:r>
+            <a:r>
+              <a:rPr spc="-20" dirty="0"/>
+              <a:t>Specifications</a:t>
+            </a:r>
+          </a:p>
+        </p:txBody>
+      </p:sp>
+      <p:sp>
+        <p:nvSpPr>
+          <p:cNvPr id="7" name="object 3">
+            <a:extLst>
+              <a:ext uri="{FF2B5EF4-FFF2-40B4-BE49-F238E27FC236}">
+                <a16:creationId xmlns:a16="http://schemas.microsoft.com/office/drawing/2014/main" id="{CA90AF8F-A1B1-B0EF-BD90-25C3457FA1F5}"/>
+              </a:ext>
+            </a:extLst>
+          </p:cNvPr>
+          <p:cNvSpPr txBox="1"/>
+          <p:nvPr/>
+        </p:nvSpPr>
+        <p:spPr>
+          <a:xfrm>
+            <a:off x="457200" y="1121155"/>
+            <a:ext cx="8026083" cy="475130"/>
+          </a:xfrm>
+          <a:prstGeom prst="rect">
+            <a:avLst/>
+          </a:prstGeom>
+        </p:spPr>
+        <p:txBody>
+          <a:bodyPr vert="horz" wrap="square" lIns="0" tIns="13335" rIns="0" bIns="0" rtlCol="0">
+            <a:spAutoFit/>
+          </a:bodyPr>
+          <a:lstStyle/>
+          <a:p>
+            <a:pPr marL="12700">
+              <a:lnSpc>
+                <a:spcPct val="100000"/>
+              </a:lnSpc>
+              <a:spcBef>
+                <a:spcPts val="105"/>
+              </a:spcBef>
+            </a:pPr>
+            <a:r>
+              <a:rPr lang="en-US" sz="3000" b="1">
+                <a:solidFill>
+                  <a:srgbClr val="7C45AD"/>
+                </a:solidFill>
+                <a:latin typeface="Arial"/>
+                <a:cs typeface="Arial"/>
+              </a:rPr>
+              <a:t>1</a:t>
+            </a:r>
+            <a:r>
+              <a:rPr sz="3000" b="1">
+                <a:solidFill>
+                  <a:srgbClr val="7C45AD"/>
+                </a:solidFill>
+                <a:latin typeface="Arial"/>
+                <a:cs typeface="Arial"/>
+              </a:rPr>
+              <a:t>.1</a:t>
+            </a:r>
+            <a:r>
+              <a:rPr lang="en-US" sz="3000" b="1">
+                <a:solidFill>
+                  <a:srgbClr val="7C45AD"/>
+                </a:solidFill>
+                <a:latin typeface="Arial"/>
+                <a:cs typeface="Arial"/>
+              </a:rPr>
+              <a:t> Overview of the AMBA specification</a:t>
+            </a:r>
+          </a:p>
+        </p:txBody>
+      </p:sp>
+      <p:sp>
+        <p:nvSpPr>
+          <p:cNvPr id="9" name="TextBox 8">
+            <a:extLst>
+              <a:ext uri="{FF2B5EF4-FFF2-40B4-BE49-F238E27FC236}">
+                <a16:creationId xmlns:a16="http://schemas.microsoft.com/office/drawing/2014/main" id="{370CF898-9432-7BB6-6633-F407E9A3D23A}"/>
+              </a:ext>
+            </a:extLst>
+          </p:cNvPr>
+          <p:cNvSpPr txBox="1"/>
+          <p:nvPr/>
+        </p:nvSpPr>
+        <p:spPr>
+          <a:xfrm>
+            <a:off x="508316" y="1905000"/>
+            <a:ext cx="11033443" cy="646331"/>
+          </a:xfrm>
+          <a:prstGeom prst="rect">
+            <a:avLst/>
+          </a:prstGeom>
+          <a:noFill/>
+        </p:spPr>
+        <p:txBody>
+          <a:bodyPr wrap="square">
+            <a:spAutoFit/>
+          </a:bodyPr>
+          <a:lstStyle/>
+          <a:p>
+            <a:pPr algn="just"/>
+            <a:r>
+              <a:rPr lang="en-US"/>
+              <a:t>The Advanced Microcontroller Bus Architecture (AMBA) specification defines an on-chip communications standard for designing high-performance embedded microcontrollers. </a:t>
+            </a:r>
+          </a:p>
+        </p:txBody>
+      </p:sp>
+      <p:sp>
+        <p:nvSpPr>
+          <p:cNvPr id="11" name="TextBox 10">
+            <a:extLst>
+              <a:ext uri="{FF2B5EF4-FFF2-40B4-BE49-F238E27FC236}">
+                <a16:creationId xmlns:a16="http://schemas.microsoft.com/office/drawing/2014/main" id="{AE1AFCB2-CB93-363F-C556-64F9790378B6}"/>
+              </a:ext>
+            </a:extLst>
+          </p:cNvPr>
+          <p:cNvSpPr txBox="1"/>
+          <p:nvPr/>
+        </p:nvSpPr>
+        <p:spPr>
+          <a:xfrm>
+            <a:off x="508315" y="2860046"/>
+            <a:ext cx="11033443" cy="1477328"/>
+          </a:xfrm>
+          <a:prstGeom prst="rect">
+            <a:avLst/>
+          </a:prstGeom>
+          <a:noFill/>
+        </p:spPr>
+        <p:txBody>
+          <a:bodyPr wrap="square">
+            <a:spAutoFit/>
+          </a:bodyPr>
+          <a:lstStyle/>
+          <a:p>
+            <a:r>
+              <a:rPr lang="en-US"/>
+              <a:t>Four distinct buses are defined within the AMBA specification: </a:t>
+            </a:r>
+          </a:p>
+          <a:p>
+            <a:pPr marL="285750" indent="-285750">
+              <a:buFont typeface="Arial" panose="020B0604020202020204" pitchFamily="34" charset="0"/>
+              <a:buChar char="•"/>
+            </a:pPr>
+            <a:r>
+              <a:rPr lang="en-US"/>
+              <a:t>The Advanced High-performance Bus (AHB) </a:t>
+            </a:r>
+          </a:p>
+          <a:p>
+            <a:pPr marL="285750" indent="-285750">
+              <a:buFont typeface="Arial" panose="020B0604020202020204" pitchFamily="34" charset="0"/>
+              <a:buChar char="•"/>
+            </a:pPr>
+            <a:r>
+              <a:rPr lang="en-US"/>
+              <a:t>The Advanced System Bus (ASB) </a:t>
+            </a:r>
+          </a:p>
+          <a:p>
+            <a:pPr marL="285750" indent="-285750">
+              <a:buFont typeface="Arial" panose="020B0604020202020204" pitchFamily="34" charset="0"/>
+              <a:buChar char="•"/>
+            </a:pPr>
+            <a:r>
+              <a:rPr lang="en-US"/>
+              <a:t>The Advanced Peripheral Bus (APB).</a:t>
+            </a:r>
+          </a:p>
+          <a:p>
+            <a:pPr marL="285750" indent="-285750">
+              <a:buFont typeface="Arial" panose="020B0604020202020204" pitchFamily="34" charset="0"/>
+              <a:buChar char="•"/>
+            </a:pPr>
+            <a:r>
+              <a:rPr lang="en-US"/>
+              <a:t>The Advanced eXtensible Interface (AXI)</a:t>
+            </a:r>
+          </a:p>
+        </p:txBody>
+      </p:sp>
+    </p:spTree>
+  </p:cSld>
+  <p:clrMapOvr>
+    <a:masterClrMapping/>
+  </p:clrMapOvr>
+</p:sld>
+</file>
+
+<file path=ppt/slides/slide40.xml><?xml version="1.0" encoding="utf-8"?>
 <p:sld xmlns:a="http://schemas.openxmlformats.org/drawingml/2006/main" xmlns:r="http://schemas.openxmlformats.org/officeDocument/2006/relationships" xmlns:p="http://schemas.openxmlformats.org/presentationml/2006/main" showMasterSp="0">
   <p:cSld>
     <p:spTree>
@@ -22137,7 +24149,7 @@
             </a:pPr>
             <a:fld id="{81D60167-4931-47E6-BA6A-407CBD079E47}" type="slidenum">
               <a:rPr spc="-25" dirty="0"/>
-              <a:t>37</a:t>
+              <a:t>40</a:t>
             </a:fld>
             <a:endParaRPr spc="-25" dirty="0"/>
           </a:p>
@@ -22287,7 +24299,7 @@
         </p:blipFill>
         <p:spPr>
           <a:xfrm>
-            <a:off x="508317" y="2133601"/>
+            <a:off x="508168" y="1705523"/>
             <a:ext cx="5672889" cy="1752600"/>
           </a:xfrm>
           <a:prstGeom prst="rect">
@@ -22317,7 +24329,7 @@
         </p:blipFill>
         <p:spPr>
           <a:xfrm>
-            <a:off x="508317" y="4114800"/>
+            <a:off x="535749" y="3573457"/>
             <a:ext cx="5672591" cy="1905919"/>
           </a:xfrm>
           <a:prstGeom prst="rect">
@@ -22347,8 +24359,38 @@
         </p:blipFill>
         <p:spPr>
           <a:xfrm>
-            <a:off x="6248400" y="2830619"/>
+            <a:off x="6187153" y="1160957"/>
             <a:ext cx="5672590" cy="2099595"/>
+          </a:xfrm>
+          <a:prstGeom prst="rect">
+            <a:avLst/>
+          </a:prstGeom>
+        </p:spPr>
+      </p:pic>
+      <p:pic>
+        <p:nvPicPr>
+          <p:cNvPr id="5" name="Picture 4">
+            <a:extLst>
+              <a:ext uri="{FF2B5EF4-FFF2-40B4-BE49-F238E27FC236}">
+                <a16:creationId xmlns:a16="http://schemas.microsoft.com/office/drawing/2014/main" id="{E1D87966-108E-D2D9-C9F4-7D85CC38DF98}"/>
+              </a:ext>
+            </a:extLst>
+          </p:cNvPr>
+          <p:cNvPicPr>
+            <a:picLocks noChangeAspect="1"/>
+          </p:cNvPicPr>
+          <p:nvPr/>
+        </p:nvPicPr>
+        <p:blipFill>
+          <a:blip r:embed="rId5"/>
+          <a:stretch>
+            <a:fillRect/>
+          </a:stretch>
+        </p:blipFill>
+        <p:spPr>
+          <a:xfrm>
+            <a:off x="6781800" y="3318219"/>
+            <a:ext cx="4644680" cy="3141007"/>
           </a:xfrm>
           <a:prstGeom prst="rect">
             <a:avLst/>
@@ -22368,7 +24410,7 @@
 </p:sld>
 </file>
 
-<file path=ppt/slides/slide38.xml><?xml version="1.0" encoding="utf-8"?>
+<file path=ppt/slides/slide41.xml><?xml version="1.0" encoding="utf-8"?>
 <p:sld xmlns:a="http://schemas.openxmlformats.org/drawingml/2006/main" xmlns:r="http://schemas.openxmlformats.org/officeDocument/2006/relationships" xmlns:p="http://schemas.openxmlformats.org/presentationml/2006/main" showMasterSp="0">
   <p:cSld>
     <p:spTree>
@@ -22557,7 +24599,7 @@
             </a:pPr>
             <a:fld id="{81D60167-4931-47E6-BA6A-407CBD079E47}" type="slidenum">
               <a:rPr spc="-25" dirty="0"/>
-              <a:t>38</a:t>
+              <a:t>41</a:t>
             </a:fld>
             <a:endParaRPr spc="-25" dirty="0"/>
           </a:p>
@@ -22687,10 +24729,10 @@
       </p:sp>
       <p:pic>
         <p:nvPicPr>
-          <p:cNvPr id="5" name="Picture 4">
+          <p:cNvPr id="6" name="Picture 5">
             <a:extLst>
               <a:ext uri="{FF2B5EF4-FFF2-40B4-BE49-F238E27FC236}">
-                <a16:creationId xmlns:a16="http://schemas.microsoft.com/office/drawing/2014/main" id="{BBF9060E-173C-D22F-A213-10C3DD432F90}"/>
+                <a16:creationId xmlns:a16="http://schemas.microsoft.com/office/drawing/2014/main" id="{5F1FEAE1-EE9A-8DF2-3E57-E8D780A9FBDB}"/>
               </a:ext>
             </a:extLst>
           </p:cNvPr>
@@ -22707,8 +24749,8 @@
         </p:blipFill>
         <p:spPr>
           <a:xfrm>
-            <a:off x="0" y="2239934"/>
-            <a:ext cx="12192000" cy="2378132"/>
+            <a:off x="0" y="2089302"/>
+            <a:ext cx="12192000" cy="2679396"/>
           </a:xfrm>
           <a:prstGeom prst="rect">
             <a:avLst/>
@@ -22728,7 +24770,7 @@
 </p:sld>
 </file>
 
-<file path=ppt/slides/slide39.xml><?xml version="1.0" encoding="utf-8"?>
+<file path=ppt/slides/slide42.xml><?xml version="1.0" encoding="utf-8"?>
 <p:sld xmlns:a="http://schemas.openxmlformats.org/drawingml/2006/main" xmlns:r="http://schemas.openxmlformats.org/officeDocument/2006/relationships" xmlns:p="http://schemas.openxmlformats.org/presentationml/2006/main" showMasterSp="0">
   <p:cSld>
     <p:spTree>
@@ -22947,419 +24989,6 @@
               <a:latin typeface="Arial"/>
               <a:cs typeface="Arial"/>
             </a:endParaRPr>
-          </a:p>
-        </p:txBody>
-      </p:sp>
-    </p:spTree>
-  </p:cSld>
-  <p:clrMapOvr>
-    <a:masterClrMapping/>
-  </p:clrMapOvr>
-</p:sld>
-</file>
-
-<file path=ppt/slides/slide4.xml><?xml version="1.0" encoding="utf-8"?>
-<p:sld xmlns:a="http://schemas.openxmlformats.org/drawingml/2006/main" xmlns:r="http://schemas.openxmlformats.org/officeDocument/2006/relationships" xmlns:p="http://schemas.openxmlformats.org/presentationml/2006/main" showMasterSp="0">
-  <p:cSld>
-    <p:spTree>
-      <p:nvGrpSpPr>
-        <p:cNvPr id="1" name=""/>
-        <p:cNvGrpSpPr/>
-        <p:nvPr/>
-      </p:nvGrpSpPr>
-      <p:grpSpPr>
-        <a:xfrm>
-          <a:off x="0" y="0"/>
-          <a:ext cx="0" cy="0"/>
-          <a:chOff x="0" y="0"/>
-          <a:chExt cx="0" cy="0"/>
-        </a:xfrm>
-      </p:grpSpPr>
-      <p:sp>
-        <p:nvSpPr>
-          <p:cNvPr id="4" name="object 4"/>
-          <p:cNvSpPr txBox="1">
-            <a:spLocks noGrp="1"/>
-          </p:cNvSpPr>
-          <p:nvPr>
-            <p:ph type="dt" sz="half" idx="6"/>
-          </p:nvPr>
-        </p:nvSpPr>
-        <p:spPr>
-          <a:prstGeom prst="rect">
-            <a:avLst/>
-          </a:prstGeom>
-        </p:spPr>
-        <p:txBody>
-          <a:bodyPr vert="horz" wrap="square" lIns="0" tIns="6350" rIns="0" bIns="0" rtlCol="0">
-            <a:spAutoFit/>
-          </a:bodyPr>
-          <a:lstStyle/>
-          <a:p>
-            <a:pPr marL="12700">
-              <a:lnSpc>
-                <a:spcPct val="100000"/>
-              </a:lnSpc>
-              <a:spcBef>
-                <a:spcPts val="50"/>
-              </a:spcBef>
-            </a:pPr>
-            <a:r>
-              <a:rPr dirty="0"/>
-              <a:t>Thiết</a:t>
-            </a:r>
-            <a:r>
-              <a:rPr spc="-20" dirty="0"/>
-              <a:t> </a:t>
-            </a:r>
-            <a:r>
-              <a:rPr dirty="0"/>
-              <a:t>Kế</a:t>
-            </a:r>
-            <a:r>
-              <a:rPr spc="-40" dirty="0"/>
-              <a:t> </a:t>
-            </a:r>
-            <a:r>
-              <a:rPr dirty="0"/>
-              <a:t>Vi</a:t>
-            </a:r>
-            <a:r>
-              <a:rPr spc="10" dirty="0"/>
-              <a:t> </a:t>
-            </a:r>
-            <a:r>
-              <a:rPr spc="-20" dirty="0"/>
-              <a:t>Mạch</a:t>
-            </a:r>
-          </a:p>
-        </p:txBody>
-      </p:sp>
-      <p:sp>
-        <p:nvSpPr>
-          <p:cNvPr id="5" name="object 5"/>
-          <p:cNvSpPr txBox="1">
-            <a:spLocks noGrp="1"/>
-          </p:cNvSpPr>
-          <p:nvPr>
-            <p:ph type="sldNum" sz="quarter" idx="7"/>
-          </p:nvPr>
-        </p:nvSpPr>
-        <p:spPr>
-          <a:prstGeom prst="rect">
-            <a:avLst/>
-          </a:prstGeom>
-        </p:spPr>
-        <p:txBody>
-          <a:bodyPr vert="horz" wrap="square" lIns="0" tIns="6350" rIns="0" bIns="0" rtlCol="0">
-            <a:spAutoFit/>
-          </a:bodyPr>
-          <a:lstStyle/>
-          <a:p>
-            <a:pPr marL="38100">
-              <a:lnSpc>
-                <a:spcPct val="100000"/>
-              </a:lnSpc>
-              <a:spcBef>
-                <a:spcPts val="50"/>
-              </a:spcBef>
-            </a:pPr>
-            <a:fld id="{81D60167-4931-47E6-BA6A-407CBD079E47}" type="slidenum">
-              <a:rPr spc="-25" dirty="0"/>
-              <a:t>4</a:t>
-            </a:fld>
-            <a:endParaRPr spc="-25" dirty="0"/>
-          </a:p>
-        </p:txBody>
-      </p:sp>
-      <p:sp>
-        <p:nvSpPr>
-          <p:cNvPr id="6" name="object 6"/>
-          <p:cNvSpPr txBox="1">
-            <a:spLocks noGrp="1"/>
-          </p:cNvSpPr>
-          <p:nvPr>
-            <p:ph type="ftr" sz="quarter" idx="5"/>
-          </p:nvPr>
-        </p:nvSpPr>
-        <p:spPr>
-          <a:prstGeom prst="rect">
-            <a:avLst/>
-          </a:prstGeom>
-        </p:spPr>
-        <p:txBody>
-          <a:bodyPr vert="horz" wrap="square" lIns="0" tIns="5715" rIns="0" bIns="0" rtlCol="0">
-            <a:spAutoFit/>
-          </a:bodyPr>
-          <a:lstStyle/>
-          <a:p>
-            <a:pPr marL="12700">
-              <a:lnSpc>
-                <a:spcPct val="100000"/>
-              </a:lnSpc>
-              <a:spcBef>
-                <a:spcPts val="45"/>
-              </a:spcBef>
-            </a:pPr>
-            <a:r>
-              <a:rPr dirty="0"/>
-              <a:t>©</a:t>
-            </a:r>
-            <a:r>
-              <a:rPr spc="-45" dirty="0"/>
-              <a:t> </a:t>
-            </a:r>
-            <a:r>
-              <a:rPr dirty="0"/>
-              <a:t>2025</a:t>
-            </a:r>
-            <a:r>
-              <a:rPr spc="-15" dirty="0"/>
-              <a:t> </a:t>
-            </a:r>
-            <a:r>
-              <a:rPr dirty="0"/>
-              <a:t>–</a:t>
-            </a:r>
-            <a:r>
-              <a:rPr spc="-20" dirty="0"/>
-              <a:t> </a:t>
-            </a:r>
-            <a:r>
-              <a:rPr dirty="0"/>
-              <a:t>Long</a:t>
-            </a:r>
-            <a:r>
-              <a:rPr spc="-10" dirty="0"/>
-              <a:t> Hoang</a:t>
-            </a:r>
-          </a:p>
-        </p:txBody>
-      </p:sp>
-      <p:sp>
-        <p:nvSpPr>
-          <p:cNvPr id="2" name="object 2"/>
-          <p:cNvSpPr txBox="1">
-            <a:spLocks noGrp="1"/>
-          </p:cNvSpPr>
-          <p:nvPr>
-            <p:ph type="title"/>
-          </p:nvPr>
-        </p:nvSpPr>
-        <p:spPr>
-          <a:xfrm>
-            <a:off x="508317" y="480313"/>
-            <a:ext cx="3589654" cy="575310"/>
-          </a:xfrm>
-          <a:prstGeom prst="rect">
-            <a:avLst/>
-          </a:prstGeom>
-        </p:spPr>
-        <p:txBody>
-          <a:bodyPr vert="horz" wrap="square" lIns="0" tIns="13335" rIns="0" bIns="0" rtlCol="0">
-            <a:spAutoFit/>
-          </a:bodyPr>
-          <a:lstStyle/>
-          <a:p>
-            <a:pPr marL="12700">
-              <a:lnSpc>
-                <a:spcPct val="100000"/>
-              </a:lnSpc>
-              <a:spcBef>
-                <a:spcPts val="105"/>
-              </a:spcBef>
-            </a:pPr>
-            <a:r>
-              <a:rPr dirty="0"/>
-              <a:t>1.</a:t>
-            </a:r>
-            <a:r>
-              <a:rPr spc="-105" dirty="0"/>
-              <a:t> </a:t>
-            </a:r>
-            <a:r>
-              <a:rPr spc="-20" dirty="0"/>
-              <a:t>Specifications</a:t>
-            </a:r>
-          </a:p>
-        </p:txBody>
-      </p:sp>
-      <p:sp>
-        <p:nvSpPr>
-          <p:cNvPr id="7" name="object 3">
-            <a:extLst>
-              <a:ext uri="{FF2B5EF4-FFF2-40B4-BE49-F238E27FC236}">
-                <a16:creationId xmlns:a16="http://schemas.microsoft.com/office/drawing/2014/main" id="{CA90AF8F-A1B1-B0EF-BD90-25C3457FA1F5}"/>
-              </a:ext>
-            </a:extLst>
-          </p:cNvPr>
-          <p:cNvSpPr txBox="1"/>
-          <p:nvPr/>
-        </p:nvSpPr>
-        <p:spPr>
-          <a:xfrm>
-            <a:off x="457200" y="1121155"/>
-            <a:ext cx="8026083" cy="475130"/>
-          </a:xfrm>
-          <a:prstGeom prst="rect">
-            <a:avLst/>
-          </a:prstGeom>
-        </p:spPr>
-        <p:txBody>
-          <a:bodyPr vert="horz" wrap="square" lIns="0" tIns="13335" rIns="0" bIns="0" rtlCol="0">
-            <a:spAutoFit/>
-          </a:bodyPr>
-          <a:lstStyle/>
-          <a:p>
-            <a:pPr marL="12700">
-              <a:lnSpc>
-                <a:spcPct val="100000"/>
-              </a:lnSpc>
-              <a:spcBef>
-                <a:spcPts val="105"/>
-              </a:spcBef>
-            </a:pPr>
-            <a:r>
-              <a:rPr lang="en-US" sz="3000" b="1">
-                <a:solidFill>
-                  <a:srgbClr val="7C45AD"/>
-                </a:solidFill>
-                <a:latin typeface="Arial"/>
-                <a:cs typeface="Arial"/>
-              </a:rPr>
-              <a:t>1</a:t>
-            </a:r>
-            <a:r>
-              <a:rPr sz="3000" b="1">
-                <a:solidFill>
-                  <a:srgbClr val="7C45AD"/>
-                </a:solidFill>
-                <a:latin typeface="Arial"/>
-                <a:cs typeface="Arial"/>
-              </a:rPr>
-              <a:t>.1</a:t>
-            </a:r>
-            <a:r>
-              <a:rPr lang="en-US" sz="3000" b="1">
-                <a:solidFill>
-                  <a:srgbClr val="7C45AD"/>
-                </a:solidFill>
-                <a:latin typeface="Arial"/>
-                <a:cs typeface="Arial"/>
-              </a:rPr>
-              <a:t> Overview of the AMBA specification</a:t>
-            </a:r>
-          </a:p>
-        </p:txBody>
-      </p:sp>
-      <p:sp>
-        <p:nvSpPr>
-          <p:cNvPr id="9" name="TextBox 8">
-            <a:extLst>
-              <a:ext uri="{FF2B5EF4-FFF2-40B4-BE49-F238E27FC236}">
-                <a16:creationId xmlns:a16="http://schemas.microsoft.com/office/drawing/2014/main" id="{370CF898-9432-7BB6-6633-F407E9A3D23A}"/>
-              </a:ext>
-            </a:extLst>
-          </p:cNvPr>
-          <p:cNvSpPr txBox="1"/>
-          <p:nvPr/>
-        </p:nvSpPr>
-        <p:spPr>
-          <a:xfrm>
-            <a:off x="508316" y="1905000"/>
-            <a:ext cx="11033443" cy="646331"/>
-          </a:xfrm>
-          <a:prstGeom prst="rect">
-            <a:avLst/>
-          </a:prstGeom>
-          <a:noFill/>
-        </p:spPr>
-        <p:txBody>
-          <a:bodyPr wrap="square">
-            <a:spAutoFit/>
-          </a:bodyPr>
-          <a:lstStyle/>
-          <a:p>
-            <a:pPr algn="just"/>
-            <a:r>
-              <a:rPr lang="en-US"/>
-              <a:t>The Advanced Microcontroller Bus Architecture (AMBA) specification defines an on-chip communications standard for designing high-performance embedded microcontrollers. </a:t>
-            </a:r>
-          </a:p>
-        </p:txBody>
-      </p:sp>
-      <p:sp>
-        <p:nvSpPr>
-          <p:cNvPr id="11" name="TextBox 10">
-            <a:extLst>
-              <a:ext uri="{FF2B5EF4-FFF2-40B4-BE49-F238E27FC236}">
-                <a16:creationId xmlns:a16="http://schemas.microsoft.com/office/drawing/2014/main" id="{AE1AFCB2-CB93-363F-C556-64F9790378B6}"/>
-              </a:ext>
-            </a:extLst>
-          </p:cNvPr>
-          <p:cNvSpPr txBox="1"/>
-          <p:nvPr/>
-        </p:nvSpPr>
-        <p:spPr>
-          <a:xfrm>
-            <a:off x="508315" y="2860046"/>
-            <a:ext cx="11033443" cy="1477328"/>
-          </a:xfrm>
-          <a:prstGeom prst="rect">
-            <a:avLst/>
-          </a:prstGeom>
-          <a:noFill/>
-        </p:spPr>
-        <p:txBody>
-          <a:bodyPr wrap="square">
-            <a:spAutoFit/>
-          </a:bodyPr>
-          <a:lstStyle/>
-          <a:p>
-            <a:r>
-              <a:rPr lang="en-US"/>
-              <a:t>Four distinct buses are defined within the AMBA specification: </a:t>
-            </a:r>
-          </a:p>
-          <a:p>
-            <a:pPr marL="285750" indent="-285750">
-              <a:buFont typeface="Arial" panose="020B0604020202020204" pitchFamily="34" charset="0"/>
-              <a:buChar char="•"/>
-            </a:pPr>
-            <a:r>
-              <a:rPr lang="en-US"/>
-              <a:t>The Advanced High-performance Bus (AHB) </a:t>
-            </a:r>
-          </a:p>
-          <a:p>
-            <a:pPr marL="285750" indent="-285750">
-              <a:buFont typeface="Arial" panose="020B0604020202020204" pitchFamily="34" charset="0"/>
-              <a:buChar char="•"/>
-            </a:pPr>
-            <a:r>
-              <a:rPr lang="en-US"/>
-              <a:t>The Advanced System Bus (ASB) </a:t>
-            </a:r>
-          </a:p>
-          <a:p>
-            <a:pPr marL="285750" indent="-285750">
-              <a:buFont typeface="Arial" panose="020B0604020202020204" pitchFamily="34" charset="0"/>
-              <a:buChar char="•"/>
-            </a:pPr>
-            <a:r>
-              <a:rPr lang="en-US"/>
-              <a:t>The Advanced Peripheral Bus (APB).</a:t>
-            </a:r>
-          </a:p>
-          <a:p>
-            <a:pPr marL="285750" indent="-285750">
-              <a:buFont typeface="Arial" panose="020B0604020202020204" pitchFamily="34" charset="0"/>
-              <a:buChar char="•"/>
-            </a:pPr>
-            <a:r>
-              <a:rPr lang="en-US"/>
-              <a:t>The Advanced eXtensible Interface (AXI)</a:t>
-            </a:r>
           </a:p>
         </p:txBody>
       </p:sp>

--- a/Design Specifications/AMBA_ABP.pptx
+++ b/Design Specifications/AMBA_ABP.pptx
@@ -38,15 +38,16 @@
     <p:sldId id="264" r:id="rId32"/>
     <p:sldId id="265" r:id="rId33"/>
     <p:sldId id="308" r:id="rId34"/>
-    <p:sldId id="297" r:id="rId35"/>
-    <p:sldId id="306" r:id="rId36"/>
-    <p:sldId id="269" r:id="rId37"/>
-    <p:sldId id="270" r:id="rId38"/>
-    <p:sldId id="302" r:id="rId39"/>
-    <p:sldId id="307" r:id="rId40"/>
-    <p:sldId id="303" r:id="rId41"/>
-    <p:sldId id="305" r:id="rId42"/>
-    <p:sldId id="273" r:id="rId43"/>
+    <p:sldId id="309" r:id="rId35"/>
+    <p:sldId id="297" r:id="rId36"/>
+    <p:sldId id="306" r:id="rId37"/>
+    <p:sldId id="269" r:id="rId38"/>
+    <p:sldId id="270" r:id="rId39"/>
+    <p:sldId id="302" r:id="rId40"/>
+    <p:sldId id="307" r:id="rId41"/>
+    <p:sldId id="303" r:id="rId42"/>
+    <p:sldId id="305" r:id="rId43"/>
+    <p:sldId id="273" r:id="rId44"/>
   </p:sldIdLst>
   <p:sldSz cx="12192000" cy="6858000"/>
   <p:notesSz cx="12192000" cy="6858000"/>
@@ -19904,6 +19905,737 @@
         <p:cNvPr id="1" name="">
           <a:extLst>
             <a:ext uri="{FF2B5EF4-FFF2-40B4-BE49-F238E27FC236}">
+              <a16:creationId xmlns:a16="http://schemas.microsoft.com/office/drawing/2014/main" id="{4192D0A7-D6DD-DD8C-E760-34CCEFE386A5}"/>
+            </a:ext>
+          </a:extLst>
+        </p:cNvPr>
+        <p:cNvGrpSpPr/>
+        <p:nvPr/>
+      </p:nvGrpSpPr>
+      <p:grpSpPr>
+        <a:xfrm>
+          <a:off x="0" y="0"/>
+          <a:ext cx="0" cy="0"/>
+          <a:chOff x="0" y="0"/>
+          <a:chExt cx="0" cy="0"/>
+        </a:xfrm>
+      </p:grpSpPr>
+      <p:sp>
+        <p:nvSpPr>
+          <p:cNvPr id="2" name="object 2">
+            <a:extLst>
+              <a:ext uri="{FF2B5EF4-FFF2-40B4-BE49-F238E27FC236}">
+                <a16:creationId xmlns:a16="http://schemas.microsoft.com/office/drawing/2014/main" id="{C5B13582-5574-F697-4E00-BF7BA76C371F}"/>
+              </a:ext>
+            </a:extLst>
+          </p:cNvPr>
+          <p:cNvSpPr txBox="1">
+            <a:spLocks noGrp="1"/>
+          </p:cNvSpPr>
+          <p:nvPr>
+            <p:ph type="ctrTitle"/>
+          </p:nvPr>
+        </p:nvSpPr>
+        <p:spPr>
+          <a:prstGeom prst="rect">
+            <a:avLst/>
+          </a:prstGeom>
+        </p:spPr>
+        <p:txBody>
+          <a:bodyPr vert="horz" wrap="square" lIns="0" tIns="13335" rIns="0" bIns="0" rtlCol="0">
+            <a:spAutoFit/>
+          </a:bodyPr>
+          <a:lstStyle/>
+          <a:p>
+            <a:pPr marL="12700">
+              <a:lnSpc>
+                <a:spcPct val="100000"/>
+              </a:lnSpc>
+              <a:spcBef>
+                <a:spcPts val="105"/>
+              </a:spcBef>
+            </a:pPr>
+            <a:r>
+              <a:rPr dirty="0"/>
+              <a:t>3.</a:t>
+            </a:r>
+            <a:r>
+              <a:rPr spc="-70" dirty="0"/>
+              <a:t> </a:t>
+            </a:r>
+            <a:r>
+              <a:rPr dirty="0"/>
+              <a:t>Low</a:t>
+            </a:r>
+            <a:r>
+              <a:rPr spc="10" dirty="0"/>
+              <a:t> </a:t>
+            </a:r>
+            <a:r>
+              <a:rPr dirty="0"/>
+              <a:t>Level</a:t>
+            </a:r>
+            <a:r>
+              <a:rPr spc="10" dirty="0"/>
+              <a:t> </a:t>
+            </a:r>
+            <a:r>
+              <a:rPr dirty="0"/>
+              <a:t>Block</a:t>
+            </a:r>
+            <a:r>
+              <a:rPr spc="-10" dirty="0"/>
+              <a:t> Design</a:t>
+            </a:r>
+          </a:p>
+        </p:txBody>
+      </p:sp>
+      <p:sp>
+        <p:nvSpPr>
+          <p:cNvPr id="3" name="object 3">
+            <a:extLst>
+              <a:ext uri="{FF2B5EF4-FFF2-40B4-BE49-F238E27FC236}">
+                <a16:creationId xmlns:a16="http://schemas.microsoft.com/office/drawing/2014/main" id="{80D88DF3-D7B6-4831-8A03-90E3F4B46266}"/>
+              </a:ext>
+            </a:extLst>
+          </p:cNvPr>
+          <p:cNvSpPr txBox="1"/>
+          <p:nvPr/>
+        </p:nvSpPr>
+        <p:spPr>
+          <a:xfrm>
+            <a:off x="508317" y="1121155"/>
+            <a:ext cx="5435283" cy="475130"/>
+          </a:xfrm>
+          <a:prstGeom prst="rect">
+            <a:avLst/>
+          </a:prstGeom>
+        </p:spPr>
+        <p:txBody>
+          <a:bodyPr vert="horz" wrap="square" lIns="0" tIns="13335" rIns="0" bIns="0" rtlCol="0">
+            <a:spAutoFit/>
+          </a:bodyPr>
+          <a:lstStyle/>
+          <a:p>
+            <a:pPr marL="12700">
+              <a:lnSpc>
+                <a:spcPct val="100000"/>
+              </a:lnSpc>
+              <a:spcBef>
+                <a:spcPts val="105"/>
+              </a:spcBef>
+            </a:pPr>
+            <a:r>
+              <a:rPr sz="3000" b="1">
+                <a:solidFill>
+                  <a:srgbClr val="7C45AD"/>
+                </a:solidFill>
+                <a:latin typeface="Arial"/>
+                <a:cs typeface="Arial"/>
+              </a:rPr>
+              <a:t>3.</a:t>
+            </a:r>
+            <a:r>
+              <a:rPr lang="en-US" sz="3000" b="1">
+                <a:solidFill>
+                  <a:srgbClr val="7C45AD"/>
+                </a:solidFill>
+                <a:latin typeface="Arial"/>
+                <a:cs typeface="Arial"/>
+              </a:rPr>
+              <a:t>2 APB Slave block</a:t>
+            </a:r>
+            <a:endParaRPr sz="3000">
+              <a:latin typeface="Arial"/>
+              <a:cs typeface="Arial"/>
+            </a:endParaRPr>
+          </a:p>
+        </p:txBody>
+      </p:sp>
+      <p:sp>
+        <p:nvSpPr>
+          <p:cNvPr id="6" name="object 6">
+            <a:extLst>
+              <a:ext uri="{FF2B5EF4-FFF2-40B4-BE49-F238E27FC236}">
+                <a16:creationId xmlns:a16="http://schemas.microsoft.com/office/drawing/2014/main" id="{47C03307-6C8B-67E6-F8F9-40C38A7A74BE}"/>
+              </a:ext>
+            </a:extLst>
+          </p:cNvPr>
+          <p:cNvSpPr txBox="1">
+            <a:spLocks noGrp="1"/>
+          </p:cNvSpPr>
+          <p:nvPr>
+            <p:ph type="dt" sz="half" idx="6"/>
+          </p:nvPr>
+        </p:nvSpPr>
+        <p:spPr>
+          <a:prstGeom prst="rect">
+            <a:avLst/>
+          </a:prstGeom>
+        </p:spPr>
+        <p:txBody>
+          <a:bodyPr vert="horz" wrap="square" lIns="0" tIns="6350" rIns="0" bIns="0" rtlCol="0">
+            <a:spAutoFit/>
+          </a:bodyPr>
+          <a:lstStyle/>
+          <a:p>
+            <a:pPr marL="12700">
+              <a:lnSpc>
+                <a:spcPct val="100000"/>
+              </a:lnSpc>
+              <a:spcBef>
+                <a:spcPts val="50"/>
+              </a:spcBef>
+            </a:pPr>
+            <a:r>
+              <a:rPr dirty="0"/>
+              <a:t>Thiết</a:t>
+            </a:r>
+            <a:r>
+              <a:rPr spc="-20" dirty="0"/>
+              <a:t> </a:t>
+            </a:r>
+            <a:r>
+              <a:rPr dirty="0"/>
+              <a:t>Kế</a:t>
+            </a:r>
+            <a:r>
+              <a:rPr spc="-40" dirty="0"/>
+              <a:t> </a:t>
+            </a:r>
+            <a:r>
+              <a:rPr dirty="0"/>
+              <a:t>Vi</a:t>
+            </a:r>
+            <a:r>
+              <a:rPr spc="10" dirty="0"/>
+              <a:t> </a:t>
+            </a:r>
+            <a:r>
+              <a:rPr spc="-20" dirty="0"/>
+              <a:t>Mạch</a:t>
+            </a:r>
+          </a:p>
+        </p:txBody>
+      </p:sp>
+      <p:sp>
+        <p:nvSpPr>
+          <p:cNvPr id="7" name="object 7">
+            <a:extLst>
+              <a:ext uri="{FF2B5EF4-FFF2-40B4-BE49-F238E27FC236}">
+                <a16:creationId xmlns:a16="http://schemas.microsoft.com/office/drawing/2014/main" id="{5C2EEA92-CCDB-7C19-2383-D7DFB7E828B3}"/>
+              </a:ext>
+            </a:extLst>
+          </p:cNvPr>
+          <p:cNvSpPr txBox="1">
+            <a:spLocks noGrp="1"/>
+          </p:cNvSpPr>
+          <p:nvPr>
+            <p:ph type="sldNum" sz="quarter" idx="7"/>
+          </p:nvPr>
+        </p:nvSpPr>
+        <p:spPr>
+          <a:prstGeom prst="rect">
+            <a:avLst/>
+          </a:prstGeom>
+        </p:spPr>
+        <p:txBody>
+          <a:bodyPr vert="horz" wrap="square" lIns="0" tIns="6350" rIns="0" bIns="0" rtlCol="0">
+            <a:spAutoFit/>
+          </a:bodyPr>
+          <a:lstStyle/>
+          <a:p>
+            <a:pPr marL="38100">
+              <a:lnSpc>
+                <a:spcPct val="100000"/>
+              </a:lnSpc>
+              <a:spcBef>
+                <a:spcPts val="50"/>
+              </a:spcBef>
+            </a:pPr>
+            <a:fld id="{81D60167-4931-47E6-BA6A-407CBD079E47}" type="slidenum">
+              <a:rPr spc="-25" dirty="0"/>
+              <a:t>34</a:t>
+            </a:fld>
+            <a:endParaRPr spc="-25" dirty="0"/>
+          </a:p>
+        </p:txBody>
+      </p:sp>
+      <p:sp>
+        <p:nvSpPr>
+          <p:cNvPr id="8" name="object 8">
+            <a:extLst>
+              <a:ext uri="{FF2B5EF4-FFF2-40B4-BE49-F238E27FC236}">
+                <a16:creationId xmlns:a16="http://schemas.microsoft.com/office/drawing/2014/main" id="{D48A72A4-1D36-C019-8EF0-B5A2EDF645C2}"/>
+              </a:ext>
+            </a:extLst>
+          </p:cNvPr>
+          <p:cNvSpPr txBox="1">
+            <a:spLocks noGrp="1"/>
+          </p:cNvSpPr>
+          <p:nvPr>
+            <p:ph type="ftr" sz="quarter" idx="5"/>
+          </p:nvPr>
+        </p:nvSpPr>
+        <p:spPr>
+          <a:prstGeom prst="rect">
+            <a:avLst/>
+          </a:prstGeom>
+        </p:spPr>
+        <p:txBody>
+          <a:bodyPr vert="horz" wrap="square" lIns="0" tIns="5715" rIns="0" bIns="0" rtlCol="0">
+            <a:spAutoFit/>
+          </a:bodyPr>
+          <a:lstStyle/>
+          <a:p>
+            <a:pPr marL="12700">
+              <a:lnSpc>
+                <a:spcPct val="100000"/>
+              </a:lnSpc>
+              <a:spcBef>
+                <a:spcPts val="45"/>
+              </a:spcBef>
+            </a:pPr>
+            <a:r>
+              <a:rPr dirty="0"/>
+              <a:t>©</a:t>
+            </a:r>
+            <a:r>
+              <a:rPr spc="-45" dirty="0"/>
+              <a:t> </a:t>
+            </a:r>
+            <a:r>
+              <a:rPr dirty="0"/>
+              <a:t>2025</a:t>
+            </a:r>
+            <a:r>
+              <a:rPr spc="-15" dirty="0"/>
+              <a:t> </a:t>
+            </a:r>
+            <a:r>
+              <a:rPr dirty="0"/>
+              <a:t>–</a:t>
+            </a:r>
+            <a:r>
+              <a:rPr spc="-20" dirty="0"/>
+              <a:t> </a:t>
+            </a:r>
+            <a:r>
+              <a:rPr dirty="0"/>
+              <a:t>Long</a:t>
+            </a:r>
+            <a:r>
+              <a:rPr spc="-10" dirty="0"/>
+              <a:t> Hoang</a:t>
+            </a:r>
+          </a:p>
+        </p:txBody>
+      </p:sp>
+      <p:pic>
+        <p:nvPicPr>
+          <p:cNvPr id="3074" name="Picture 2">
+            <a:extLst>
+              <a:ext uri="{FF2B5EF4-FFF2-40B4-BE49-F238E27FC236}">
+                <a16:creationId xmlns:a16="http://schemas.microsoft.com/office/drawing/2014/main" id="{59A85254-507C-5EF1-3C33-5F6637585359}"/>
+              </a:ext>
+            </a:extLst>
+          </p:cNvPr>
+          <p:cNvPicPr>
+            <a:picLocks noChangeAspect="1" noChangeArrowheads="1"/>
+          </p:cNvPicPr>
+          <p:nvPr/>
+        </p:nvPicPr>
+        <p:blipFill>
+          <a:blip r:embed="rId2" cstate="print">
+            <a:extLst>
+              <a:ext uri="{28A0092B-C50C-407E-A947-70E740481C1C}">
+                <a14:useLocalDpi xmlns:a14="http://schemas.microsoft.com/office/drawing/2010/main" val="0"/>
+              </a:ext>
+            </a:extLst>
+          </a:blip>
+          <a:srcRect/>
+          <a:stretch>
+            <a:fillRect/>
+          </a:stretch>
+        </p:blipFill>
+        <p:spPr bwMode="auto">
+          <a:xfrm>
+            <a:off x="3148222" y="1752600"/>
+            <a:ext cx="5590756" cy="2390530"/>
+          </a:xfrm>
+          <a:prstGeom prst="rect">
+            <a:avLst/>
+          </a:prstGeom>
+          <a:noFill/>
+          <a:extLst>
+            <a:ext uri="{909E8E84-426E-40DD-AFC4-6F175D3DCCD1}">
+              <a14:hiddenFill xmlns:a14="http://schemas.microsoft.com/office/drawing/2010/main">
+                <a:solidFill>
+                  <a:srgbClr val="FFFFFF"/>
+                </a:solidFill>
+              </a14:hiddenFill>
+            </a:ext>
+          </a:extLst>
+        </p:spPr>
+      </p:pic>
+      <p:graphicFrame>
+        <p:nvGraphicFramePr>
+          <p:cNvPr id="4" name="Table 3">
+            <a:extLst>
+              <a:ext uri="{FF2B5EF4-FFF2-40B4-BE49-F238E27FC236}">
+                <a16:creationId xmlns:a16="http://schemas.microsoft.com/office/drawing/2014/main" id="{FECE5504-113E-F976-1491-C56874EF2F70}"/>
+              </a:ext>
+            </a:extLst>
+          </p:cNvPr>
+          <p:cNvGraphicFramePr>
+            <a:graphicFrameLocks noGrp="1"/>
+          </p:cNvGraphicFramePr>
+          <p:nvPr>
+            <p:extLst>
+              <p:ext uri="{D42A27DB-BD31-4B8C-83A1-F6EECF244321}">
+                <p14:modId xmlns:p14="http://schemas.microsoft.com/office/powerpoint/2010/main" val="1499366874"/>
+              </p:ext>
+            </p:extLst>
+          </p:nvPr>
+        </p:nvGraphicFramePr>
+        <p:xfrm>
+          <a:off x="629856" y="4369681"/>
+          <a:ext cx="10932160" cy="1828800"/>
+        </p:xfrm>
+        <a:graphic>
+          <a:graphicData uri="http://schemas.openxmlformats.org/drawingml/2006/table">
+            <a:tbl>
+              <a:tblPr firstRow="1" bandRow="1">
+                <a:tableStyleId>{00A15C55-8517-42AA-B614-E9B94910E393}</a:tableStyleId>
+              </a:tblPr>
+              <a:tblGrid>
+                <a:gridCol w="1622808">
+                  <a:extLst>
+                    <a:ext uri="{9D8B030D-6E8A-4147-A177-3AD203B41FA5}">
+                      <a16:colId xmlns:a16="http://schemas.microsoft.com/office/drawing/2014/main" val="579931218"/>
+                    </a:ext>
+                  </a:extLst>
+                </a:gridCol>
+                <a:gridCol w="2541998">
+                  <a:extLst>
+                    <a:ext uri="{9D8B030D-6E8A-4147-A177-3AD203B41FA5}">
+                      <a16:colId xmlns:a16="http://schemas.microsoft.com/office/drawing/2014/main" val="1158279828"/>
+                    </a:ext>
+                  </a:extLst>
+                </a:gridCol>
+                <a:gridCol w="6767354">
+                  <a:extLst>
+                    <a:ext uri="{9D8B030D-6E8A-4147-A177-3AD203B41FA5}">
+                      <a16:colId xmlns:a16="http://schemas.microsoft.com/office/drawing/2014/main" val="3965270395"/>
+                    </a:ext>
+                  </a:extLst>
+                </a:gridCol>
+              </a:tblGrid>
+              <a:tr h="198120">
+                <a:tc>
+                  <a:txBody>
+                    <a:bodyPr/>
+                    <a:lstStyle/>
+                    <a:p>
+                      <a:pPr algn="ctr"/>
+                      <a:r>
+                        <a:rPr lang="en-US" sz="1600">
+                          <a:latin typeface="Arial" panose="020B0604020202020204" pitchFamily="34" charset="0"/>
+                          <a:cs typeface="Arial" panose="020B0604020202020204" pitchFamily="34" charset="0"/>
+                        </a:rPr>
+                        <a:t>BUS Signals</a:t>
+                      </a:r>
+                    </a:p>
+                  </a:txBody>
+                  <a:tcPr>
+                    <a:solidFill>
+                      <a:srgbClr val="7030A0"/>
+                    </a:solidFill>
+                  </a:tcPr>
+                </a:tc>
+                <a:tc>
+                  <a:txBody>
+                    <a:bodyPr/>
+                    <a:lstStyle/>
+                    <a:p>
+                      <a:pPr algn="ctr"/>
+                      <a:r>
+                        <a:rPr lang="en-US" sz="1600">
+                          <a:latin typeface="Arial" panose="020B0604020202020204" pitchFamily="34" charset="0"/>
+                          <a:cs typeface="Arial" panose="020B0604020202020204" pitchFamily="34" charset="0"/>
+                        </a:rPr>
+                        <a:t>Name</a:t>
+                      </a:r>
+                    </a:p>
+                  </a:txBody>
+                  <a:tcPr>
+                    <a:solidFill>
+                      <a:srgbClr val="7030A0"/>
+                    </a:solidFill>
+                  </a:tcPr>
+                </a:tc>
+                <a:tc>
+                  <a:txBody>
+                    <a:bodyPr/>
+                    <a:lstStyle/>
+                    <a:p>
+                      <a:pPr algn="ctr"/>
+                      <a:r>
+                        <a:rPr lang="en-US" sz="1600">
+                          <a:latin typeface="Arial" panose="020B0604020202020204" pitchFamily="34" charset="0"/>
+                          <a:cs typeface="Arial" panose="020B0604020202020204" pitchFamily="34" charset="0"/>
+                        </a:rPr>
+                        <a:t>Descriptions</a:t>
+                      </a:r>
+                    </a:p>
+                  </a:txBody>
+                  <a:tcPr>
+                    <a:solidFill>
+                      <a:srgbClr val="7030A0"/>
+                    </a:solidFill>
+                  </a:tcPr>
+                </a:tc>
+                <a:extLst>
+                  <a:ext uri="{0D108BD9-81ED-4DB2-BD59-A6C34878D82A}">
+                    <a16:rowId xmlns:a16="http://schemas.microsoft.com/office/drawing/2014/main" val="539352098"/>
+                  </a:ext>
+                </a:extLst>
+              </a:tr>
+              <a:tr h="0">
+                <a:tc>
+                  <a:txBody>
+                    <a:bodyPr/>
+                    <a:lstStyle/>
+                    <a:p>
+                      <a:pPr algn="ctr"/>
+                      <a:r>
+                        <a:rPr lang="en-US" sz="1600">
+                          <a:latin typeface="Arial" panose="020B0604020202020204" pitchFamily="34" charset="0"/>
+                          <a:cs typeface="Arial" panose="020B0604020202020204" pitchFamily="34" charset="0"/>
+                        </a:rPr>
+                        <a:t>PADDR[31]</a:t>
+                      </a:r>
+                    </a:p>
+                  </a:txBody>
+                  <a:tcPr anchor="ctr"/>
+                </a:tc>
+                <a:tc>
+                  <a:txBody>
+                    <a:bodyPr/>
+                    <a:lstStyle/>
+                    <a:p>
+                      <a:pPr algn="just"/>
+                      <a:r>
+                        <a:rPr lang="en-US" sz="1600">
+                          <a:latin typeface="Arial" panose="020B0604020202020204" pitchFamily="34" charset="0"/>
+                          <a:cs typeface="Arial" panose="020B0604020202020204" pitchFamily="34" charset="0"/>
+                        </a:rPr>
+                        <a:t>Slave Select Bit</a:t>
+                      </a:r>
+                    </a:p>
+                  </a:txBody>
+                  <a:tcPr/>
+                </a:tc>
+                <a:tc>
+                  <a:txBody>
+                    <a:bodyPr/>
+                    <a:lstStyle/>
+                    <a:p>
+                      <a:pPr algn="just"/>
+                      <a:r>
+                        <a:rPr lang="en-US" sz="1600">
+                          <a:latin typeface="Arial" panose="020B0604020202020204" pitchFamily="34" charset="0"/>
+                          <a:cs typeface="Arial" panose="020B0604020202020204" pitchFamily="34" charset="0"/>
+                        </a:rPr>
+                        <a:t>Used to select the target slave. </a:t>
+                      </a:r>
+                      <a:r>
+                        <a:rPr lang="en-US" sz="1600">
+                          <a:solidFill>
+                            <a:schemeClr val="dk1"/>
+                          </a:solidFill>
+                          <a:latin typeface="Arial" panose="020B0604020202020204" pitchFamily="34" charset="0"/>
+                          <a:ea typeface="+mn-ea"/>
+                          <a:cs typeface="Arial" panose="020B0604020202020204" pitchFamily="34" charset="0"/>
+                        </a:rPr>
+                        <a:t>0</a:t>
+                      </a:r>
+                      <a:r>
+                        <a:rPr lang="en-US" sz="1600">
+                          <a:latin typeface="Arial" panose="020B0604020202020204" pitchFamily="34" charset="0"/>
+                          <a:cs typeface="Arial" panose="020B0604020202020204" pitchFamily="34" charset="0"/>
+                        </a:rPr>
+                        <a:t> selects Slave 0; </a:t>
+                      </a:r>
+                      <a:r>
+                        <a:rPr lang="en-US" sz="1600">
+                          <a:solidFill>
+                            <a:schemeClr val="dk1"/>
+                          </a:solidFill>
+                          <a:latin typeface="Arial" panose="020B0604020202020204" pitchFamily="34" charset="0"/>
+                          <a:ea typeface="+mn-ea"/>
+                          <a:cs typeface="Arial" panose="020B0604020202020204" pitchFamily="34" charset="0"/>
+                        </a:rPr>
+                        <a:t>1</a:t>
+                      </a:r>
+                      <a:r>
+                        <a:rPr lang="en-US" sz="1600">
+                          <a:latin typeface="Arial" panose="020B0604020202020204" pitchFamily="34" charset="0"/>
+                          <a:cs typeface="Arial" panose="020B0604020202020204" pitchFamily="34" charset="0"/>
+                        </a:rPr>
+                        <a:t> selects Slave 1.</a:t>
+                      </a:r>
+                    </a:p>
+                  </a:txBody>
+                  <a:tcPr/>
+                </a:tc>
+                <a:extLst>
+                  <a:ext uri="{0D108BD9-81ED-4DB2-BD59-A6C34878D82A}">
+                    <a16:rowId xmlns:a16="http://schemas.microsoft.com/office/drawing/2014/main" val="1815105458"/>
+                  </a:ext>
+                </a:extLst>
+              </a:tr>
+              <a:tr h="0">
+                <a:tc>
+                  <a:txBody>
+                    <a:bodyPr/>
+                    <a:lstStyle/>
+                    <a:p>
+                      <a:pPr algn="ctr"/>
+                      <a:r>
+                        <a:rPr lang="en-US" sz="1600">
+                          <a:latin typeface="Arial" panose="020B0604020202020204" pitchFamily="34" charset="0"/>
+                          <a:cs typeface="Arial" panose="020B0604020202020204" pitchFamily="34" charset="0"/>
+                        </a:rPr>
+                        <a:t>PADDR[30:2]</a:t>
+                      </a:r>
+                    </a:p>
+                  </a:txBody>
+                  <a:tcPr anchor="ctr"/>
+                </a:tc>
+                <a:tc>
+                  <a:txBody>
+                    <a:bodyPr/>
+                    <a:lstStyle/>
+                    <a:p>
+                      <a:pPr algn="just"/>
+                      <a:r>
+                        <a:rPr lang="en-US" sz="1600">
+                          <a:latin typeface="Arial" panose="020B0604020202020204" pitchFamily="34" charset="0"/>
+                          <a:cs typeface="Arial" panose="020B0604020202020204" pitchFamily="34" charset="0"/>
+                        </a:rPr>
+                        <a:t>Memory Address</a:t>
+                      </a:r>
+                    </a:p>
+                  </a:txBody>
+                  <a:tcPr/>
+                </a:tc>
+                <a:tc>
+                  <a:txBody>
+                    <a:bodyPr/>
+                    <a:lstStyle/>
+                    <a:p>
+                      <a:pPr algn="just"/>
+                      <a:r>
+                        <a:rPr lang="en-US" sz="1600">
+                          <a:latin typeface="Arial" panose="020B0604020202020204" pitchFamily="34" charset="0"/>
+                          <a:cs typeface="Arial" panose="020B0604020202020204" pitchFamily="34" charset="0"/>
+                        </a:rPr>
+                        <a:t>These bits represent the internal memory index (Word-aligned). They are used to access specific data entries within the slave's memory array.</a:t>
+                      </a:r>
+                    </a:p>
+                  </a:txBody>
+                  <a:tcPr/>
+                </a:tc>
+                <a:extLst>
+                  <a:ext uri="{0D108BD9-81ED-4DB2-BD59-A6C34878D82A}">
+                    <a16:rowId xmlns:a16="http://schemas.microsoft.com/office/drawing/2014/main" val="1486802341"/>
+                  </a:ext>
+                </a:extLst>
+              </a:tr>
+              <a:tr h="0">
+                <a:tc>
+                  <a:txBody>
+                    <a:bodyPr/>
+                    <a:lstStyle/>
+                    <a:p>
+                      <a:pPr algn="ctr"/>
+                      <a:r>
+                        <a:rPr lang="en-US" sz="1600">
+                          <a:latin typeface="Arial" panose="020B0604020202020204" pitchFamily="34" charset="0"/>
+                          <a:cs typeface="Arial" panose="020B0604020202020204" pitchFamily="34" charset="0"/>
+                        </a:rPr>
+                        <a:t>PADDR[1:0]</a:t>
+                      </a:r>
+                    </a:p>
+                  </a:txBody>
+                  <a:tcPr anchor="ctr"/>
+                </a:tc>
+                <a:tc>
+                  <a:txBody>
+                    <a:bodyPr/>
+                    <a:lstStyle/>
+                    <a:p>
+                      <a:pPr algn="just"/>
+                      <a:r>
+                        <a:rPr lang="en-US" sz="1600">
+                          <a:latin typeface="Arial" panose="020B0604020202020204" pitchFamily="34" charset="0"/>
+                          <a:cs typeface="Arial" panose="020B0604020202020204" pitchFamily="34" charset="0"/>
+                        </a:rPr>
+                        <a:t>Waiting Count</a:t>
+                      </a:r>
+                    </a:p>
+                  </a:txBody>
+                  <a:tcPr/>
+                </a:tc>
+                <a:tc>
+                  <a:txBody>
+                    <a:bodyPr/>
+                    <a:lstStyle/>
+                    <a:p>
+                      <a:pPr algn="just"/>
+                      <a:r>
+                        <a:rPr lang="en-US" sz="1600">
+                          <a:latin typeface="Arial" panose="020B0604020202020204" pitchFamily="34" charset="0"/>
+                          <a:cs typeface="Arial" panose="020B0604020202020204" pitchFamily="34" charset="0"/>
+                        </a:rPr>
+                        <a:t>These bits determine the number of wait states (delay cycles) the Slave will force the Master to wait before completing the transaction.</a:t>
+                      </a:r>
+                    </a:p>
+                  </a:txBody>
+                  <a:tcPr/>
+                </a:tc>
+                <a:extLst>
+                  <a:ext uri="{0D108BD9-81ED-4DB2-BD59-A6C34878D82A}">
+                    <a16:rowId xmlns:a16="http://schemas.microsoft.com/office/drawing/2014/main" val="1250865581"/>
+                  </a:ext>
+                </a:extLst>
+              </a:tr>
+            </a:tbl>
+          </a:graphicData>
+        </a:graphic>
+      </p:graphicFrame>
+    </p:spTree>
+    <p:extLst>
+      <p:ext uri="{BB962C8B-B14F-4D97-AF65-F5344CB8AC3E}">
+        <p14:creationId xmlns:p14="http://schemas.microsoft.com/office/powerpoint/2010/main" val="2887691553"/>
+      </p:ext>
+    </p:extLst>
+  </p:cSld>
+  <p:clrMapOvr>
+    <a:masterClrMapping/>
+  </p:clrMapOvr>
+</p:sld>
+</file>
+
+<file path=ppt/slides/slide35.xml><?xml version="1.0" encoding="utf-8"?>
+<p:sld xmlns:a="http://schemas.openxmlformats.org/drawingml/2006/main" xmlns:r="http://schemas.openxmlformats.org/officeDocument/2006/relationships" xmlns:p="http://schemas.openxmlformats.org/presentationml/2006/main" showMasterSp="0">
+  <p:cSld>
+    <p:spTree>
+      <p:nvGrpSpPr>
+        <p:cNvPr id="1" name="">
+          <a:extLst>
+            <a:ext uri="{FF2B5EF4-FFF2-40B4-BE49-F238E27FC236}">
               <a16:creationId xmlns:a16="http://schemas.microsoft.com/office/drawing/2014/main" id="{76B777D0-C1EE-D4CD-9E47-3D3FD96B1BD2}"/>
             </a:ext>
           </a:extLst>
@@ -20154,7 +20886,7 @@
             </a:pPr>
             <a:fld id="{81D60167-4931-47E6-BA6A-407CBD079E47}" type="slidenum">
               <a:rPr spc="-25" dirty="0"/>
-              <a:t>34</a:t>
+              <a:t>35</a:t>
             </a:fld>
             <a:endParaRPr spc="-25" dirty="0"/>
           </a:p>
@@ -20329,7 +21061,7 @@
 </p:sld>
 </file>
 
-<file path=ppt/slides/slide35.xml><?xml version="1.0" encoding="utf-8"?>
+<file path=ppt/slides/slide36.xml><?xml version="1.0" encoding="utf-8"?>
 <p:sld xmlns:a="http://schemas.openxmlformats.org/drawingml/2006/main" xmlns:r="http://schemas.openxmlformats.org/officeDocument/2006/relationships" xmlns:p="http://schemas.openxmlformats.org/presentationml/2006/main" showMasterSp="0">
   <p:cSld>
     <p:spTree>
@@ -20587,7 +21319,7 @@
             </a:pPr>
             <a:fld id="{81D60167-4931-47E6-BA6A-407CBD079E47}" type="slidenum">
               <a:rPr spc="-25" dirty="0"/>
-              <a:t>35</a:t>
+              <a:t>36</a:t>
             </a:fld>
             <a:endParaRPr spc="-25" dirty="0"/>
           </a:p>
@@ -20762,7 +21494,7 @@
 </p:sld>
 </file>
 
-<file path=ppt/slides/slide36.xml><?xml version="1.0" encoding="utf-8"?>
+<file path=ppt/slides/slide37.xml><?xml version="1.0" encoding="utf-8"?>
 <p:sld xmlns:a="http://schemas.openxmlformats.org/drawingml/2006/main" xmlns:r="http://schemas.openxmlformats.org/officeDocument/2006/relationships" xmlns:p="http://schemas.openxmlformats.org/presentationml/2006/main">
   <p:cSld>
     <p:spTree>
@@ -20926,7 +21658,7 @@
             </a:pPr>
             <a:fld id="{81D60167-4931-47E6-BA6A-407CBD079E47}" type="slidenum">
               <a:rPr spc="-25" dirty="0"/>
-              <a:t>36</a:t>
+              <a:t>37</a:t>
             </a:fld>
             <a:endParaRPr spc="-25" dirty="0"/>
           </a:p>
@@ -21004,7 +21736,7 @@
 </p:sld>
 </file>
 
-<file path=ppt/slides/slide37.xml><?xml version="1.0" encoding="utf-8"?>
+<file path=ppt/slides/slide38.xml><?xml version="1.0" encoding="utf-8"?>
 <p:sld xmlns:a="http://schemas.openxmlformats.org/drawingml/2006/main" xmlns:r="http://schemas.openxmlformats.org/officeDocument/2006/relationships" xmlns:p="http://schemas.openxmlformats.org/presentationml/2006/main" showMasterSp="0">
   <p:cSld>
     <p:spTree>
@@ -21169,7 +21901,7 @@
             </a:pPr>
             <a:fld id="{81D60167-4931-47E6-BA6A-407CBD079E47}" type="slidenum">
               <a:rPr spc="-25" dirty="0"/>
-              <a:t>37</a:t>
+              <a:t>38</a:t>
             </a:fld>
             <a:endParaRPr spc="-25" dirty="0"/>
           </a:p>
@@ -21506,7 +22238,7 @@
 </p:sld>
 </file>
 
-<file path=ppt/slides/slide38.xml><?xml version="1.0" encoding="utf-8"?>
+<file path=ppt/slides/slide39.xml><?xml version="1.0" encoding="utf-8"?>
 <p:sld xmlns:a="http://schemas.openxmlformats.org/drawingml/2006/main" xmlns:r="http://schemas.openxmlformats.org/officeDocument/2006/relationships" xmlns:p="http://schemas.openxmlformats.org/presentationml/2006/main" showMasterSp="0">
   <p:cSld>
     <p:spTree>
@@ -21695,7 +22427,7 @@
             </a:pPr>
             <a:fld id="{81D60167-4931-47E6-BA6A-407CBD079E47}" type="slidenum">
               <a:rPr spc="-25" dirty="0"/>
-              <a:t>38</a:t>
+              <a:t>39</a:t>
             </a:fld>
             <a:endParaRPr spc="-25" dirty="0"/>
           </a:p>
@@ -21838,7 +22570,7 @@
           <p:nvPr>
             <p:extLst>
               <p:ext uri="{D42A27DB-BD31-4B8C-83A1-F6EECF244321}">
-                <p14:modId xmlns:p14="http://schemas.microsoft.com/office/powerpoint/2010/main" val="2630032821"/>
+                <p14:modId xmlns:p14="http://schemas.microsoft.com/office/powerpoint/2010/main" val="248873931"/>
               </p:ext>
             </p:extLst>
           </p:nvPr>
@@ -22004,7 +22736,7 @@
                           <a:ea typeface="+mn-ea"/>
                           <a:cs typeface="Arial" panose="020B0604020202020204" pitchFamily="34" charset="0"/>
                         </a:rPr>
-                        <a:t>0xA</a:t>
+                        <a:t>0x8 (Slave 0, Wait = 0)</a:t>
                       </a:r>
                       <a:r>
                         <a:rPr lang="en-US" sz="1600">
@@ -22321,14 +23053,14 @@
                           <a:ea typeface="+mn-ea"/>
                           <a:cs typeface="Arial" panose="020B0604020202020204" pitchFamily="34" charset="0"/>
                         </a:rPr>
-                        <a:t>0x8000_0005</a:t>
+                        <a:t>0x8000_0004</a:t>
                       </a:r>
                       <a:r>
                         <a:rPr lang="en-US" sz="1600">
                           <a:latin typeface="Arial" panose="020B0604020202020204" pitchFamily="34" charset="0"/>
                           <a:cs typeface="Arial" panose="020B0604020202020204" pitchFamily="34" charset="0"/>
                         </a:rPr>
-                        <a:t> (Slave 1), followed by a read from the same address.</a:t>
+                        <a:t> (Slave 1, Wait = 0), followed by a read from the same address.</a:t>
                       </a:r>
                     </a:p>
                   </a:txBody>
@@ -22548,22 +23280,23 @@
                         <a:t>Access (Read/Write) address </a:t>
                       </a:r>
                       <a:r>
-                        <a:rPr lang="en-US" sz="1600">
+                        <a:rPr lang="en-US" sz="1600" b="0" i="0">
                           <a:solidFill>
                             <a:schemeClr val="dk1"/>
                           </a:solidFill>
-                          <a:latin typeface="Arial" panose="020B0604020202020204" pitchFamily="34" charset="0"/>
+                          <a:effectLst/>
+                          <a:latin typeface="+mn-lt"/>
                           <a:ea typeface="+mn-ea"/>
-                          <a:cs typeface="Arial" panose="020B0604020202020204" pitchFamily="34" charset="0"/>
-                        </a:rPr>
-                        <a:t>0x500</a:t>
+                          <a:cs typeface="+mn-cs"/>
+                        </a:rPr>
+                        <a:t>0x00005000</a:t>
                       </a:r>
                       <a:r>
                         <a:rPr lang="en-US" sz="1600">
                           <a:latin typeface="Arial" panose="020B0604020202020204" pitchFamily="34" charset="0"/>
                           <a:cs typeface="Arial" panose="020B0604020202020204" pitchFamily="34" charset="0"/>
                         </a:rPr>
-                        <a:t> (decimal 1280), which exceeds the memory size (1024) of the Slave.</a:t>
+                        <a:t> (PADDR[30:2] is 1400 in Decimal), which exceeds the memory size (1024) of the Slave.</a:t>
                       </a:r>
                     </a:p>
                   </a:txBody>
@@ -22758,7 +23491,420 @@
 </p:sld>
 </file>
 
-<file path=ppt/slides/slide39.xml><?xml version="1.0" encoding="utf-8"?>
+<file path=ppt/slides/slide4.xml><?xml version="1.0" encoding="utf-8"?>
+<p:sld xmlns:a="http://schemas.openxmlformats.org/drawingml/2006/main" xmlns:r="http://schemas.openxmlformats.org/officeDocument/2006/relationships" xmlns:p="http://schemas.openxmlformats.org/presentationml/2006/main" showMasterSp="0">
+  <p:cSld>
+    <p:spTree>
+      <p:nvGrpSpPr>
+        <p:cNvPr id="1" name=""/>
+        <p:cNvGrpSpPr/>
+        <p:nvPr/>
+      </p:nvGrpSpPr>
+      <p:grpSpPr>
+        <a:xfrm>
+          <a:off x="0" y="0"/>
+          <a:ext cx="0" cy="0"/>
+          <a:chOff x="0" y="0"/>
+          <a:chExt cx="0" cy="0"/>
+        </a:xfrm>
+      </p:grpSpPr>
+      <p:sp>
+        <p:nvSpPr>
+          <p:cNvPr id="4" name="object 4"/>
+          <p:cNvSpPr txBox="1">
+            <a:spLocks noGrp="1"/>
+          </p:cNvSpPr>
+          <p:nvPr>
+            <p:ph type="dt" sz="half" idx="6"/>
+          </p:nvPr>
+        </p:nvSpPr>
+        <p:spPr>
+          <a:prstGeom prst="rect">
+            <a:avLst/>
+          </a:prstGeom>
+        </p:spPr>
+        <p:txBody>
+          <a:bodyPr vert="horz" wrap="square" lIns="0" tIns="6350" rIns="0" bIns="0" rtlCol="0">
+            <a:spAutoFit/>
+          </a:bodyPr>
+          <a:lstStyle/>
+          <a:p>
+            <a:pPr marL="12700">
+              <a:lnSpc>
+                <a:spcPct val="100000"/>
+              </a:lnSpc>
+              <a:spcBef>
+                <a:spcPts val="50"/>
+              </a:spcBef>
+            </a:pPr>
+            <a:r>
+              <a:rPr dirty="0"/>
+              <a:t>Thiết</a:t>
+            </a:r>
+            <a:r>
+              <a:rPr spc="-20" dirty="0"/>
+              <a:t> </a:t>
+            </a:r>
+            <a:r>
+              <a:rPr dirty="0"/>
+              <a:t>Kế</a:t>
+            </a:r>
+            <a:r>
+              <a:rPr spc="-40" dirty="0"/>
+              <a:t> </a:t>
+            </a:r>
+            <a:r>
+              <a:rPr dirty="0"/>
+              <a:t>Vi</a:t>
+            </a:r>
+            <a:r>
+              <a:rPr spc="10" dirty="0"/>
+              <a:t> </a:t>
+            </a:r>
+            <a:r>
+              <a:rPr spc="-20" dirty="0"/>
+              <a:t>Mạch</a:t>
+            </a:r>
+          </a:p>
+        </p:txBody>
+      </p:sp>
+      <p:sp>
+        <p:nvSpPr>
+          <p:cNvPr id="5" name="object 5"/>
+          <p:cNvSpPr txBox="1">
+            <a:spLocks noGrp="1"/>
+          </p:cNvSpPr>
+          <p:nvPr>
+            <p:ph type="sldNum" sz="quarter" idx="7"/>
+          </p:nvPr>
+        </p:nvSpPr>
+        <p:spPr>
+          <a:prstGeom prst="rect">
+            <a:avLst/>
+          </a:prstGeom>
+        </p:spPr>
+        <p:txBody>
+          <a:bodyPr vert="horz" wrap="square" lIns="0" tIns="6350" rIns="0" bIns="0" rtlCol="0">
+            <a:spAutoFit/>
+          </a:bodyPr>
+          <a:lstStyle/>
+          <a:p>
+            <a:pPr marL="38100">
+              <a:lnSpc>
+                <a:spcPct val="100000"/>
+              </a:lnSpc>
+              <a:spcBef>
+                <a:spcPts val="50"/>
+              </a:spcBef>
+            </a:pPr>
+            <a:fld id="{81D60167-4931-47E6-BA6A-407CBD079E47}" type="slidenum">
+              <a:rPr spc="-25" dirty="0"/>
+              <a:t>4</a:t>
+            </a:fld>
+            <a:endParaRPr spc="-25" dirty="0"/>
+          </a:p>
+        </p:txBody>
+      </p:sp>
+      <p:sp>
+        <p:nvSpPr>
+          <p:cNvPr id="6" name="object 6"/>
+          <p:cNvSpPr txBox="1">
+            <a:spLocks noGrp="1"/>
+          </p:cNvSpPr>
+          <p:nvPr>
+            <p:ph type="ftr" sz="quarter" idx="5"/>
+          </p:nvPr>
+        </p:nvSpPr>
+        <p:spPr>
+          <a:prstGeom prst="rect">
+            <a:avLst/>
+          </a:prstGeom>
+        </p:spPr>
+        <p:txBody>
+          <a:bodyPr vert="horz" wrap="square" lIns="0" tIns="5715" rIns="0" bIns="0" rtlCol="0">
+            <a:spAutoFit/>
+          </a:bodyPr>
+          <a:lstStyle/>
+          <a:p>
+            <a:pPr marL="12700">
+              <a:lnSpc>
+                <a:spcPct val="100000"/>
+              </a:lnSpc>
+              <a:spcBef>
+                <a:spcPts val="45"/>
+              </a:spcBef>
+            </a:pPr>
+            <a:r>
+              <a:rPr dirty="0"/>
+              <a:t>©</a:t>
+            </a:r>
+            <a:r>
+              <a:rPr spc="-45" dirty="0"/>
+              <a:t> </a:t>
+            </a:r>
+            <a:r>
+              <a:rPr dirty="0"/>
+              <a:t>2025</a:t>
+            </a:r>
+            <a:r>
+              <a:rPr spc="-15" dirty="0"/>
+              <a:t> </a:t>
+            </a:r>
+            <a:r>
+              <a:rPr dirty="0"/>
+              <a:t>–</a:t>
+            </a:r>
+            <a:r>
+              <a:rPr spc="-20" dirty="0"/>
+              <a:t> </a:t>
+            </a:r>
+            <a:r>
+              <a:rPr dirty="0"/>
+              <a:t>Long</a:t>
+            </a:r>
+            <a:r>
+              <a:rPr spc="-10" dirty="0"/>
+              <a:t> Hoang</a:t>
+            </a:r>
+          </a:p>
+        </p:txBody>
+      </p:sp>
+      <p:sp>
+        <p:nvSpPr>
+          <p:cNvPr id="2" name="object 2"/>
+          <p:cNvSpPr txBox="1">
+            <a:spLocks noGrp="1"/>
+          </p:cNvSpPr>
+          <p:nvPr>
+            <p:ph type="title"/>
+          </p:nvPr>
+        </p:nvSpPr>
+        <p:spPr>
+          <a:xfrm>
+            <a:off x="508317" y="480313"/>
+            <a:ext cx="3589654" cy="575310"/>
+          </a:xfrm>
+          <a:prstGeom prst="rect">
+            <a:avLst/>
+          </a:prstGeom>
+        </p:spPr>
+        <p:txBody>
+          <a:bodyPr vert="horz" wrap="square" lIns="0" tIns="13335" rIns="0" bIns="0" rtlCol="0">
+            <a:spAutoFit/>
+          </a:bodyPr>
+          <a:lstStyle/>
+          <a:p>
+            <a:pPr marL="12700">
+              <a:lnSpc>
+                <a:spcPct val="100000"/>
+              </a:lnSpc>
+              <a:spcBef>
+                <a:spcPts val="105"/>
+              </a:spcBef>
+            </a:pPr>
+            <a:r>
+              <a:rPr dirty="0"/>
+              <a:t>1.</a:t>
+            </a:r>
+            <a:r>
+              <a:rPr spc="-105" dirty="0"/>
+              <a:t> </a:t>
+            </a:r>
+            <a:r>
+              <a:rPr spc="-20" dirty="0"/>
+              <a:t>Specifications</a:t>
+            </a:r>
+          </a:p>
+        </p:txBody>
+      </p:sp>
+      <p:sp>
+        <p:nvSpPr>
+          <p:cNvPr id="7" name="object 3">
+            <a:extLst>
+              <a:ext uri="{FF2B5EF4-FFF2-40B4-BE49-F238E27FC236}">
+                <a16:creationId xmlns:a16="http://schemas.microsoft.com/office/drawing/2014/main" id="{CA90AF8F-A1B1-B0EF-BD90-25C3457FA1F5}"/>
+              </a:ext>
+            </a:extLst>
+          </p:cNvPr>
+          <p:cNvSpPr txBox="1"/>
+          <p:nvPr/>
+        </p:nvSpPr>
+        <p:spPr>
+          <a:xfrm>
+            <a:off x="457200" y="1121155"/>
+            <a:ext cx="8026083" cy="475130"/>
+          </a:xfrm>
+          <a:prstGeom prst="rect">
+            <a:avLst/>
+          </a:prstGeom>
+        </p:spPr>
+        <p:txBody>
+          <a:bodyPr vert="horz" wrap="square" lIns="0" tIns="13335" rIns="0" bIns="0" rtlCol="0">
+            <a:spAutoFit/>
+          </a:bodyPr>
+          <a:lstStyle/>
+          <a:p>
+            <a:pPr marL="12700">
+              <a:lnSpc>
+                <a:spcPct val="100000"/>
+              </a:lnSpc>
+              <a:spcBef>
+                <a:spcPts val="105"/>
+              </a:spcBef>
+            </a:pPr>
+            <a:r>
+              <a:rPr lang="en-US" sz="3000" b="1">
+                <a:solidFill>
+                  <a:srgbClr val="7C45AD"/>
+                </a:solidFill>
+                <a:latin typeface="Arial"/>
+                <a:cs typeface="Arial"/>
+              </a:rPr>
+              <a:t>1</a:t>
+            </a:r>
+            <a:r>
+              <a:rPr sz="3000" b="1">
+                <a:solidFill>
+                  <a:srgbClr val="7C45AD"/>
+                </a:solidFill>
+                <a:latin typeface="Arial"/>
+                <a:cs typeface="Arial"/>
+              </a:rPr>
+              <a:t>.1</a:t>
+            </a:r>
+            <a:r>
+              <a:rPr lang="en-US" sz="3000" b="1">
+                <a:solidFill>
+                  <a:srgbClr val="7C45AD"/>
+                </a:solidFill>
+                <a:latin typeface="Arial"/>
+                <a:cs typeface="Arial"/>
+              </a:rPr>
+              <a:t> Overview of the AMBA specification</a:t>
+            </a:r>
+          </a:p>
+        </p:txBody>
+      </p:sp>
+      <p:sp>
+        <p:nvSpPr>
+          <p:cNvPr id="9" name="TextBox 8">
+            <a:extLst>
+              <a:ext uri="{FF2B5EF4-FFF2-40B4-BE49-F238E27FC236}">
+                <a16:creationId xmlns:a16="http://schemas.microsoft.com/office/drawing/2014/main" id="{370CF898-9432-7BB6-6633-F407E9A3D23A}"/>
+              </a:ext>
+            </a:extLst>
+          </p:cNvPr>
+          <p:cNvSpPr txBox="1"/>
+          <p:nvPr/>
+        </p:nvSpPr>
+        <p:spPr>
+          <a:xfrm>
+            <a:off x="508316" y="1905000"/>
+            <a:ext cx="11033443" cy="646331"/>
+          </a:xfrm>
+          <a:prstGeom prst="rect">
+            <a:avLst/>
+          </a:prstGeom>
+          <a:noFill/>
+        </p:spPr>
+        <p:txBody>
+          <a:bodyPr wrap="square">
+            <a:spAutoFit/>
+          </a:bodyPr>
+          <a:lstStyle/>
+          <a:p>
+            <a:pPr algn="just"/>
+            <a:r>
+              <a:rPr lang="en-US"/>
+              <a:t>The Advanced Microcontroller Bus Architecture (AMBA) specification defines an on-chip communications standard for designing high-performance embedded microcontrollers. </a:t>
+            </a:r>
+          </a:p>
+        </p:txBody>
+      </p:sp>
+      <p:sp>
+        <p:nvSpPr>
+          <p:cNvPr id="11" name="TextBox 10">
+            <a:extLst>
+              <a:ext uri="{FF2B5EF4-FFF2-40B4-BE49-F238E27FC236}">
+                <a16:creationId xmlns:a16="http://schemas.microsoft.com/office/drawing/2014/main" id="{AE1AFCB2-CB93-363F-C556-64F9790378B6}"/>
+              </a:ext>
+            </a:extLst>
+          </p:cNvPr>
+          <p:cNvSpPr txBox="1"/>
+          <p:nvPr/>
+        </p:nvSpPr>
+        <p:spPr>
+          <a:xfrm>
+            <a:off x="508315" y="2860046"/>
+            <a:ext cx="11033443" cy="1477328"/>
+          </a:xfrm>
+          <a:prstGeom prst="rect">
+            <a:avLst/>
+          </a:prstGeom>
+          <a:noFill/>
+        </p:spPr>
+        <p:txBody>
+          <a:bodyPr wrap="square">
+            <a:spAutoFit/>
+          </a:bodyPr>
+          <a:lstStyle/>
+          <a:p>
+            <a:r>
+              <a:rPr lang="en-US"/>
+              <a:t>Four distinct buses are defined within the AMBA specification: </a:t>
+            </a:r>
+          </a:p>
+          <a:p>
+            <a:pPr marL="285750" indent="-285750">
+              <a:buFont typeface="Arial" panose="020B0604020202020204" pitchFamily="34" charset="0"/>
+              <a:buChar char="•"/>
+            </a:pPr>
+            <a:r>
+              <a:rPr lang="en-US"/>
+              <a:t>The Advanced High-performance Bus (AHB) </a:t>
+            </a:r>
+          </a:p>
+          <a:p>
+            <a:pPr marL="285750" indent="-285750">
+              <a:buFont typeface="Arial" panose="020B0604020202020204" pitchFamily="34" charset="0"/>
+              <a:buChar char="•"/>
+            </a:pPr>
+            <a:r>
+              <a:rPr lang="en-US"/>
+              <a:t>The Advanced System Bus (ASB) </a:t>
+            </a:r>
+          </a:p>
+          <a:p>
+            <a:pPr marL="285750" indent="-285750">
+              <a:buFont typeface="Arial" panose="020B0604020202020204" pitchFamily="34" charset="0"/>
+              <a:buChar char="•"/>
+            </a:pPr>
+            <a:r>
+              <a:rPr lang="en-US"/>
+              <a:t>The Advanced Peripheral Bus (APB).</a:t>
+            </a:r>
+          </a:p>
+          <a:p>
+            <a:pPr marL="285750" indent="-285750">
+              <a:buFont typeface="Arial" panose="020B0604020202020204" pitchFamily="34" charset="0"/>
+              <a:buChar char="•"/>
+            </a:pPr>
+            <a:r>
+              <a:rPr lang="en-US"/>
+              <a:t>The Advanced eXtensible Interface (AXI)</a:t>
+            </a:r>
+          </a:p>
+        </p:txBody>
+      </p:sp>
+    </p:spTree>
+  </p:cSld>
+  <p:clrMapOvr>
+    <a:masterClrMapping/>
+  </p:clrMapOvr>
+</p:sld>
+</file>
+
+<file path=ppt/slides/slide40.xml><?xml version="1.0" encoding="utf-8"?>
 <p:sld xmlns:a="http://schemas.openxmlformats.org/drawingml/2006/main" xmlns:r="http://schemas.openxmlformats.org/officeDocument/2006/relationships" xmlns:p="http://schemas.openxmlformats.org/presentationml/2006/main" showMasterSp="0">
   <p:cSld>
     <p:spTree>
@@ -22947,7 +24093,7 @@
             </a:pPr>
             <a:fld id="{81D60167-4931-47E6-BA6A-407CBD079E47}" type="slidenum">
               <a:rPr spc="-25" dirty="0"/>
-              <a:t>39</a:t>
+              <a:t>40</a:t>
             </a:fld>
             <a:endParaRPr spc="-25" dirty="0"/>
           </a:p>
@@ -23547,420 +24693,7 @@
 </p:sld>
 </file>
 
-<file path=ppt/slides/slide4.xml><?xml version="1.0" encoding="utf-8"?>
-<p:sld xmlns:a="http://schemas.openxmlformats.org/drawingml/2006/main" xmlns:r="http://schemas.openxmlformats.org/officeDocument/2006/relationships" xmlns:p="http://schemas.openxmlformats.org/presentationml/2006/main" showMasterSp="0">
-  <p:cSld>
-    <p:spTree>
-      <p:nvGrpSpPr>
-        <p:cNvPr id="1" name=""/>
-        <p:cNvGrpSpPr/>
-        <p:nvPr/>
-      </p:nvGrpSpPr>
-      <p:grpSpPr>
-        <a:xfrm>
-          <a:off x="0" y="0"/>
-          <a:ext cx="0" cy="0"/>
-          <a:chOff x="0" y="0"/>
-          <a:chExt cx="0" cy="0"/>
-        </a:xfrm>
-      </p:grpSpPr>
-      <p:sp>
-        <p:nvSpPr>
-          <p:cNvPr id="4" name="object 4"/>
-          <p:cNvSpPr txBox="1">
-            <a:spLocks noGrp="1"/>
-          </p:cNvSpPr>
-          <p:nvPr>
-            <p:ph type="dt" sz="half" idx="6"/>
-          </p:nvPr>
-        </p:nvSpPr>
-        <p:spPr>
-          <a:prstGeom prst="rect">
-            <a:avLst/>
-          </a:prstGeom>
-        </p:spPr>
-        <p:txBody>
-          <a:bodyPr vert="horz" wrap="square" lIns="0" tIns="6350" rIns="0" bIns="0" rtlCol="0">
-            <a:spAutoFit/>
-          </a:bodyPr>
-          <a:lstStyle/>
-          <a:p>
-            <a:pPr marL="12700">
-              <a:lnSpc>
-                <a:spcPct val="100000"/>
-              </a:lnSpc>
-              <a:spcBef>
-                <a:spcPts val="50"/>
-              </a:spcBef>
-            </a:pPr>
-            <a:r>
-              <a:rPr dirty="0"/>
-              <a:t>Thiết</a:t>
-            </a:r>
-            <a:r>
-              <a:rPr spc="-20" dirty="0"/>
-              <a:t> </a:t>
-            </a:r>
-            <a:r>
-              <a:rPr dirty="0"/>
-              <a:t>Kế</a:t>
-            </a:r>
-            <a:r>
-              <a:rPr spc="-40" dirty="0"/>
-              <a:t> </a:t>
-            </a:r>
-            <a:r>
-              <a:rPr dirty="0"/>
-              <a:t>Vi</a:t>
-            </a:r>
-            <a:r>
-              <a:rPr spc="10" dirty="0"/>
-              <a:t> </a:t>
-            </a:r>
-            <a:r>
-              <a:rPr spc="-20" dirty="0"/>
-              <a:t>Mạch</a:t>
-            </a:r>
-          </a:p>
-        </p:txBody>
-      </p:sp>
-      <p:sp>
-        <p:nvSpPr>
-          <p:cNvPr id="5" name="object 5"/>
-          <p:cNvSpPr txBox="1">
-            <a:spLocks noGrp="1"/>
-          </p:cNvSpPr>
-          <p:nvPr>
-            <p:ph type="sldNum" sz="quarter" idx="7"/>
-          </p:nvPr>
-        </p:nvSpPr>
-        <p:spPr>
-          <a:prstGeom prst="rect">
-            <a:avLst/>
-          </a:prstGeom>
-        </p:spPr>
-        <p:txBody>
-          <a:bodyPr vert="horz" wrap="square" lIns="0" tIns="6350" rIns="0" bIns="0" rtlCol="0">
-            <a:spAutoFit/>
-          </a:bodyPr>
-          <a:lstStyle/>
-          <a:p>
-            <a:pPr marL="38100">
-              <a:lnSpc>
-                <a:spcPct val="100000"/>
-              </a:lnSpc>
-              <a:spcBef>
-                <a:spcPts val="50"/>
-              </a:spcBef>
-            </a:pPr>
-            <a:fld id="{81D60167-4931-47E6-BA6A-407CBD079E47}" type="slidenum">
-              <a:rPr spc="-25" dirty="0"/>
-              <a:t>4</a:t>
-            </a:fld>
-            <a:endParaRPr spc="-25" dirty="0"/>
-          </a:p>
-        </p:txBody>
-      </p:sp>
-      <p:sp>
-        <p:nvSpPr>
-          <p:cNvPr id="6" name="object 6"/>
-          <p:cNvSpPr txBox="1">
-            <a:spLocks noGrp="1"/>
-          </p:cNvSpPr>
-          <p:nvPr>
-            <p:ph type="ftr" sz="quarter" idx="5"/>
-          </p:nvPr>
-        </p:nvSpPr>
-        <p:spPr>
-          <a:prstGeom prst="rect">
-            <a:avLst/>
-          </a:prstGeom>
-        </p:spPr>
-        <p:txBody>
-          <a:bodyPr vert="horz" wrap="square" lIns="0" tIns="5715" rIns="0" bIns="0" rtlCol="0">
-            <a:spAutoFit/>
-          </a:bodyPr>
-          <a:lstStyle/>
-          <a:p>
-            <a:pPr marL="12700">
-              <a:lnSpc>
-                <a:spcPct val="100000"/>
-              </a:lnSpc>
-              <a:spcBef>
-                <a:spcPts val="45"/>
-              </a:spcBef>
-            </a:pPr>
-            <a:r>
-              <a:rPr dirty="0"/>
-              <a:t>©</a:t>
-            </a:r>
-            <a:r>
-              <a:rPr spc="-45" dirty="0"/>
-              <a:t> </a:t>
-            </a:r>
-            <a:r>
-              <a:rPr dirty="0"/>
-              <a:t>2025</a:t>
-            </a:r>
-            <a:r>
-              <a:rPr spc="-15" dirty="0"/>
-              <a:t> </a:t>
-            </a:r>
-            <a:r>
-              <a:rPr dirty="0"/>
-              <a:t>–</a:t>
-            </a:r>
-            <a:r>
-              <a:rPr spc="-20" dirty="0"/>
-              <a:t> </a:t>
-            </a:r>
-            <a:r>
-              <a:rPr dirty="0"/>
-              <a:t>Long</a:t>
-            </a:r>
-            <a:r>
-              <a:rPr spc="-10" dirty="0"/>
-              <a:t> Hoang</a:t>
-            </a:r>
-          </a:p>
-        </p:txBody>
-      </p:sp>
-      <p:sp>
-        <p:nvSpPr>
-          <p:cNvPr id="2" name="object 2"/>
-          <p:cNvSpPr txBox="1">
-            <a:spLocks noGrp="1"/>
-          </p:cNvSpPr>
-          <p:nvPr>
-            <p:ph type="title"/>
-          </p:nvPr>
-        </p:nvSpPr>
-        <p:spPr>
-          <a:xfrm>
-            <a:off x="508317" y="480313"/>
-            <a:ext cx="3589654" cy="575310"/>
-          </a:xfrm>
-          <a:prstGeom prst="rect">
-            <a:avLst/>
-          </a:prstGeom>
-        </p:spPr>
-        <p:txBody>
-          <a:bodyPr vert="horz" wrap="square" lIns="0" tIns="13335" rIns="0" bIns="0" rtlCol="0">
-            <a:spAutoFit/>
-          </a:bodyPr>
-          <a:lstStyle/>
-          <a:p>
-            <a:pPr marL="12700">
-              <a:lnSpc>
-                <a:spcPct val="100000"/>
-              </a:lnSpc>
-              <a:spcBef>
-                <a:spcPts val="105"/>
-              </a:spcBef>
-            </a:pPr>
-            <a:r>
-              <a:rPr dirty="0"/>
-              <a:t>1.</a:t>
-            </a:r>
-            <a:r>
-              <a:rPr spc="-105" dirty="0"/>
-              <a:t> </a:t>
-            </a:r>
-            <a:r>
-              <a:rPr spc="-20" dirty="0"/>
-              <a:t>Specifications</a:t>
-            </a:r>
-          </a:p>
-        </p:txBody>
-      </p:sp>
-      <p:sp>
-        <p:nvSpPr>
-          <p:cNvPr id="7" name="object 3">
-            <a:extLst>
-              <a:ext uri="{FF2B5EF4-FFF2-40B4-BE49-F238E27FC236}">
-                <a16:creationId xmlns:a16="http://schemas.microsoft.com/office/drawing/2014/main" id="{CA90AF8F-A1B1-B0EF-BD90-25C3457FA1F5}"/>
-              </a:ext>
-            </a:extLst>
-          </p:cNvPr>
-          <p:cNvSpPr txBox="1"/>
-          <p:nvPr/>
-        </p:nvSpPr>
-        <p:spPr>
-          <a:xfrm>
-            <a:off x="457200" y="1121155"/>
-            <a:ext cx="8026083" cy="475130"/>
-          </a:xfrm>
-          <a:prstGeom prst="rect">
-            <a:avLst/>
-          </a:prstGeom>
-        </p:spPr>
-        <p:txBody>
-          <a:bodyPr vert="horz" wrap="square" lIns="0" tIns="13335" rIns="0" bIns="0" rtlCol="0">
-            <a:spAutoFit/>
-          </a:bodyPr>
-          <a:lstStyle/>
-          <a:p>
-            <a:pPr marL="12700">
-              <a:lnSpc>
-                <a:spcPct val="100000"/>
-              </a:lnSpc>
-              <a:spcBef>
-                <a:spcPts val="105"/>
-              </a:spcBef>
-            </a:pPr>
-            <a:r>
-              <a:rPr lang="en-US" sz="3000" b="1">
-                <a:solidFill>
-                  <a:srgbClr val="7C45AD"/>
-                </a:solidFill>
-                <a:latin typeface="Arial"/>
-                <a:cs typeface="Arial"/>
-              </a:rPr>
-              <a:t>1</a:t>
-            </a:r>
-            <a:r>
-              <a:rPr sz="3000" b="1">
-                <a:solidFill>
-                  <a:srgbClr val="7C45AD"/>
-                </a:solidFill>
-                <a:latin typeface="Arial"/>
-                <a:cs typeface="Arial"/>
-              </a:rPr>
-              <a:t>.1</a:t>
-            </a:r>
-            <a:r>
-              <a:rPr lang="en-US" sz="3000" b="1">
-                <a:solidFill>
-                  <a:srgbClr val="7C45AD"/>
-                </a:solidFill>
-                <a:latin typeface="Arial"/>
-                <a:cs typeface="Arial"/>
-              </a:rPr>
-              <a:t> Overview of the AMBA specification</a:t>
-            </a:r>
-          </a:p>
-        </p:txBody>
-      </p:sp>
-      <p:sp>
-        <p:nvSpPr>
-          <p:cNvPr id="9" name="TextBox 8">
-            <a:extLst>
-              <a:ext uri="{FF2B5EF4-FFF2-40B4-BE49-F238E27FC236}">
-                <a16:creationId xmlns:a16="http://schemas.microsoft.com/office/drawing/2014/main" id="{370CF898-9432-7BB6-6633-F407E9A3D23A}"/>
-              </a:ext>
-            </a:extLst>
-          </p:cNvPr>
-          <p:cNvSpPr txBox="1"/>
-          <p:nvPr/>
-        </p:nvSpPr>
-        <p:spPr>
-          <a:xfrm>
-            <a:off x="508316" y="1905000"/>
-            <a:ext cx="11033443" cy="646331"/>
-          </a:xfrm>
-          <a:prstGeom prst="rect">
-            <a:avLst/>
-          </a:prstGeom>
-          <a:noFill/>
-        </p:spPr>
-        <p:txBody>
-          <a:bodyPr wrap="square">
-            <a:spAutoFit/>
-          </a:bodyPr>
-          <a:lstStyle/>
-          <a:p>
-            <a:pPr algn="just"/>
-            <a:r>
-              <a:rPr lang="en-US"/>
-              <a:t>The Advanced Microcontroller Bus Architecture (AMBA) specification defines an on-chip communications standard for designing high-performance embedded microcontrollers. </a:t>
-            </a:r>
-          </a:p>
-        </p:txBody>
-      </p:sp>
-      <p:sp>
-        <p:nvSpPr>
-          <p:cNvPr id="11" name="TextBox 10">
-            <a:extLst>
-              <a:ext uri="{FF2B5EF4-FFF2-40B4-BE49-F238E27FC236}">
-                <a16:creationId xmlns:a16="http://schemas.microsoft.com/office/drawing/2014/main" id="{AE1AFCB2-CB93-363F-C556-64F9790378B6}"/>
-              </a:ext>
-            </a:extLst>
-          </p:cNvPr>
-          <p:cNvSpPr txBox="1"/>
-          <p:nvPr/>
-        </p:nvSpPr>
-        <p:spPr>
-          <a:xfrm>
-            <a:off x="508315" y="2860046"/>
-            <a:ext cx="11033443" cy="1477328"/>
-          </a:xfrm>
-          <a:prstGeom prst="rect">
-            <a:avLst/>
-          </a:prstGeom>
-          <a:noFill/>
-        </p:spPr>
-        <p:txBody>
-          <a:bodyPr wrap="square">
-            <a:spAutoFit/>
-          </a:bodyPr>
-          <a:lstStyle/>
-          <a:p>
-            <a:r>
-              <a:rPr lang="en-US"/>
-              <a:t>Four distinct buses are defined within the AMBA specification: </a:t>
-            </a:r>
-          </a:p>
-          <a:p>
-            <a:pPr marL="285750" indent="-285750">
-              <a:buFont typeface="Arial" panose="020B0604020202020204" pitchFamily="34" charset="0"/>
-              <a:buChar char="•"/>
-            </a:pPr>
-            <a:r>
-              <a:rPr lang="en-US"/>
-              <a:t>The Advanced High-performance Bus (AHB) </a:t>
-            </a:r>
-          </a:p>
-          <a:p>
-            <a:pPr marL="285750" indent="-285750">
-              <a:buFont typeface="Arial" panose="020B0604020202020204" pitchFamily="34" charset="0"/>
-              <a:buChar char="•"/>
-            </a:pPr>
-            <a:r>
-              <a:rPr lang="en-US"/>
-              <a:t>The Advanced System Bus (ASB) </a:t>
-            </a:r>
-          </a:p>
-          <a:p>
-            <a:pPr marL="285750" indent="-285750">
-              <a:buFont typeface="Arial" panose="020B0604020202020204" pitchFamily="34" charset="0"/>
-              <a:buChar char="•"/>
-            </a:pPr>
-            <a:r>
-              <a:rPr lang="en-US"/>
-              <a:t>The Advanced Peripheral Bus (APB).</a:t>
-            </a:r>
-          </a:p>
-          <a:p>
-            <a:pPr marL="285750" indent="-285750">
-              <a:buFont typeface="Arial" panose="020B0604020202020204" pitchFamily="34" charset="0"/>
-              <a:buChar char="•"/>
-            </a:pPr>
-            <a:r>
-              <a:rPr lang="en-US"/>
-              <a:t>The Advanced eXtensible Interface (AXI)</a:t>
-            </a:r>
-          </a:p>
-        </p:txBody>
-      </p:sp>
-    </p:spTree>
-  </p:cSld>
-  <p:clrMapOvr>
-    <a:masterClrMapping/>
-  </p:clrMapOvr>
-</p:sld>
-</file>
-
-<file path=ppt/slides/slide40.xml><?xml version="1.0" encoding="utf-8"?>
+<file path=ppt/slides/slide41.xml><?xml version="1.0" encoding="utf-8"?>
 <p:sld xmlns:a="http://schemas.openxmlformats.org/drawingml/2006/main" xmlns:r="http://schemas.openxmlformats.org/officeDocument/2006/relationships" xmlns:p="http://schemas.openxmlformats.org/presentationml/2006/main" showMasterSp="0">
   <p:cSld>
     <p:spTree>
@@ -24149,7 +24882,7 @@
             </a:pPr>
             <a:fld id="{81D60167-4931-47E6-BA6A-407CBD079E47}" type="slidenum">
               <a:rPr spc="-25" dirty="0"/>
-              <a:t>40</a:t>
+              <a:t>41</a:t>
             </a:fld>
             <a:endParaRPr spc="-25" dirty="0"/>
           </a:p>
@@ -24279,10 +25012,10 @@
       </p:sp>
       <p:pic>
         <p:nvPicPr>
-          <p:cNvPr id="12" name="Picture 11">
+          <p:cNvPr id="5" name="Picture 4">
             <a:extLst>
               <a:ext uri="{FF2B5EF4-FFF2-40B4-BE49-F238E27FC236}">
-                <a16:creationId xmlns:a16="http://schemas.microsoft.com/office/drawing/2014/main" id="{8673539D-A984-672F-71A8-5491291B637D}"/>
+                <a16:creationId xmlns:a16="http://schemas.microsoft.com/office/drawing/2014/main" id="{E1D87966-108E-D2D9-C9F4-7D85CC38DF98}"/>
               </a:ext>
             </a:extLst>
           </p:cNvPr>
@@ -24299,8 +25032,8 @@
         </p:blipFill>
         <p:spPr>
           <a:xfrm>
-            <a:off x="508168" y="1705523"/>
-            <a:ext cx="5672889" cy="1752600"/>
+            <a:off x="6522810" y="3221756"/>
+            <a:ext cx="4644680" cy="3141007"/>
           </a:xfrm>
           <a:prstGeom prst="rect">
             <a:avLst/>
@@ -24309,10 +25042,10 @@
       </p:pic>
       <p:pic>
         <p:nvPicPr>
-          <p:cNvPr id="14" name="Picture 13">
+          <p:cNvPr id="6" name="Picture 5">
             <a:extLst>
               <a:ext uri="{FF2B5EF4-FFF2-40B4-BE49-F238E27FC236}">
-                <a16:creationId xmlns:a16="http://schemas.microsoft.com/office/drawing/2014/main" id="{645526C7-8BB5-3010-2655-911206123530}"/>
+                <a16:creationId xmlns:a16="http://schemas.microsoft.com/office/drawing/2014/main" id="{91835600-E831-475C-97FD-BD0AB2764C5D}"/>
               </a:ext>
             </a:extLst>
           </p:cNvPr>
@@ -24329,8 +25062,8 @@
         </p:blipFill>
         <p:spPr>
           <a:xfrm>
-            <a:off x="535749" y="3573457"/>
-            <a:ext cx="5672591" cy="1905919"/>
+            <a:off x="508317" y="1828800"/>
+            <a:ext cx="4369391" cy="1893403"/>
           </a:xfrm>
           <a:prstGeom prst="rect">
             <a:avLst/>
@@ -24339,10 +25072,10 @@
       </p:pic>
       <p:pic>
         <p:nvPicPr>
-          <p:cNvPr id="16" name="Picture 15">
+          <p:cNvPr id="11" name="Picture 10">
             <a:extLst>
               <a:ext uri="{FF2B5EF4-FFF2-40B4-BE49-F238E27FC236}">
-                <a16:creationId xmlns:a16="http://schemas.microsoft.com/office/drawing/2014/main" id="{C9A5293B-9A1C-4E1B-1250-D23CEA94AD64}"/>
+                <a16:creationId xmlns:a16="http://schemas.microsoft.com/office/drawing/2014/main" id="{420447CF-EDB8-FAA4-A14D-DA828248EBF2}"/>
               </a:ext>
             </a:extLst>
           </p:cNvPr>
@@ -24359,8 +25092,8 @@
         </p:blipFill>
         <p:spPr>
           <a:xfrm>
-            <a:off x="6187153" y="1160957"/>
-            <a:ext cx="5672590" cy="2099595"/>
+            <a:off x="508317" y="4050428"/>
+            <a:ext cx="4369391" cy="2057631"/>
           </a:xfrm>
           <a:prstGeom prst="rect">
             <a:avLst/>
@@ -24369,10 +25102,10 @@
       </p:pic>
       <p:pic>
         <p:nvPicPr>
-          <p:cNvPr id="5" name="Picture 4">
+          <p:cNvPr id="15" name="Picture 14">
             <a:extLst>
               <a:ext uri="{FF2B5EF4-FFF2-40B4-BE49-F238E27FC236}">
-                <a16:creationId xmlns:a16="http://schemas.microsoft.com/office/drawing/2014/main" id="{E1D87966-108E-D2D9-C9F4-7D85CC38DF98}"/>
+                <a16:creationId xmlns:a16="http://schemas.microsoft.com/office/drawing/2014/main" id="{6DD99901-B6CB-0511-26BF-34179C9AFDB3}"/>
               </a:ext>
             </a:extLst>
           </p:cNvPr>
@@ -24389,8 +25122,8 @@
         </p:blipFill>
         <p:spPr>
           <a:xfrm>
-            <a:off x="6781800" y="3318219"/>
-            <a:ext cx="4644680" cy="3141007"/>
+            <a:off x="6639719" y="914400"/>
+            <a:ext cx="4369391" cy="2075879"/>
           </a:xfrm>
           <a:prstGeom prst="rect">
             <a:avLst/>
@@ -24410,7 +25143,7 @@
 </p:sld>
 </file>
 
-<file path=ppt/slides/slide41.xml><?xml version="1.0" encoding="utf-8"?>
+<file path=ppt/slides/slide42.xml><?xml version="1.0" encoding="utf-8"?>
 <p:sld xmlns:a="http://schemas.openxmlformats.org/drawingml/2006/main" xmlns:r="http://schemas.openxmlformats.org/officeDocument/2006/relationships" xmlns:p="http://schemas.openxmlformats.org/presentationml/2006/main" showMasterSp="0">
   <p:cSld>
     <p:spTree>
@@ -24599,7 +25332,7 @@
             </a:pPr>
             <a:fld id="{81D60167-4931-47E6-BA6A-407CBD079E47}" type="slidenum">
               <a:rPr spc="-25" dirty="0"/>
-              <a:t>41</a:t>
+              <a:t>42</a:t>
             </a:fld>
             <a:endParaRPr spc="-25" dirty="0"/>
           </a:p>
@@ -24770,7 +25503,7 @@
 </p:sld>
 </file>
 
-<file path=ppt/slides/slide42.xml><?xml version="1.0" encoding="utf-8"?>
+<file path=ppt/slides/slide43.xml><?xml version="1.0" encoding="utf-8"?>
 <p:sld xmlns:a="http://schemas.openxmlformats.org/drawingml/2006/main" xmlns:r="http://schemas.openxmlformats.org/officeDocument/2006/relationships" xmlns:p="http://schemas.openxmlformats.org/presentationml/2006/main" showMasterSp="0">
   <p:cSld>
     <p:spTree>

--- a/Design Specifications/AMBA_ABP.pptx
+++ b/Design Specifications/AMBA_ABP.pptx
@@ -35,19 +35,23 @@
     <p:sldId id="298" r:id="rId29"/>
     <p:sldId id="299" r:id="rId30"/>
     <p:sldId id="300" r:id="rId31"/>
-    <p:sldId id="264" r:id="rId32"/>
-    <p:sldId id="265" r:id="rId33"/>
-    <p:sldId id="308" r:id="rId34"/>
-    <p:sldId id="309" r:id="rId35"/>
-    <p:sldId id="297" r:id="rId36"/>
-    <p:sldId id="306" r:id="rId37"/>
-    <p:sldId id="269" r:id="rId38"/>
-    <p:sldId id="270" r:id="rId39"/>
-    <p:sldId id="302" r:id="rId40"/>
-    <p:sldId id="307" r:id="rId41"/>
-    <p:sldId id="303" r:id="rId42"/>
-    <p:sldId id="305" r:id="rId43"/>
-    <p:sldId id="273" r:id="rId44"/>
+    <p:sldId id="310" r:id="rId32"/>
+    <p:sldId id="312" r:id="rId33"/>
+    <p:sldId id="311" r:id="rId34"/>
+    <p:sldId id="313" r:id="rId35"/>
+    <p:sldId id="264" r:id="rId36"/>
+    <p:sldId id="265" r:id="rId37"/>
+    <p:sldId id="308" r:id="rId38"/>
+    <p:sldId id="309" r:id="rId39"/>
+    <p:sldId id="297" r:id="rId40"/>
+    <p:sldId id="306" r:id="rId41"/>
+    <p:sldId id="269" r:id="rId42"/>
+    <p:sldId id="270" r:id="rId43"/>
+    <p:sldId id="302" r:id="rId44"/>
+    <p:sldId id="307" r:id="rId45"/>
+    <p:sldId id="303" r:id="rId46"/>
+    <p:sldId id="305" r:id="rId47"/>
+    <p:sldId id="273" r:id="rId48"/>
   </p:sldIdLst>
   <p:sldSz cx="12192000" cy="6858000"/>
   <p:notesSz cx="12192000" cy="6858000"/>
@@ -18740,6 +18744,2062 @@
 </file>
 
 <file path=ppt/slides/slide31.xml><?xml version="1.0" encoding="utf-8"?>
+<p:sld xmlns:a="http://schemas.openxmlformats.org/drawingml/2006/main" xmlns:r="http://schemas.openxmlformats.org/officeDocument/2006/relationships" xmlns:p="http://schemas.openxmlformats.org/presentationml/2006/main" showMasterSp="0">
+  <p:cSld>
+    <p:spTree>
+      <p:nvGrpSpPr>
+        <p:cNvPr id="1" name="">
+          <a:extLst>
+            <a:ext uri="{FF2B5EF4-FFF2-40B4-BE49-F238E27FC236}">
+              <a16:creationId xmlns:a16="http://schemas.microsoft.com/office/drawing/2014/main" id="{E11A8334-D6AE-AAA8-9920-CA75DDA0952D}"/>
+            </a:ext>
+          </a:extLst>
+        </p:cNvPr>
+        <p:cNvGrpSpPr/>
+        <p:nvPr/>
+      </p:nvGrpSpPr>
+      <p:grpSpPr>
+        <a:xfrm>
+          <a:off x="0" y="0"/>
+          <a:ext cx="0" cy="0"/>
+          <a:chOff x="0" y="0"/>
+          <a:chExt cx="0" cy="0"/>
+        </a:xfrm>
+      </p:grpSpPr>
+      <p:sp>
+        <p:nvSpPr>
+          <p:cNvPr id="4" name="object 4">
+            <a:extLst>
+              <a:ext uri="{FF2B5EF4-FFF2-40B4-BE49-F238E27FC236}">
+                <a16:creationId xmlns:a16="http://schemas.microsoft.com/office/drawing/2014/main" id="{C19C4B66-B5CF-F322-19BD-8C2F9E64E7C3}"/>
+              </a:ext>
+            </a:extLst>
+          </p:cNvPr>
+          <p:cNvSpPr txBox="1">
+            <a:spLocks noGrp="1"/>
+          </p:cNvSpPr>
+          <p:nvPr>
+            <p:ph type="dt" sz="half" idx="6"/>
+          </p:nvPr>
+        </p:nvSpPr>
+        <p:spPr>
+          <a:prstGeom prst="rect">
+            <a:avLst/>
+          </a:prstGeom>
+        </p:spPr>
+        <p:txBody>
+          <a:bodyPr vert="horz" wrap="square" lIns="0" tIns="6350" rIns="0" bIns="0" rtlCol="0">
+            <a:spAutoFit/>
+          </a:bodyPr>
+          <a:lstStyle/>
+          <a:p>
+            <a:pPr marL="12700">
+              <a:lnSpc>
+                <a:spcPct val="100000"/>
+              </a:lnSpc>
+              <a:spcBef>
+                <a:spcPts val="50"/>
+              </a:spcBef>
+            </a:pPr>
+            <a:r>
+              <a:rPr dirty="0"/>
+              <a:t>Thiết</a:t>
+            </a:r>
+            <a:r>
+              <a:rPr spc="-20" dirty="0"/>
+              <a:t> </a:t>
+            </a:r>
+            <a:r>
+              <a:rPr dirty="0"/>
+              <a:t>Kế</a:t>
+            </a:r>
+            <a:r>
+              <a:rPr spc="-40" dirty="0"/>
+              <a:t> </a:t>
+            </a:r>
+            <a:r>
+              <a:rPr dirty="0"/>
+              <a:t>Vi</a:t>
+            </a:r>
+            <a:r>
+              <a:rPr spc="10" dirty="0"/>
+              <a:t> </a:t>
+            </a:r>
+            <a:r>
+              <a:rPr spc="-20" dirty="0"/>
+              <a:t>Mạch</a:t>
+            </a:r>
+          </a:p>
+        </p:txBody>
+      </p:sp>
+      <p:sp>
+        <p:nvSpPr>
+          <p:cNvPr id="5" name="object 5">
+            <a:extLst>
+              <a:ext uri="{FF2B5EF4-FFF2-40B4-BE49-F238E27FC236}">
+                <a16:creationId xmlns:a16="http://schemas.microsoft.com/office/drawing/2014/main" id="{F7991163-01B4-6EF7-78E5-D8057EDC04CB}"/>
+              </a:ext>
+            </a:extLst>
+          </p:cNvPr>
+          <p:cNvSpPr txBox="1">
+            <a:spLocks noGrp="1"/>
+          </p:cNvSpPr>
+          <p:nvPr>
+            <p:ph type="sldNum" sz="quarter" idx="7"/>
+          </p:nvPr>
+        </p:nvSpPr>
+        <p:spPr>
+          <a:prstGeom prst="rect">
+            <a:avLst/>
+          </a:prstGeom>
+        </p:spPr>
+        <p:txBody>
+          <a:bodyPr vert="horz" wrap="square" lIns="0" tIns="6350" rIns="0" bIns="0" rtlCol="0">
+            <a:spAutoFit/>
+          </a:bodyPr>
+          <a:lstStyle/>
+          <a:p>
+            <a:pPr marL="38100">
+              <a:lnSpc>
+                <a:spcPct val="100000"/>
+              </a:lnSpc>
+              <a:spcBef>
+                <a:spcPts val="50"/>
+              </a:spcBef>
+            </a:pPr>
+            <a:fld id="{81D60167-4931-47E6-BA6A-407CBD079E47}" type="slidenum">
+              <a:rPr spc="-25" dirty="0"/>
+              <a:t>31</a:t>
+            </a:fld>
+            <a:endParaRPr spc="-25" dirty="0"/>
+          </a:p>
+        </p:txBody>
+      </p:sp>
+      <p:sp>
+        <p:nvSpPr>
+          <p:cNvPr id="6" name="object 6">
+            <a:extLst>
+              <a:ext uri="{FF2B5EF4-FFF2-40B4-BE49-F238E27FC236}">
+                <a16:creationId xmlns:a16="http://schemas.microsoft.com/office/drawing/2014/main" id="{12685454-A935-02EE-A486-D63E820C4AF4}"/>
+              </a:ext>
+            </a:extLst>
+          </p:cNvPr>
+          <p:cNvSpPr txBox="1">
+            <a:spLocks noGrp="1"/>
+          </p:cNvSpPr>
+          <p:nvPr>
+            <p:ph type="ftr" sz="quarter" idx="5"/>
+          </p:nvPr>
+        </p:nvSpPr>
+        <p:spPr>
+          <a:prstGeom prst="rect">
+            <a:avLst/>
+          </a:prstGeom>
+        </p:spPr>
+        <p:txBody>
+          <a:bodyPr vert="horz" wrap="square" lIns="0" tIns="5715" rIns="0" bIns="0" rtlCol="0">
+            <a:spAutoFit/>
+          </a:bodyPr>
+          <a:lstStyle/>
+          <a:p>
+            <a:pPr marL="12700">
+              <a:lnSpc>
+                <a:spcPct val="100000"/>
+              </a:lnSpc>
+              <a:spcBef>
+                <a:spcPts val="45"/>
+              </a:spcBef>
+            </a:pPr>
+            <a:r>
+              <a:rPr dirty="0"/>
+              <a:t>©</a:t>
+            </a:r>
+            <a:r>
+              <a:rPr spc="-45" dirty="0"/>
+              <a:t> </a:t>
+            </a:r>
+            <a:r>
+              <a:rPr dirty="0"/>
+              <a:t>2025</a:t>
+            </a:r>
+            <a:r>
+              <a:rPr spc="-15" dirty="0"/>
+              <a:t> </a:t>
+            </a:r>
+            <a:r>
+              <a:rPr dirty="0"/>
+              <a:t>–</a:t>
+            </a:r>
+            <a:r>
+              <a:rPr spc="-20" dirty="0"/>
+              <a:t> </a:t>
+            </a:r>
+            <a:r>
+              <a:rPr dirty="0"/>
+              <a:t>Long</a:t>
+            </a:r>
+            <a:r>
+              <a:rPr spc="-10" dirty="0"/>
+              <a:t> Hoang</a:t>
+            </a:r>
+          </a:p>
+        </p:txBody>
+      </p:sp>
+      <p:sp>
+        <p:nvSpPr>
+          <p:cNvPr id="2" name="object 2">
+            <a:extLst>
+              <a:ext uri="{FF2B5EF4-FFF2-40B4-BE49-F238E27FC236}">
+                <a16:creationId xmlns:a16="http://schemas.microsoft.com/office/drawing/2014/main" id="{8F00198B-F4ED-9738-9357-A9E53C13BDE1}"/>
+              </a:ext>
+            </a:extLst>
+          </p:cNvPr>
+          <p:cNvSpPr txBox="1">
+            <a:spLocks noGrp="1"/>
+          </p:cNvSpPr>
+          <p:nvPr>
+            <p:ph type="title"/>
+          </p:nvPr>
+        </p:nvSpPr>
+        <p:spPr>
+          <a:xfrm>
+            <a:off x="508316" y="480313"/>
+            <a:ext cx="7721283" cy="567463"/>
+          </a:xfrm>
+          <a:prstGeom prst="rect">
+            <a:avLst/>
+          </a:prstGeom>
+        </p:spPr>
+        <p:txBody>
+          <a:bodyPr vert="horz" wrap="square" lIns="0" tIns="13335" rIns="0" bIns="0" rtlCol="0">
+            <a:spAutoFit/>
+          </a:bodyPr>
+          <a:lstStyle/>
+          <a:p>
+            <a:pPr marL="12700">
+              <a:lnSpc>
+                <a:spcPct val="100000"/>
+              </a:lnSpc>
+              <a:spcBef>
+                <a:spcPts val="105"/>
+              </a:spcBef>
+            </a:pPr>
+            <a:r>
+              <a:rPr lang="en-US"/>
+              <a:t>2.</a:t>
+            </a:r>
+            <a:r>
+              <a:rPr lang="en-US" spc="-160"/>
+              <a:t> </a:t>
+            </a:r>
+            <a:r>
+              <a:rPr lang="en-US"/>
+              <a:t>High</a:t>
+            </a:r>
+            <a:r>
+              <a:rPr lang="en-US" spc="-140"/>
+              <a:t> </a:t>
+            </a:r>
+            <a:r>
+              <a:rPr lang="en-US"/>
+              <a:t>Level</a:t>
+            </a:r>
+            <a:r>
+              <a:rPr lang="en-US" spc="-140"/>
+              <a:t> </a:t>
+            </a:r>
+            <a:r>
+              <a:rPr lang="en-US"/>
+              <a:t>Block</a:t>
+            </a:r>
+            <a:r>
+              <a:rPr lang="en-US" spc="-160"/>
+              <a:t> </a:t>
+            </a:r>
+            <a:r>
+              <a:rPr lang="en-US" spc="-10"/>
+              <a:t>Design</a:t>
+            </a:r>
+            <a:endParaRPr spc="-20" dirty="0"/>
+          </a:p>
+        </p:txBody>
+      </p:sp>
+      <p:sp>
+        <p:nvSpPr>
+          <p:cNvPr id="3" name="object 3">
+            <a:extLst>
+              <a:ext uri="{FF2B5EF4-FFF2-40B4-BE49-F238E27FC236}">
+                <a16:creationId xmlns:a16="http://schemas.microsoft.com/office/drawing/2014/main" id="{68FA9600-A05A-4457-A4DD-7189E09B1149}"/>
+              </a:ext>
+            </a:extLst>
+          </p:cNvPr>
+          <p:cNvSpPr txBox="1"/>
+          <p:nvPr/>
+        </p:nvSpPr>
+        <p:spPr>
+          <a:xfrm>
+            <a:off x="457200" y="1121155"/>
+            <a:ext cx="10896600" cy="475130"/>
+          </a:xfrm>
+          <a:prstGeom prst="rect">
+            <a:avLst/>
+          </a:prstGeom>
+        </p:spPr>
+        <p:txBody>
+          <a:bodyPr vert="horz" wrap="square" lIns="0" tIns="13335" rIns="0" bIns="0" rtlCol="0">
+            <a:spAutoFit/>
+          </a:bodyPr>
+          <a:lstStyle/>
+          <a:p>
+            <a:pPr marL="12700">
+              <a:lnSpc>
+                <a:spcPct val="100000"/>
+              </a:lnSpc>
+              <a:spcBef>
+                <a:spcPts val="105"/>
+              </a:spcBef>
+            </a:pPr>
+            <a:r>
+              <a:rPr lang="en-US" sz="3000" b="1">
+                <a:solidFill>
+                  <a:srgbClr val="7C45AD"/>
+                </a:solidFill>
+                <a:latin typeface="Arial"/>
+                <a:cs typeface="Arial"/>
+              </a:rPr>
+              <a:t>2.4 AMBA ABP Interface signals</a:t>
+            </a:r>
+          </a:p>
+        </p:txBody>
+      </p:sp>
+      <p:sp>
+        <p:nvSpPr>
+          <p:cNvPr id="8" name="TextBox 7">
+            <a:extLst>
+              <a:ext uri="{FF2B5EF4-FFF2-40B4-BE49-F238E27FC236}">
+                <a16:creationId xmlns:a16="http://schemas.microsoft.com/office/drawing/2014/main" id="{4481D8B4-7606-4F4A-F3C9-07BC5ACE4E1F}"/>
+              </a:ext>
+            </a:extLst>
+          </p:cNvPr>
+          <p:cNvSpPr txBox="1"/>
+          <p:nvPr/>
+        </p:nvSpPr>
+        <p:spPr>
+          <a:xfrm>
+            <a:off x="381648" y="6193021"/>
+            <a:ext cx="5206335" cy="369332"/>
+          </a:xfrm>
+          <a:prstGeom prst="rect">
+            <a:avLst/>
+          </a:prstGeom>
+          <a:noFill/>
+        </p:spPr>
+        <p:txBody>
+          <a:bodyPr wrap="square">
+            <a:spAutoFit/>
+          </a:bodyPr>
+          <a:lstStyle/>
+          <a:p>
+            <a:pPr algn="ctr"/>
+            <a:r>
+              <a:rPr lang="en-US" b="1" i="1">
+                <a:latin typeface="Arial" panose="020B0604020202020204" pitchFamily="34" charset="0"/>
+                <a:cs typeface="Arial" panose="020B0604020202020204" pitchFamily="34" charset="0"/>
+              </a:rPr>
+              <a:t>APB Write transfer without waiting state</a:t>
+            </a:r>
+          </a:p>
+        </p:txBody>
+      </p:sp>
+      <p:pic>
+        <p:nvPicPr>
+          <p:cNvPr id="1028" name="Picture 4">
+            <a:extLst>
+              <a:ext uri="{FF2B5EF4-FFF2-40B4-BE49-F238E27FC236}">
+                <a16:creationId xmlns:a16="http://schemas.microsoft.com/office/drawing/2014/main" id="{37479872-212B-E914-3B2F-D95854E4F7B4}"/>
+              </a:ext>
+            </a:extLst>
+          </p:cNvPr>
+          <p:cNvPicPr>
+            <a:picLocks noChangeAspect="1" noChangeArrowheads="1"/>
+          </p:cNvPicPr>
+          <p:nvPr/>
+        </p:nvPicPr>
+        <p:blipFill>
+          <a:blip r:embed="rId2" cstate="print">
+            <a:extLst>
+              <a:ext uri="{28A0092B-C50C-407E-A947-70E740481C1C}">
+                <a14:useLocalDpi xmlns:a14="http://schemas.microsoft.com/office/drawing/2010/main" val="0"/>
+              </a:ext>
+            </a:extLst>
+          </a:blip>
+          <a:srcRect/>
+          <a:stretch>
+            <a:fillRect/>
+          </a:stretch>
+        </p:blipFill>
+        <p:spPr bwMode="auto">
+          <a:xfrm>
+            <a:off x="686273" y="1685810"/>
+            <a:ext cx="4547546" cy="4370081"/>
+          </a:xfrm>
+          <a:prstGeom prst="rect">
+            <a:avLst/>
+          </a:prstGeom>
+          <a:noFill/>
+          <a:extLst>
+            <a:ext uri="{909E8E84-426E-40DD-AFC4-6F175D3DCCD1}">
+              <a14:hiddenFill xmlns:a14="http://schemas.microsoft.com/office/drawing/2010/main">
+                <a:solidFill>
+                  <a:srgbClr val="FFFFFF"/>
+                </a:solidFill>
+              </a14:hiddenFill>
+            </a:ext>
+          </a:extLst>
+        </p:spPr>
+      </p:pic>
+      <p:pic>
+        <p:nvPicPr>
+          <p:cNvPr id="1030" name="Picture 6">
+            <a:extLst>
+              <a:ext uri="{FF2B5EF4-FFF2-40B4-BE49-F238E27FC236}">
+                <a16:creationId xmlns:a16="http://schemas.microsoft.com/office/drawing/2014/main" id="{1568C30D-0036-5F01-D155-CF1D45DE6664}"/>
+              </a:ext>
+            </a:extLst>
+          </p:cNvPr>
+          <p:cNvPicPr>
+            <a:picLocks noChangeAspect="1" noChangeArrowheads="1"/>
+          </p:cNvPicPr>
+          <p:nvPr/>
+        </p:nvPicPr>
+        <p:blipFill>
+          <a:blip r:embed="rId3" cstate="print">
+            <a:extLst>
+              <a:ext uri="{28A0092B-C50C-407E-A947-70E740481C1C}">
+                <a14:useLocalDpi xmlns:a14="http://schemas.microsoft.com/office/drawing/2010/main" val="0"/>
+              </a:ext>
+            </a:extLst>
+          </a:blip>
+          <a:srcRect/>
+          <a:stretch>
+            <a:fillRect/>
+          </a:stretch>
+        </p:blipFill>
+        <p:spPr bwMode="auto">
+          <a:xfrm>
+            <a:off x="6944676" y="1638206"/>
+            <a:ext cx="4597083" cy="4417685"/>
+          </a:xfrm>
+          <a:prstGeom prst="rect">
+            <a:avLst/>
+          </a:prstGeom>
+          <a:noFill/>
+          <a:extLst>
+            <a:ext uri="{909E8E84-426E-40DD-AFC4-6F175D3DCCD1}">
+              <a14:hiddenFill xmlns:a14="http://schemas.microsoft.com/office/drawing/2010/main">
+                <a:solidFill>
+                  <a:srgbClr val="FFFFFF"/>
+                </a:solidFill>
+              </a14:hiddenFill>
+            </a:ext>
+          </a:extLst>
+        </p:spPr>
+      </p:pic>
+      <p:sp>
+        <p:nvSpPr>
+          <p:cNvPr id="9" name="TextBox 8">
+            <a:extLst>
+              <a:ext uri="{FF2B5EF4-FFF2-40B4-BE49-F238E27FC236}">
+                <a16:creationId xmlns:a16="http://schemas.microsoft.com/office/drawing/2014/main" id="{C7641B69-2337-99D5-09DC-A7FE190E68BF}"/>
+              </a:ext>
+            </a:extLst>
+          </p:cNvPr>
+          <p:cNvSpPr txBox="1"/>
+          <p:nvPr/>
+        </p:nvSpPr>
+        <p:spPr>
+          <a:xfrm>
+            <a:off x="6640049" y="6193021"/>
+            <a:ext cx="5206335" cy="369332"/>
+          </a:xfrm>
+          <a:prstGeom prst="rect">
+            <a:avLst/>
+          </a:prstGeom>
+          <a:noFill/>
+        </p:spPr>
+        <p:txBody>
+          <a:bodyPr wrap="square">
+            <a:spAutoFit/>
+          </a:bodyPr>
+          <a:lstStyle/>
+          <a:p>
+            <a:pPr algn="ctr"/>
+            <a:r>
+              <a:rPr lang="en-US" b="1" i="1">
+                <a:latin typeface="Arial" panose="020B0604020202020204" pitchFamily="34" charset="0"/>
+                <a:cs typeface="Arial" panose="020B0604020202020204" pitchFamily="34" charset="0"/>
+              </a:rPr>
+              <a:t>APB Read transfer without waiting state</a:t>
+            </a:r>
+          </a:p>
+        </p:txBody>
+      </p:sp>
+    </p:spTree>
+    <p:extLst>
+      <p:ext uri="{BB962C8B-B14F-4D97-AF65-F5344CB8AC3E}">
+        <p14:creationId xmlns:p14="http://schemas.microsoft.com/office/powerpoint/2010/main" val="3078746340"/>
+      </p:ext>
+    </p:extLst>
+  </p:cSld>
+  <p:clrMapOvr>
+    <a:masterClrMapping/>
+  </p:clrMapOvr>
+</p:sld>
+</file>
+
+<file path=ppt/slides/slide32.xml><?xml version="1.0" encoding="utf-8"?>
+<p:sld xmlns:a="http://schemas.openxmlformats.org/drawingml/2006/main" xmlns:r="http://schemas.openxmlformats.org/officeDocument/2006/relationships" xmlns:p="http://schemas.openxmlformats.org/presentationml/2006/main" showMasterSp="0">
+  <p:cSld>
+    <p:spTree>
+      <p:nvGrpSpPr>
+        <p:cNvPr id="1" name="">
+          <a:extLst>
+            <a:ext uri="{FF2B5EF4-FFF2-40B4-BE49-F238E27FC236}">
+              <a16:creationId xmlns:a16="http://schemas.microsoft.com/office/drawing/2014/main" id="{A8E81F33-5132-F402-62FF-079935039D47}"/>
+            </a:ext>
+          </a:extLst>
+        </p:cNvPr>
+        <p:cNvGrpSpPr/>
+        <p:nvPr/>
+      </p:nvGrpSpPr>
+      <p:grpSpPr>
+        <a:xfrm>
+          <a:off x="0" y="0"/>
+          <a:ext cx="0" cy="0"/>
+          <a:chOff x="0" y="0"/>
+          <a:chExt cx="0" cy="0"/>
+        </a:xfrm>
+      </p:grpSpPr>
+      <p:sp>
+        <p:nvSpPr>
+          <p:cNvPr id="4" name="object 4">
+            <a:extLst>
+              <a:ext uri="{FF2B5EF4-FFF2-40B4-BE49-F238E27FC236}">
+                <a16:creationId xmlns:a16="http://schemas.microsoft.com/office/drawing/2014/main" id="{512CF390-DB23-5C41-B865-1CC36A2C2860}"/>
+              </a:ext>
+            </a:extLst>
+          </p:cNvPr>
+          <p:cNvSpPr txBox="1">
+            <a:spLocks noGrp="1"/>
+          </p:cNvSpPr>
+          <p:nvPr>
+            <p:ph type="dt" sz="half" idx="6"/>
+          </p:nvPr>
+        </p:nvSpPr>
+        <p:spPr>
+          <a:prstGeom prst="rect">
+            <a:avLst/>
+          </a:prstGeom>
+        </p:spPr>
+        <p:txBody>
+          <a:bodyPr vert="horz" wrap="square" lIns="0" tIns="6350" rIns="0" bIns="0" rtlCol="0">
+            <a:spAutoFit/>
+          </a:bodyPr>
+          <a:lstStyle/>
+          <a:p>
+            <a:pPr marL="12700">
+              <a:lnSpc>
+                <a:spcPct val="100000"/>
+              </a:lnSpc>
+              <a:spcBef>
+                <a:spcPts val="50"/>
+              </a:spcBef>
+            </a:pPr>
+            <a:r>
+              <a:rPr dirty="0"/>
+              <a:t>Thiết</a:t>
+            </a:r>
+            <a:r>
+              <a:rPr spc="-20" dirty="0"/>
+              <a:t> </a:t>
+            </a:r>
+            <a:r>
+              <a:rPr dirty="0"/>
+              <a:t>Kế</a:t>
+            </a:r>
+            <a:r>
+              <a:rPr spc="-40" dirty="0"/>
+              <a:t> </a:t>
+            </a:r>
+            <a:r>
+              <a:rPr dirty="0"/>
+              <a:t>Vi</a:t>
+            </a:r>
+            <a:r>
+              <a:rPr spc="10" dirty="0"/>
+              <a:t> </a:t>
+            </a:r>
+            <a:r>
+              <a:rPr spc="-20" dirty="0"/>
+              <a:t>Mạch</a:t>
+            </a:r>
+          </a:p>
+        </p:txBody>
+      </p:sp>
+      <p:sp>
+        <p:nvSpPr>
+          <p:cNvPr id="5" name="object 5">
+            <a:extLst>
+              <a:ext uri="{FF2B5EF4-FFF2-40B4-BE49-F238E27FC236}">
+                <a16:creationId xmlns:a16="http://schemas.microsoft.com/office/drawing/2014/main" id="{D7A40A4C-184A-0A12-91E7-28F65FF731C6}"/>
+              </a:ext>
+            </a:extLst>
+          </p:cNvPr>
+          <p:cNvSpPr txBox="1">
+            <a:spLocks noGrp="1"/>
+          </p:cNvSpPr>
+          <p:nvPr>
+            <p:ph type="sldNum" sz="quarter" idx="7"/>
+          </p:nvPr>
+        </p:nvSpPr>
+        <p:spPr>
+          <a:prstGeom prst="rect">
+            <a:avLst/>
+          </a:prstGeom>
+        </p:spPr>
+        <p:txBody>
+          <a:bodyPr vert="horz" wrap="square" lIns="0" tIns="6350" rIns="0" bIns="0" rtlCol="0">
+            <a:spAutoFit/>
+          </a:bodyPr>
+          <a:lstStyle/>
+          <a:p>
+            <a:pPr marL="38100">
+              <a:lnSpc>
+                <a:spcPct val="100000"/>
+              </a:lnSpc>
+              <a:spcBef>
+                <a:spcPts val="50"/>
+              </a:spcBef>
+            </a:pPr>
+            <a:fld id="{81D60167-4931-47E6-BA6A-407CBD079E47}" type="slidenum">
+              <a:rPr spc="-25" dirty="0"/>
+              <a:t>32</a:t>
+            </a:fld>
+            <a:endParaRPr spc="-25" dirty="0"/>
+          </a:p>
+        </p:txBody>
+      </p:sp>
+      <p:sp>
+        <p:nvSpPr>
+          <p:cNvPr id="6" name="object 6">
+            <a:extLst>
+              <a:ext uri="{FF2B5EF4-FFF2-40B4-BE49-F238E27FC236}">
+                <a16:creationId xmlns:a16="http://schemas.microsoft.com/office/drawing/2014/main" id="{FC0E3B2B-9337-C6A4-A449-00D4E9EE4604}"/>
+              </a:ext>
+            </a:extLst>
+          </p:cNvPr>
+          <p:cNvSpPr txBox="1">
+            <a:spLocks noGrp="1"/>
+          </p:cNvSpPr>
+          <p:nvPr>
+            <p:ph type="ftr" sz="quarter" idx="5"/>
+          </p:nvPr>
+        </p:nvSpPr>
+        <p:spPr>
+          <a:prstGeom prst="rect">
+            <a:avLst/>
+          </a:prstGeom>
+        </p:spPr>
+        <p:txBody>
+          <a:bodyPr vert="horz" wrap="square" lIns="0" tIns="5715" rIns="0" bIns="0" rtlCol="0">
+            <a:spAutoFit/>
+          </a:bodyPr>
+          <a:lstStyle/>
+          <a:p>
+            <a:pPr marL="12700">
+              <a:lnSpc>
+                <a:spcPct val="100000"/>
+              </a:lnSpc>
+              <a:spcBef>
+                <a:spcPts val="45"/>
+              </a:spcBef>
+            </a:pPr>
+            <a:r>
+              <a:rPr dirty="0"/>
+              <a:t>©</a:t>
+            </a:r>
+            <a:r>
+              <a:rPr spc="-45" dirty="0"/>
+              <a:t> </a:t>
+            </a:r>
+            <a:r>
+              <a:rPr dirty="0"/>
+              <a:t>2025</a:t>
+            </a:r>
+            <a:r>
+              <a:rPr spc="-15" dirty="0"/>
+              <a:t> </a:t>
+            </a:r>
+            <a:r>
+              <a:rPr dirty="0"/>
+              <a:t>–</a:t>
+            </a:r>
+            <a:r>
+              <a:rPr spc="-20" dirty="0"/>
+              <a:t> </a:t>
+            </a:r>
+            <a:r>
+              <a:rPr dirty="0"/>
+              <a:t>Long</a:t>
+            </a:r>
+            <a:r>
+              <a:rPr spc="-10" dirty="0"/>
+              <a:t> Hoang</a:t>
+            </a:r>
+          </a:p>
+        </p:txBody>
+      </p:sp>
+      <p:sp>
+        <p:nvSpPr>
+          <p:cNvPr id="2" name="object 2">
+            <a:extLst>
+              <a:ext uri="{FF2B5EF4-FFF2-40B4-BE49-F238E27FC236}">
+                <a16:creationId xmlns:a16="http://schemas.microsoft.com/office/drawing/2014/main" id="{DFAB4240-2CCA-278B-3590-4E217ADA7D35}"/>
+              </a:ext>
+            </a:extLst>
+          </p:cNvPr>
+          <p:cNvSpPr txBox="1">
+            <a:spLocks noGrp="1"/>
+          </p:cNvSpPr>
+          <p:nvPr>
+            <p:ph type="title"/>
+          </p:nvPr>
+        </p:nvSpPr>
+        <p:spPr>
+          <a:xfrm>
+            <a:off x="508316" y="480313"/>
+            <a:ext cx="7721283" cy="567463"/>
+          </a:xfrm>
+          <a:prstGeom prst="rect">
+            <a:avLst/>
+          </a:prstGeom>
+        </p:spPr>
+        <p:txBody>
+          <a:bodyPr vert="horz" wrap="square" lIns="0" tIns="13335" rIns="0" bIns="0" rtlCol="0">
+            <a:spAutoFit/>
+          </a:bodyPr>
+          <a:lstStyle/>
+          <a:p>
+            <a:pPr marL="12700">
+              <a:lnSpc>
+                <a:spcPct val="100000"/>
+              </a:lnSpc>
+              <a:spcBef>
+                <a:spcPts val="105"/>
+              </a:spcBef>
+            </a:pPr>
+            <a:r>
+              <a:rPr lang="en-US"/>
+              <a:t>2.</a:t>
+            </a:r>
+            <a:r>
+              <a:rPr lang="en-US" spc="-160"/>
+              <a:t> </a:t>
+            </a:r>
+            <a:r>
+              <a:rPr lang="en-US"/>
+              <a:t>High</a:t>
+            </a:r>
+            <a:r>
+              <a:rPr lang="en-US" spc="-140"/>
+              <a:t> </a:t>
+            </a:r>
+            <a:r>
+              <a:rPr lang="en-US"/>
+              <a:t>Level</a:t>
+            </a:r>
+            <a:r>
+              <a:rPr lang="en-US" spc="-140"/>
+              <a:t> </a:t>
+            </a:r>
+            <a:r>
+              <a:rPr lang="en-US"/>
+              <a:t>Block</a:t>
+            </a:r>
+            <a:r>
+              <a:rPr lang="en-US" spc="-160"/>
+              <a:t> </a:t>
+            </a:r>
+            <a:r>
+              <a:rPr lang="en-US" spc="-10"/>
+              <a:t>Design</a:t>
+            </a:r>
+            <a:endParaRPr spc="-20" dirty="0"/>
+          </a:p>
+        </p:txBody>
+      </p:sp>
+      <p:sp>
+        <p:nvSpPr>
+          <p:cNvPr id="3" name="object 3">
+            <a:extLst>
+              <a:ext uri="{FF2B5EF4-FFF2-40B4-BE49-F238E27FC236}">
+                <a16:creationId xmlns:a16="http://schemas.microsoft.com/office/drawing/2014/main" id="{D27222AD-8F09-852F-7FEC-3D120F98D27B}"/>
+              </a:ext>
+            </a:extLst>
+          </p:cNvPr>
+          <p:cNvSpPr txBox="1"/>
+          <p:nvPr/>
+        </p:nvSpPr>
+        <p:spPr>
+          <a:xfrm>
+            <a:off x="457200" y="1121155"/>
+            <a:ext cx="10896600" cy="475130"/>
+          </a:xfrm>
+          <a:prstGeom prst="rect">
+            <a:avLst/>
+          </a:prstGeom>
+        </p:spPr>
+        <p:txBody>
+          <a:bodyPr vert="horz" wrap="square" lIns="0" tIns="13335" rIns="0" bIns="0" rtlCol="0">
+            <a:spAutoFit/>
+          </a:bodyPr>
+          <a:lstStyle/>
+          <a:p>
+            <a:pPr marL="12700">
+              <a:lnSpc>
+                <a:spcPct val="100000"/>
+              </a:lnSpc>
+              <a:spcBef>
+                <a:spcPts val="105"/>
+              </a:spcBef>
+            </a:pPr>
+            <a:r>
+              <a:rPr lang="en-US" sz="3000" b="1">
+                <a:solidFill>
+                  <a:srgbClr val="7C45AD"/>
+                </a:solidFill>
+                <a:latin typeface="Arial"/>
+                <a:cs typeface="Arial"/>
+              </a:rPr>
+              <a:t>2.4 AMBA ABP Interface signals</a:t>
+            </a:r>
+          </a:p>
+        </p:txBody>
+      </p:sp>
+      <p:sp>
+        <p:nvSpPr>
+          <p:cNvPr id="8" name="TextBox 7">
+            <a:extLst>
+              <a:ext uri="{FF2B5EF4-FFF2-40B4-BE49-F238E27FC236}">
+                <a16:creationId xmlns:a16="http://schemas.microsoft.com/office/drawing/2014/main" id="{0B87933B-C530-386E-74F9-8287FF3E3478}"/>
+              </a:ext>
+            </a:extLst>
+          </p:cNvPr>
+          <p:cNvSpPr txBox="1"/>
+          <p:nvPr/>
+        </p:nvSpPr>
+        <p:spPr>
+          <a:xfrm>
+            <a:off x="381648" y="6193021"/>
+            <a:ext cx="5206335" cy="369332"/>
+          </a:xfrm>
+          <a:prstGeom prst="rect">
+            <a:avLst/>
+          </a:prstGeom>
+          <a:noFill/>
+        </p:spPr>
+        <p:txBody>
+          <a:bodyPr wrap="square">
+            <a:spAutoFit/>
+          </a:bodyPr>
+          <a:lstStyle/>
+          <a:p>
+            <a:pPr algn="ctr"/>
+            <a:r>
+              <a:rPr lang="en-US" b="1" i="1">
+                <a:latin typeface="Arial" panose="020B0604020202020204" pitchFamily="34" charset="0"/>
+                <a:cs typeface="Arial" panose="020B0604020202020204" pitchFamily="34" charset="0"/>
+              </a:rPr>
+              <a:t>APB Write with Slave 1 access</a:t>
+            </a:r>
+          </a:p>
+        </p:txBody>
+      </p:sp>
+      <p:sp>
+        <p:nvSpPr>
+          <p:cNvPr id="9" name="TextBox 8">
+            <a:extLst>
+              <a:ext uri="{FF2B5EF4-FFF2-40B4-BE49-F238E27FC236}">
+                <a16:creationId xmlns:a16="http://schemas.microsoft.com/office/drawing/2014/main" id="{55DD3DC6-787B-16FA-B7CD-874D3EE02447}"/>
+              </a:ext>
+            </a:extLst>
+          </p:cNvPr>
+          <p:cNvSpPr txBox="1"/>
+          <p:nvPr/>
+        </p:nvSpPr>
+        <p:spPr>
+          <a:xfrm>
+            <a:off x="6640049" y="6193021"/>
+            <a:ext cx="5206335" cy="369332"/>
+          </a:xfrm>
+          <a:prstGeom prst="rect">
+            <a:avLst/>
+          </a:prstGeom>
+          <a:noFill/>
+        </p:spPr>
+        <p:txBody>
+          <a:bodyPr wrap="square">
+            <a:spAutoFit/>
+          </a:bodyPr>
+          <a:lstStyle/>
+          <a:p>
+            <a:pPr algn="ctr"/>
+            <a:r>
+              <a:rPr lang="en-US" b="1" i="1">
+                <a:latin typeface="Arial" panose="020B0604020202020204" pitchFamily="34" charset="0"/>
+                <a:cs typeface="Arial" panose="020B0604020202020204" pitchFamily="34" charset="0"/>
+              </a:rPr>
+              <a:t>APB Read with Slave 1 access</a:t>
+            </a:r>
+          </a:p>
+        </p:txBody>
+      </p:sp>
+      <p:pic>
+        <p:nvPicPr>
+          <p:cNvPr id="3074" name="Picture 2">
+            <a:extLst>
+              <a:ext uri="{FF2B5EF4-FFF2-40B4-BE49-F238E27FC236}">
+                <a16:creationId xmlns:a16="http://schemas.microsoft.com/office/drawing/2014/main" id="{F6856D9D-88F5-B2C0-8FEF-BEDB488A2578}"/>
+              </a:ext>
+            </a:extLst>
+          </p:cNvPr>
+          <p:cNvPicPr>
+            <a:picLocks noChangeAspect="1" noChangeArrowheads="1"/>
+          </p:cNvPicPr>
+          <p:nvPr/>
+        </p:nvPicPr>
+        <p:blipFill>
+          <a:blip r:embed="rId2" cstate="print">
+            <a:extLst>
+              <a:ext uri="{28A0092B-C50C-407E-A947-70E740481C1C}">
+                <a14:useLocalDpi xmlns:a14="http://schemas.microsoft.com/office/drawing/2010/main" val="0"/>
+              </a:ext>
+            </a:extLst>
+          </a:blip>
+          <a:srcRect/>
+          <a:stretch>
+            <a:fillRect/>
+          </a:stretch>
+        </p:blipFill>
+        <p:spPr bwMode="auto">
+          <a:xfrm>
+            <a:off x="724373" y="1722423"/>
+            <a:ext cx="4520884" cy="4344459"/>
+          </a:xfrm>
+          <a:prstGeom prst="rect">
+            <a:avLst/>
+          </a:prstGeom>
+          <a:noFill/>
+          <a:extLst>
+            <a:ext uri="{909E8E84-426E-40DD-AFC4-6F175D3DCCD1}">
+              <a14:hiddenFill xmlns:a14="http://schemas.microsoft.com/office/drawing/2010/main">
+                <a:solidFill>
+                  <a:srgbClr val="FFFFFF"/>
+                </a:solidFill>
+              </a14:hiddenFill>
+            </a:ext>
+          </a:extLst>
+        </p:spPr>
+      </p:pic>
+      <p:pic>
+        <p:nvPicPr>
+          <p:cNvPr id="3076" name="Picture 4">
+            <a:extLst>
+              <a:ext uri="{FF2B5EF4-FFF2-40B4-BE49-F238E27FC236}">
+                <a16:creationId xmlns:a16="http://schemas.microsoft.com/office/drawing/2014/main" id="{ACEC1CF9-B675-3B43-AEE3-35A12AEF34C6}"/>
+              </a:ext>
+            </a:extLst>
+          </p:cNvPr>
+          <p:cNvPicPr>
+            <a:picLocks noChangeAspect="1" noChangeArrowheads="1"/>
+          </p:cNvPicPr>
+          <p:nvPr/>
+        </p:nvPicPr>
+        <p:blipFill>
+          <a:blip r:embed="rId3" cstate="print">
+            <a:extLst>
+              <a:ext uri="{28A0092B-C50C-407E-A947-70E740481C1C}">
+                <a14:useLocalDpi xmlns:a14="http://schemas.microsoft.com/office/drawing/2010/main" val="0"/>
+              </a:ext>
+            </a:extLst>
+          </a:blip>
+          <a:srcRect/>
+          <a:stretch>
+            <a:fillRect/>
+          </a:stretch>
+        </p:blipFill>
+        <p:spPr bwMode="auto">
+          <a:xfrm>
+            <a:off x="6982774" y="1722422"/>
+            <a:ext cx="4520884" cy="4344459"/>
+          </a:xfrm>
+          <a:prstGeom prst="rect">
+            <a:avLst/>
+          </a:prstGeom>
+          <a:noFill/>
+          <a:extLst>
+            <a:ext uri="{909E8E84-426E-40DD-AFC4-6F175D3DCCD1}">
+              <a14:hiddenFill xmlns:a14="http://schemas.microsoft.com/office/drawing/2010/main">
+                <a:solidFill>
+                  <a:srgbClr val="FFFFFF"/>
+                </a:solidFill>
+              </a14:hiddenFill>
+            </a:ext>
+          </a:extLst>
+        </p:spPr>
+      </p:pic>
+    </p:spTree>
+    <p:extLst>
+      <p:ext uri="{BB962C8B-B14F-4D97-AF65-F5344CB8AC3E}">
+        <p14:creationId xmlns:p14="http://schemas.microsoft.com/office/powerpoint/2010/main" val="128742045"/>
+      </p:ext>
+    </p:extLst>
+  </p:cSld>
+  <p:clrMapOvr>
+    <a:masterClrMapping/>
+  </p:clrMapOvr>
+</p:sld>
+</file>
+
+<file path=ppt/slides/slide33.xml><?xml version="1.0" encoding="utf-8"?>
+<p:sld xmlns:a="http://schemas.openxmlformats.org/drawingml/2006/main" xmlns:r="http://schemas.openxmlformats.org/officeDocument/2006/relationships" xmlns:p="http://schemas.openxmlformats.org/presentationml/2006/main" showMasterSp="0">
+  <p:cSld>
+    <p:spTree>
+      <p:nvGrpSpPr>
+        <p:cNvPr id="1" name="">
+          <a:extLst>
+            <a:ext uri="{FF2B5EF4-FFF2-40B4-BE49-F238E27FC236}">
+              <a16:creationId xmlns:a16="http://schemas.microsoft.com/office/drawing/2014/main" id="{D125987E-7DAA-A0AF-934E-A11FF70C9452}"/>
+            </a:ext>
+          </a:extLst>
+        </p:cNvPr>
+        <p:cNvGrpSpPr/>
+        <p:nvPr/>
+      </p:nvGrpSpPr>
+      <p:grpSpPr>
+        <a:xfrm>
+          <a:off x="0" y="0"/>
+          <a:ext cx="0" cy="0"/>
+          <a:chOff x="0" y="0"/>
+          <a:chExt cx="0" cy="0"/>
+        </a:xfrm>
+      </p:grpSpPr>
+      <p:sp>
+        <p:nvSpPr>
+          <p:cNvPr id="4" name="object 4">
+            <a:extLst>
+              <a:ext uri="{FF2B5EF4-FFF2-40B4-BE49-F238E27FC236}">
+                <a16:creationId xmlns:a16="http://schemas.microsoft.com/office/drawing/2014/main" id="{D0E41EC3-0A73-F5B7-D458-156CC102C0F9}"/>
+              </a:ext>
+            </a:extLst>
+          </p:cNvPr>
+          <p:cNvSpPr txBox="1">
+            <a:spLocks noGrp="1"/>
+          </p:cNvSpPr>
+          <p:nvPr>
+            <p:ph type="dt" sz="half" idx="6"/>
+          </p:nvPr>
+        </p:nvSpPr>
+        <p:spPr>
+          <a:prstGeom prst="rect">
+            <a:avLst/>
+          </a:prstGeom>
+        </p:spPr>
+        <p:txBody>
+          <a:bodyPr vert="horz" wrap="square" lIns="0" tIns="6350" rIns="0" bIns="0" rtlCol="0">
+            <a:spAutoFit/>
+          </a:bodyPr>
+          <a:lstStyle/>
+          <a:p>
+            <a:pPr marL="12700">
+              <a:lnSpc>
+                <a:spcPct val="100000"/>
+              </a:lnSpc>
+              <a:spcBef>
+                <a:spcPts val="50"/>
+              </a:spcBef>
+            </a:pPr>
+            <a:r>
+              <a:rPr dirty="0"/>
+              <a:t>Thiết</a:t>
+            </a:r>
+            <a:r>
+              <a:rPr spc="-20" dirty="0"/>
+              <a:t> </a:t>
+            </a:r>
+            <a:r>
+              <a:rPr dirty="0"/>
+              <a:t>Kế</a:t>
+            </a:r>
+            <a:r>
+              <a:rPr spc="-40" dirty="0"/>
+              <a:t> </a:t>
+            </a:r>
+            <a:r>
+              <a:rPr dirty="0"/>
+              <a:t>Vi</a:t>
+            </a:r>
+            <a:r>
+              <a:rPr spc="10" dirty="0"/>
+              <a:t> </a:t>
+            </a:r>
+            <a:r>
+              <a:rPr spc="-20" dirty="0"/>
+              <a:t>Mạch</a:t>
+            </a:r>
+          </a:p>
+        </p:txBody>
+      </p:sp>
+      <p:sp>
+        <p:nvSpPr>
+          <p:cNvPr id="5" name="object 5">
+            <a:extLst>
+              <a:ext uri="{FF2B5EF4-FFF2-40B4-BE49-F238E27FC236}">
+                <a16:creationId xmlns:a16="http://schemas.microsoft.com/office/drawing/2014/main" id="{E4718C5E-C2E3-94C1-F9AF-7D017FB9F2A8}"/>
+              </a:ext>
+            </a:extLst>
+          </p:cNvPr>
+          <p:cNvSpPr txBox="1">
+            <a:spLocks noGrp="1"/>
+          </p:cNvSpPr>
+          <p:nvPr>
+            <p:ph type="sldNum" sz="quarter" idx="7"/>
+          </p:nvPr>
+        </p:nvSpPr>
+        <p:spPr>
+          <a:prstGeom prst="rect">
+            <a:avLst/>
+          </a:prstGeom>
+        </p:spPr>
+        <p:txBody>
+          <a:bodyPr vert="horz" wrap="square" lIns="0" tIns="6350" rIns="0" bIns="0" rtlCol="0">
+            <a:spAutoFit/>
+          </a:bodyPr>
+          <a:lstStyle/>
+          <a:p>
+            <a:pPr marL="38100">
+              <a:lnSpc>
+                <a:spcPct val="100000"/>
+              </a:lnSpc>
+              <a:spcBef>
+                <a:spcPts val="50"/>
+              </a:spcBef>
+            </a:pPr>
+            <a:fld id="{81D60167-4931-47E6-BA6A-407CBD079E47}" type="slidenum">
+              <a:rPr spc="-25" dirty="0"/>
+              <a:t>33</a:t>
+            </a:fld>
+            <a:endParaRPr spc="-25" dirty="0"/>
+          </a:p>
+        </p:txBody>
+      </p:sp>
+      <p:sp>
+        <p:nvSpPr>
+          <p:cNvPr id="6" name="object 6">
+            <a:extLst>
+              <a:ext uri="{FF2B5EF4-FFF2-40B4-BE49-F238E27FC236}">
+                <a16:creationId xmlns:a16="http://schemas.microsoft.com/office/drawing/2014/main" id="{22E46722-AB0B-C47F-BCC3-54FF7A3EF55A}"/>
+              </a:ext>
+            </a:extLst>
+          </p:cNvPr>
+          <p:cNvSpPr txBox="1">
+            <a:spLocks noGrp="1"/>
+          </p:cNvSpPr>
+          <p:nvPr>
+            <p:ph type="ftr" sz="quarter" idx="5"/>
+          </p:nvPr>
+        </p:nvSpPr>
+        <p:spPr>
+          <a:prstGeom prst="rect">
+            <a:avLst/>
+          </a:prstGeom>
+        </p:spPr>
+        <p:txBody>
+          <a:bodyPr vert="horz" wrap="square" lIns="0" tIns="5715" rIns="0" bIns="0" rtlCol="0">
+            <a:spAutoFit/>
+          </a:bodyPr>
+          <a:lstStyle/>
+          <a:p>
+            <a:pPr marL="12700">
+              <a:lnSpc>
+                <a:spcPct val="100000"/>
+              </a:lnSpc>
+              <a:spcBef>
+                <a:spcPts val="45"/>
+              </a:spcBef>
+            </a:pPr>
+            <a:r>
+              <a:rPr dirty="0"/>
+              <a:t>©</a:t>
+            </a:r>
+            <a:r>
+              <a:rPr spc="-45" dirty="0"/>
+              <a:t> </a:t>
+            </a:r>
+            <a:r>
+              <a:rPr dirty="0"/>
+              <a:t>2025</a:t>
+            </a:r>
+            <a:r>
+              <a:rPr spc="-15" dirty="0"/>
+              <a:t> </a:t>
+            </a:r>
+            <a:r>
+              <a:rPr dirty="0"/>
+              <a:t>–</a:t>
+            </a:r>
+            <a:r>
+              <a:rPr spc="-20" dirty="0"/>
+              <a:t> </a:t>
+            </a:r>
+            <a:r>
+              <a:rPr dirty="0"/>
+              <a:t>Long</a:t>
+            </a:r>
+            <a:r>
+              <a:rPr spc="-10" dirty="0"/>
+              <a:t> Hoang</a:t>
+            </a:r>
+          </a:p>
+        </p:txBody>
+      </p:sp>
+      <p:sp>
+        <p:nvSpPr>
+          <p:cNvPr id="2" name="object 2">
+            <a:extLst>
+              <a:ext uri="{FF2B5EF4-FFF2-40B4-BE49-F238E27FC236}">
+                <a16:creationId xmlns:a16="http://schemas.microsoft.com/office/drawing/2014/main" id="{2C653B76-EE34-A7C7-D856-58C3BC0B1C40}"/>
+              </a:ext>
+            </a:extLst>
+          </p:cNvPr>
+          <p:cNvSpPr txBox="1">
+            <a:spLocks noGrp="1"/>
+          </p:cNvSpPr>
+          <p:nvPr>
+            <p:ph type="title"/>
+          </p:nvPr>
+        </p:nvSpPr>
+        <p:spPr>
+          <a:xfrm>
+            <a:off x="508316" y="480313"/>
+            <a:ext cx="7721283" cy="567463"/>
+          </a:xfrm>
+          <a:prstGeom prst="rect">
+            <a:avLst/>
+          </a:prstGeom>
+        </p:spPr>
+        <p:txBody>
+          <a:bodyPr vert="horz" wrap="square" lIns="0" tIns="13335" rIns="0" bIns="0" rtlCol="0">
+            <a:spAutoFit/>
+          </a:bodyPr>
+          <a:lstStyle/>
+          <a:p>
+            <a:pPr marL="12700">
+              <a:lnSpc>
+                <a:spcPct val="100000"/>
+              </a:lnSpc>
+              <a:spcBef>
+                <a:spcPts val="105"/>
+              </a:spcBef>
+            </a:pPr>
+            <a:r>
+              <a:rPr lang="en-US"/>
+              <a:t>2.</a:t>
+            </a:r>
+            <a:r>
+              <a:rPr lang="en-US" spc="-160"/>
+              <a:t> </a:t>
+            </a:r>
+            <a:r>
+              <a:rPr lang="en-US"/>
+              <a:t>High</a:t>
+            </a:r>
+            <a:r>
+              <a:rPr lang="en-US" spc="-140"/>
+              <a:t> </a:t>
+            </a:r>
+            <a:r>
+              <a:rPr lang="en-US"/>
+              <a:t>Level</a:t>
+            </a:r>
+            <a:r>
+              <a:rPr lang="en-US" spc="-140"/>
+              <a:t> </a:t>
+            </a:r>
+            <a:r>
+              <a:rPr lang="en-US"/>
+              <a:t>Block</a:t>
+            </a:r>
+            <a:r>
+              <a:rPr lang="en-US" spc="-160"/>
+              <a:t> </a:t>
+            </a:r>
+            <a:r>
+              <a:rPr lang="en-US" spc="-10"/>
+              <a:t>Design</a:t>
+            </a:r>
+            <a:endParaRPr spc="-20" dirty="0"/>
+          </a:p>
+        </p:txBody>
+      </p:sp>
+      <p:sp>
+        <p:nvSpPr>
+          <p:cNvPr id="3" name="object 3">
+            <a:extLst>
+              <a:ext uri="{FF2B5EF4-FFF2-40B4-BE49-F238E27FC236}">
+                <a16:creationId xmlns:a16="http://schemas.microsoft.com/office/drawing/2014/main" id="{B32C9BB3-706E-B11B-DFFF-714274DCA03B}"/>
+              </a:ext>
+            </a:extLst>
+          </p:cNvPr>
+          <p:cNvSpPr txBox="1"/>
+          <p:nvPr/>
+        </p:nvSpPr>
+        <p:spPr>
+          <a:xfrm>
+            <a:off x="457200" y="1121155"/>
+            <a:ext cx="10896600" cy="475130"/>
+          </a:xfrm>
+          <a:prstGeom prst="rect">
+            <a:avLst/>
+          </a:prstGeom>
+        </p:spPr>
+        <p:txBody>
+          <a:bodyPr vert="horz" wrap="square" lIns="0" tIns="13335" rIns="0" bIns="0" rtlCol="0">
+            <a:spAutoFit/>
+          </a:bodyPr>
+          <a:lstStyle/>
+          <a:p>
+            <a:pPr marL="12700">
+              <a:lnSpc>
+                <a:spcPct val="100000"/>
+              </a:lnSpc>
+              <a:spcBef>
+                <a:spcPts val="105"/>
+              </a:spcBef>
+            </a:pPr>
+            <a:r>
+              <a:rPr lang="en-US" sz="3000" b="1">
+                <a:solidFill>
+                  <a:srgbClr val="7C45AD"/>
+                </a:solidFill>
+                <a:latin typeface="Arial"/>
+                <a:cs typeface="Arial"/>
+              </a:rPr>
+              <a:t>2.4 AMBA ABP Interface signals</a:t>
+            </a:r>
+          </a:p>
+        </p:txBody>
+      </p:sp>
+      <p:sp>
+        <p:nvSpPr>
+          <p:cNvPr id="8" name="TextBox 7">
+            <a:extLst>
+              <a:ext uri="{FF2B5EF4-FFF2-40B4-BE49-F238E27FC236}">
+                <a16:creationId xmlns:a16="http://schemas.microsoft.com/office/drawing/2014/main" id="{80BE9A0A-71B7-9CDC-B496-EA5434CAE561}"/>
+              </a:ext>
+            </a:extLst>
+          </p:cNvPr>
+          <p:cNvSpPr txBox="1"/>
+          <p:nvPr/>
+        </p:nvSpPr>
+        <p:spPr>
+          <a:xfrm>
+            <a:off x="381648" y="6193021"/>
+            <a:ext cx="5206335" cy="369332"/>
+          </a:xfrm>
+          <a:prstGeom prst="rect">
+            <a:avLst/>
+          </a:prstGeom>
+          <a:noFill/>
+        </p:spPr>
+        <p:txBody>
+          <a:bodyPr wrap="square">
+            <a:spAutoFit/>
+          </a:bodyPr>
+          <a:lstStyle/>
+          <a:p>
+            <a:pPr algn="ctr"/>
+            <a:r>
+              <a:rPr lang="en-US" b="1" i="1">
+                <a:latin typeface="Arial" panose="020B0604020202020204" pitchFamily="34" charset="0"/>
+                <a:cs typeface="Arial" panose="020B0604020202020204" pitchFamily="34" charset="0"/>
+              </a:rPr>
+              <a:t>APB Write transfer with waiting state</a:t>
+            </a:r>
+          </a:p>
+        </p:txBody>
+      </p:sp>
+      <p:sp>
+        <p:nvSpPr>
+          <p:cNvPr id="9" name="TextBox 8">
+            <a:extLst>
+              <a:ext uri="{FF2B5EF4-FFF2-40B4-BE49-F238E27FC236}">
+                <a16:creationId xmlns:a16="http://schemas.microsoft.com/office/drawing/2014/main" id="{498A9CDE-1566-9499-7A85-2830FB2CCB93}"/>
+              </a:ext>
+            </a:extLst>
+          </p:cNvPr>
+          <p:cNvSpPr txBox="1"/>
+          <p:nvPr/>
+        </p:nvSpPr>
+        <p:spPr>
+          <a:xfrm>
+            <a:off x="6640049" y="6193021"/>
+            <a:ext cx="5206335" cy="369332"/>
+          </a:xfrm>
+          <a:prstGeom prst="rect">
+            <a:avLst/>
+          </a:prstGeom>
+          <a:noFill/>
+        </p:spPr>
+        <p:txBody>
+          <a:bodyPr wrap="square">
+            <a:spAutoFit/>
+          </a:bodyPr>
+          <a:lstStyle/>
+          <a:p>
+            <a:pPr algn="ctr"/>
+            <a:r>
+              <a:rPr lang="en-US" b="1" i="1">
+                <a:latin typeface="Arial" panose="020B0604020202020204" pitchFamily="34" charset="0"/>
+                <a:cs typeface="Arial" panose="020B0604020202020204" pitchFamily="34" charset="0"/>
+              </a:rPr>
+              <a:t>APB Read transfer with waiting state</a:t>
+            </a:r>
+          </a:p>
+        </p:txBody>
+      </p:sp>
+      <p:pic>
+        <p:nvPicPr>
+          <p:cNvPr id="2050" name="Picture 2">
+            <a:extLst>
+              <a:ext uri="{FF2B5EF4-FFF2-40B4-BE49-F238E27FC236}">
+                <a16:creationId xmlns:a16="http://schemas.microsoft.com/office/drawing/2014/main" id="{B074756E-5359-71AB-4108-FF9650A8824C}"/>
+              </a:ext>
+            </a:extLst>
+          </p:cNvPr>
+          <p:cNvPicPr>
+            <a:picLocks noChangeAspect="1" noChangeArrowheads="1"/>
+          </p:cNvPicPr>
+          <p:nvPr/>
+        </p:nvPicPr>
+        <p:blipFill>
+          <a:blip r:embed="rId2" cstate="print">
+            <a:extLst>
+              <a:ext uri="{28A0092B-C50C-407E-A947-70E740481C1C}">
+                <a14:useLocalDpi xmlns:a14="http://schemas.microsoft.com/office/drawing/2010/main" val="0"/>
+              </a:ext>
+            </a:extLst>
+          </a:blip>
+          <a:srcRect/>
+          <a:stretch>
+            <a:fillRect/>
+          </a:stretch>
+        </p:blipFill>
+        <p:spPr bwMode="auto">
+          <a:xfrm>
+            <a:off x="712416" y="1706198"/>
+            <a:ext cx="4544798" cy="4389609"/>
+          </a:xfrm>
+          <a:prstGeom prst="rect">
+            <a:avLst/>
+          </a:prstGeom>
+          <a:noFill/>
+          <a:extLst>
+            <a:ext uri="{909E8E84-426E-40DD-AFC4-6F175D3DCCD1}">
+              <a14:hiddenFill xmlns:a14="http://schemas.microsoft.com/office/drawing/2010/main">
+                <a:solidFill>
+                  <a:srgbClr val="FFFFFF"/>
+                </a:solidFill>
+              </a14:hiddenFill>
+            </a:ext>
+          </a:extLst>
+        </p:spPr>
+      </p:pic>
+      <p:pic>
+        <p:nvPicPr>
+          <p:cNvPr id="2052" name="Picture 4">
+            <a:extLst>
+              <a:ext uri="{FF2B5EF4-FFF2-40B4-BE49-F238E27FC236}">
+                <a16:creationId xmlns:a16="http://schemas.microsoft.com/office/drawing/2014/main" id="{6A128491-BD3D-A83D-2B17-4CB8A469158A}"/>
+              </a:ext>
+            </a:extLst>
+          </p:cNvPr>
+          <p:cNvPicPr>
+            <a:picLocks noChangeAspect="1" noChangeArrowheads="1"/>
+          </p:cNvPicPr>
+          <p:nvPr/>
+        </p:nvPicPr>
+        <p:blipFill>
+          <a:blip r:embed="rId3" cstate="print">
+            <a:extLst>
+              <a:ext uri="{28A0092B-C50C-407E-A947-70E740481C1C}">
+                <a14:useLocalDpi xmlns:a14="http://schemas.microsoft.com/office/drawing/2010/main" val="0"/>
+              </a:ext>
+            </a:extLst>
+          </a:blip>
+          <a:srcRect/>
+          <a:stretch>
+            <a:fillRect/>
+          </a:stretch>
+        </p:blipFill>
+        <p:spPr bwMode="auto">
+          <a:xfrm>
+            <a:off x="6982236" y="1706198"/>
+            <a:ext cx="4521959" cy="4389609"/>
+          </a:xfrm>
+          <a:prstGeom prst="rect">
+            <a:avLst/>
+          </a:prstGeom>
+          <a:noFill/>
+          <a:extLst>
+            <a:ext uri="{909E8E84-426E-40DD-AFC4-6F175D3DCCD1}">
+              <a14:hiddenFill xmlns:a14="http://schemas.microsoft.com/office/drawing/2010/main">
+                <a:solidFill>
+                  <a:srgbClr val="FFFFFF"/>
+                </a:solidFill>
+              </a14:hiddenFill>
+            </a:ext>
+          </a:extLst>
+        </p:spPr>
+      </p:pic>
+    </p:spTree>
+    <p:extLst>
+      <p:ext uri="{BB962C8B-B14F-4D97-AF65-F5344CB8AC3E}">
+        <p14:creationId xmlns:p14="http://schemas.microsoft.com/office/powerpoint/2010/main" val="3557087176"/>
+      </p:ext>
+    </p:extLst>
+  </p:cSld>
+  <p:clrMapOvr>
+    <a:masterClrMapping/>
+  </p:clrMapOvr>
+</p:sld>
+</file>
+
+<file path=ppt/slides/slide34.xml><?xml version="1.0" encoding="utf-8"?>
+<p:sld xmlns:a="http://schemas.openxmlformats.org/drawingml/2006/main" xmlns:r="http://schemas.openxmlformats.org/officeDocument/2006/relationships" xmlns:p="http://schemas.openxmlformats.org/presentationml/2006/main" showMasterSp="0">
+  <p:cSld>
+    <p:spTree>
+      <p:nvGrpSpPr>
+        <p:cNvPr id="1" name="">
+          <a:extLst>
+            <a:ext uri="{FF2B5EF4-FFF2-40B4-BE49-F238E27FC236}">
+              <a16:creationId xmlns:a16="http://schemas.microsoft.com/office/drawing/2014/main" id="{C471DA05-B8DD-5BA9-D4ED-2F5F92FB22A3}"/>
+            </a:ext>
+          </a:extLst>
+        </p:cNvPr>
+        <p:cNvGrpSpPr/>
+        <p:nvPr/>
+      </p:nvGrpSpPr>
+      <p:grpSpPr>
+        <a:xfrm>
+          <a:off x="0" y="0"/>
+          <a:ext cx="0" cy="0"/>
+          <a:chOff x="0" y="0"/>
+          <a:chExt cx="0" cy="0"/>
+        </a:xfrm>
+      </p:grpSpPr>
+      <p:sp>
+        <p:nvSpPr>
+          <p:cNvPr id="4" name="object 4">
+            <a:extLst>
+              <a:ext uri="{FF2B5EF4-FFF2-40B4-BE49-F238E27FC236}">
+                <a16:creationId xmlns:a16="http://schemas.microsoft.com/office/drawing/2014/main" id="{34C1CA16-9673-63B2-1D7B-B001688EC818}"/>
+              </a:ext>
+            </a:extLst>
+          </p:cNvPr>
+          <p:cNvSpPr txBox="1">
+            <a:spLocks noGrp="1"/>
+          </p:cNvSpPr>
+          <p:nvPr>
+            <p:ph type="dt" sz="half" idx="6"/>
+          </p:nvPr>
+        </p:nvSpPr>
+        <p:spPr>
+          <a:prstGeom prst="rect">
+            <a:avLst/>
+          </a:prstGeom>
+        </p:spPr>
+        <p:txBody>
+          <a:bodyPr vert="horz" wrap="square" lIns="0" tIns="6350" rIns="0" bIns="0" rtlCol="0">
+            <a:spAutoFit/>
+          </a:bodyPr>
+          <a:lstStyle/>
+          <a:p>
+            <a:pPr marL="12700">
+              <a:lnSpc>
+                <a:spcPct val="100000"/>
+              </a:lnSpc>
+              <a:spcBef>
+                <a:spcPts val="50"/>
+              </a:spcBef>
+            </a:pPr>
+            <a:r>
+              <a:rPr dirty="0"/>
+              <a:t>Thiết</a:t>
+            </a:r>
+            <a:r>
+              <a:rPr spc="-20" dirty="0"/>
+              <a:t> </a:t>
+            </a:r>
+            <a:r>
+              <a:rPr dirty="0"/>
+              <a:t>Kế</a:t>
+            </a:r>
+            <a:r>
+              <a:rPr spc="-40" dirty="0"/>
+              <a:t> </a:t>
+            </a:r>
+            <a:r>
+              <a:rPr dirty="0"/>
+              <a:t>Vi</a:t>
+            </a:r>
+            <a:r>
+              <a:rPr spc="10" dirty="0"/>
+              <a:t> </a:t>
+            </a:r>
+            <a:r>
+              <a:rPr spc="-20" dirty="0"/>
+              <a:t>Mạch</a:t>
+            </a:r>
+          </a:p>
+        </p:txBody>
+      </p:sp>
+      <p:sp>
+        <p:nvSpPr>
+          <p:cNvPr id="5" name="object 5">
+            <a:extLst>
+              <a:ext uri="{FF2B5EF4-FFF2-40B4-BE49-F238E27FC236}">
+                <a16:creationId xmlns:a16="http://schemas.microsoft.com/office/drawing/2014/main" id="{40B25F69-3B89-7D6B-9E03-05400554B8D6}"/>
+              </a:ext>
+            </a:extLst>
+          </p:cNvPr>
+          <p:cNvSpPr txBox="1">
+            <a:spLocks noGrp="1"/>
+          </p:cNvSpPr>
+          <p:nvPr>
+            <p:ph type="sldNum" sz="quarter" idx="7"/>
+          </p:nvPr>
+        </p:nvSpPr>
+        <p:spPr>
+          <a:prstGeom prst="rect">
+            <a:avLst/>
+          </a:prstGeom>
+        </p:spPr>
+        <p:txBody>
+          <a:bodyPr vert="horz" wrap="square" lIns="0" tIns="6350" rIns="0" bIns="0" rtlCol="0">
+            <a:spAutoFit/>
+          </a:bodyPr>
+          <a:lstStyle/>
+          <a:p>
+            <a:pPr marL="38100">
+              <a:lnSpc>
+                <a:spcPct val="100000"/>
+              </a:lnSpc>
+              <a:spcBef>
+                <a:spcPts val="50"/>
+              </a:spcBef>
+            </a:pPr>
+            <a:fld id="{81D60167-4931-47E6-BA6A-407CBD079E47}" type="slidenum">
+              <a:rPr spc="-25" dirty="0"/>
+              <a:t>34</a:t>
+            </a:fld>
+            <a:endParaRPr spc="-25" dirty="0"/>
+          </a:p>
+        </p:txBody>
+      </p:sp>
+      <p:sp>
+        <p:nvSpPr>
+          <p:cNvPr id="6" name="object 6">
+            <a:extLst>
+              <a:ext uri="{FF2B5EF4-FFF2-40B4-BE49-F238E27FC236}">
+                <a16:creationId xmlns:a16="http://schemas.microsoft.com/office/drawing/2014/main" id="{136FC768-942C-F44B-7EE4-BBE7831F2073}"/>
+              </a:ext>
+            </a:extLst>
+          </p:cNvPr>
+          <p:cNvSpPr txBox="1">
+            <a:spLocks noGrp="1"/>
+          </p:cNvSpPr>
+          <p:nvPr>
+            <p:ph type="ftr" sz="quarter" idx="5"/>
+          </p:nvPr>
+        </p:nvSpPr>
+        <p:spPr>
+          <a:prstGeom prst="rect">
+            <a:avLst/>
+          </a:prstGeom>
+        </p:spPr>
+        <p:txBody>
+          <a:bodyPr vert="horz" wrap="square" lIns="0" tIns="5715" rIns="0" bIns="0" rtlCol="0">
+            <a:spAutoFit/>
+          </a:bodyPr>
+          <a:lstStyle/>
+          <a:p>
+            <a:pPr marL="12700">
+              <a:lnSpc>
+                <a:spcPct val="100000"/>
+              </a:lnSpc>
+              <a:spcBef>
+                <a:spcPts val="45"/>
+              </a:spcBef>
+            </a:pPr>
+            <a:r>
+              <a:rPr dirty="0"/>
+              <a:t>©</a:t>
+            </a:r>
+            <a:r>
+              <a:rPr spc="-45" dirty="0"/>
+              <a:t> </a:t>
+            </a:r>
+            <a:r>
+              <a:rPr dirty="0"/>
+              <a:t>2025</a:t>
+            </a:r>
+            <a:r>
+              <a:rPr spc="-15" dirty="0"/>
+              <a:t> </a:t>
+            </a:r>
+            <a:r>
+              <a:rPr dirty="0"/>
+              <a:t>–</a:t>
+            </a:r>
+            <a:r>
+              <a:rPr spc="-20" dirty="0"/>
+              <a:t> </a:t>
+            </a:r>
+            <a:r>
+              <a:rPr dirty="0"/>
+              <a:t>Long</a:t>
+            </a:r>
+            <a:r>
+              <a:rPr spc="-10" dirty="0"/>
+              <a:t> Hoang</a:t>
+            </a:r>
+          </a:p>
+        </p:txBody>
+      </p:sp>
+      <p:sp>
+        <p:nvSpPr>
+          <p:cNvPr id="2" name="object 2">
+            <a:extLst>
+              <a:ext uri="{FF2B5EF4-FFF2-40B4-BE49-F238E27FC236}">
+                <a16:creationId xmlns:a16="http://schemas.microsoft.com/office/drawing/2014/main" id="{AACF68D5-8C9F-E8B8-C2E5-3580B0C8407D}"/>
+              </a:ext>
+            </a:extLst>
+          </p:cNvPr>
+          <p:cNvSpPr txBox="1">
+            <a:spLocks noGrp="1"/>
+          </p:cNvSpPr>
+          <p:nvPr>
+            <p:ph type="title"/>
+          </p:nvPr>
+        </p:nvSpPr>
+        <p:spPr>
+          <a:xfrm>
+            <a:off x="508316" y="480313"/>
+            <a:ext cx="7721283" cy="567463"/>
+          </a:xfrm>
+          <a:prstGeom prst="rect">
+            <a:avLst/>
+          </a:prstGeom>
+        </p:spPr>
+        <p:txBody>
+          <a:bodyPr vert="horz" wrap="square" lIns="0" tIns="13335" rIns="0" bIns="0" rtlCol="0">
+            <a:spAutoFit/>
+          </a:bodyPr>
+          <a:lstStyle/>
+          <a:p>
+            <a:pPr marL="12700">
+              <a:lnSpc>
+                <a:spcPct val="100000"/>
+              </a:lnSpc>
+              <a:spcBef>
+                <a:spcPts val="105"/>
+              </a:spcBef>
+            </a:pPr>
+            <a:r>
+              <a:rPr lang="en-US"/>
+              <a:t>2.</a:t>
+            </a:r>
+            <a:r>
+              <a:rPr lang="en-US" spc="-160"/>
+              <a:t> </a:t>
+            </a:r>
+            <a:r>
+              <a:rPr lang="en-US"/>
+              <a:t>High</a:t>
+            </a:r>
+            <a:r>
+              <a:rPr lang="en-US" spc="-140"/>
+              <a:t> </a:t>
+            </a:r>
+            <a:r>
+              <a:rPr lang="en-US"/>
+              <a:t>Level</a:t>
+            </a:r>
+            <a:r>
+              <a:rPr lang="en-US" spc="-140"/>
+              <a:t> </a:t>
+            </a:r>
+            <a:r>
+              <a:rPr lang="en-US"/>
+              <a:t>Block</a:t>
+            </a:r>
+            <a:r>
+              <a:rPr lang="en-US" spc="-160"/>
+              <a:t> </a:t>
+            </a:r>
+            <a:r>
+              <a:rPr lang="en-US" spc="-10"/>
+              <a:t>Design</a:t>
+            </a:r>
+            <a:endParaRPr spc="-20" dirty="0"/>
+          </a:p>
+        </p:txBody>
+      </p:sp>
+      <p:sp>
+        <p:nvSpPr>
+          <p:cNvPr id="3" name="object 3">
+            <a:extLst>
+              <a:ext uri="{FF2B5EF4-FFF2-40B4-BE49-F238E27FC236}">
+                <a16:creationId xmlns:a16="http://schemas.microsoft.com/office/drawing/2014/main" id="{6BFAFB05-05F7-A2D1-DDC8-456BAEF9CADD}"/>
+              </a:ext>
+            </a:extLst>
+          </p:cNvPr>
+          <p:cNvSpPr txBox="1"/>
+          <p:nvPr/>
+        </p:nvSpPr>
+        <p:spPr>
+          <a:xfrm>
+            <a:off x="457200" y="1121155"/>
+            <a:ext cx="10896600" cy="475130"/>
+          </a:xfrm>
+          <a:prstGeom prst="rect">
+            <a:avLst/>
+          </a:prstGeom>
+        </p:spPr>
+        <p:txBody>
+          <a:bodyPr vert="horz" wrap="square" lIns="0" tIns="13335" rIns="0" bIns="0" rtlCol="0">
+            <a:spAutoFit/>
+          </a:bodyPr>
+          <a:lstStyle/>
+          <a:p>
+            <a:pPr marL="12700">
+              <a:lnSpc>
+                <a:spcPct val="100000"/>
+              </a:lnSpc>
+              <a:spcBef>
+                <a:spcPts val="105"/>
+              </a:spcBef>
+            </a:pPr>
+            <a:r>
+              <a:rPr lang="en-US" sz="3000" b="1">
+                <a:solidFill>
+                  <a:srgbClr val="7C45AD"/>
+                </a:solidFill>
+                <a:latin typeface="Arial"/>
+                <a:cs typeface="Arial"/>
+              </a:rPr>
+              <a:t>2.4 AMBA ABP Interface signals</a:t>
+            </a:r>
+          </a:p>
+        </p:txBody>
+      </p:sp>
+      <p:sp>
+        <p:nvSpPr>
+          <p:cNvPr id="8" name="TextBox 7">
+            <a:extLst>
+              <a:ext uri="{FF2B5EF4-FFF2-40B4-BE49-F238E27FC236}">
+                <a16:creationId xmlns:a16="http://schemas.microsoft.com/office/drawing/2014/main" id="{9A80CC68-8F48-3687-8218-D19FD6AE0CE1}"/>
+              </a:ext>
+            </a:extLst>
+          </p:cNvPr>
+          <p:cNvSpPr txBox="1"/>
+          <p:nvPr/>
+        </p:nvSpPr>
+        <p:spPr>
+          <a:xfrm>
+            <a:off x="381648" y="6193021"/>
+            <a:ext cx="5206335" cy="369332"/>
+          </a:xfrm>
+          <a:prstGeom prst="rect">
+            <a:avLst/>
+          </a:prstGeom>
+          <a:noFill/>
+        </p:spPr>
+        <p:txBody>
+          <a:bodyPr wrap="square">
+            <a:spAutoFit/>
+          </a:bodyPr>
+          <a:lstStyle/>
+          <a:p>
+            <a:pPr algn="ctr"/>
+            <a:r>
+              <a:rPr lang="en-US" b="1" i="1">
+                <a:latin typeface="Arial" panose="020B0604020202020204" pitchFamily="34" charset="0"/>
+                <a:cs typeface="Arial" panose="020B0604020202020204" pitchFamily="34" charset="0"/>
+              </a:rPr>
+              <a:t>APB Write with address range error</a:t>
+            </a:r>
+          </a:p>
+        </p:txBody>
+      </p:sp>
+      <p:sp>
+        <p:nvSpPr>
+          <p:cNvPr id="9" name="TextBox 8">
+            <a:extLst>
+              <a:ext uri="{FF2B5EF4-FFF2-40B4-BE49-F238E27FC236}">
+                <a16:creationId xmlns:a16="http://schemas.microsoft.com/office/drawing/2014/main" id="{D3223375-AB54-6119-DD0C-F023F43F1020}"/>
+              </a:ext>
+            </a:extLst>
+          </p:cNvPr>
+          <p:cNvSpPr txBox="1"/>
+          <p:nvPr/>
+        </p:nvSpPr>
+        <p:spPr>
+          <a:xfrm>
+            <a:off x="6640049" y="6193021"/>
+            <a:ext cx="5206335" cy="369332"/>
+          </a:xfrm>
+          <a:prstGeom prst="rect">
+            <a:avLst/>
+          </a:prstGeom>
+          <a:noFill/>
+        </p:spPr>
+        <p:txBody>
+          <a:bodyPr wrap="square">
+            <a:spAutoFit/>
+          </a:bodyPr>
+          <a:lstStyle/>
+          <a:p>
+            <a:pPr algn="ctr"/>
+            <a:r>
+              <a:rPr lang="en-US" b="1" i="1">
+                <a:latin typeface="Arial" panose="020B0604020202020204" pitchFamily="34" charset="0"/>
+                <a:cs typeface="Arial" panose="020B0604020202020204" pitchFamily="34" charset="0"/>
+              </a:rPr>
+              <a:t>APB Read with address range error</a:t>
+            </a:r>
+          </a:p>
+        </p:txBody>
+      </p:sp>
+      <p:pic>
+        <p:nvPicPr>
+          <p:cNvPr id="4098" name="Picture 2">
+            <a:extLst>
+              <a:ext uri="{FF2B5EF4-FFF2-40B4-BE49-F238E27FC236}">
+                <a16:creationId xmlns:a16="http://schemas.microsoft.com/office/drawing/2014/main" id="{4DDD4619-B937-A298-00A6-D3369EDF0C03}"/>
+              </a:ext>
+            </a:extLst>
+          </p:cNvPr>
+          <p:cNvPicPr>
+            <a:picLocks noChangeAspect="1" noChangeArrowheads="1"/>
+          </p:cNvPicPr>
+          <p:nvPr/>
+        </p:nvPicPr>
+        <p:blipFill>
+          <a:blip r:embed="rId2" cstate="print">
+            <a:extLst>
+              <a:ext uri="{28A0092B-C50C-407E-A947-70E740481C1C}">
+                <a14:useLocalDpi xmlns:a14="http://schemas.microsoft.com/office/drawing/2010/main" val="0"/>
+              </a:ext>
+            </a:extLst>
+          </a:blip>
+          <a:srcRect/>
+          <a:stretch>
+            <a:fillRect/>
+          </a:stretch>
+        </p:blipFill>
+        <p:spPr bwMode="auto">
+          <a:xfrm>
+            <a:off x="927415" y="1837354"/>
+            <a:ext cx="4114800" cy="4355667"/>
+          </a:xfrm>
+          <a:prstGeom prst="rect">
+            <a:avLst/>
+          </a:prstGeom>
+          <a:noFill/>
+          <a:extLst>
+            <a:ext uri="{909E8E84-426E-40DD-AFC4-6F175D3DCCD1}">
+              <a14:hiddenFill xmlns:a14="http://schemas.microsoft.com/office/drawing/2010/main">
+                <a:solidFill>
+                  <a:srgbClr val="FFFFFF"/>
+                </a:solidFill>
+              </a14:hiddenFill>
+            </a:ext>
+          </a:extLst>
+        </p:spPr>
+      </p:pic>
+      <p:pic>
+        <p:nvPicPr>
+          <p:cNvPr id="4104" name="Picture 8">
+            <a:extLst>
+              <a:ext uri="{FF2B5EF4-FFF2-40B4-BE49-F238E27FC236}">
+                <a16:creationId xmlns:a16="http://schemas.microsoft.com/office/drawing/2014/main" id="{25420D53-CE57-2307-97C8-9BDF0D59193B}"/>
+              </a:ext>
+            </a:extLst>
+          </p:cNvPr>
+          <p:cNvPicPr>
+            <a:picLocks noChangeAspect="1" noChangeArrowheads="1"/>
+          </p:cNvPicPr>
+          <p:nvPr/>
+        </p:nvPicPr>
+        <p:blipFill>
+          <a:blip r:embed="rId3" cstate="print">
+            <a:extLst>
+              <a:ext uri="{28A0092B-C50C-407E-A947-70E740481C1C}">
+                <a14:useLocalDpi xmlns:a14="http://schemas.microsoft.com/office/drawing/2010/main" val="0"/>
+              </a:ext>
+            </a:extLst>
+          </a:blip>
+          <a:srcRect/>
+          <a:stretch>
+            <a:fillRect/>
+          </a:stretch>
+        </p:blipFill>
+        <p:spPr bwMode="auto">
+          <a:xfrm>
+            <a:off x="7188444" y="1840135"/>
+            <a:ext cx="4109544" cy="4350103"/>
+          </a:xfrm>
+          <a:prstGeom prst="rect">
+            <a:avLst/>
+          </a:prstGeom>
+          <a:noFill/>
+          <a:extLst>
+            <a:ext uri="{909E8E84-426E-40DD-AFC4-6F175D3DCCD1}">
+              <a14:hiddenFill xmlns:a14="http://schemas.microsoft.com/office/drawing/2010/main">
+                <a:solidFill>
+                  <a:srgbClr val="FFFFFF"/>
+                </a:solidFill>
+              </a14:hiddenFill>
+            </a:ext>
+          </a:extLst>
+        </p:spPr>
+      </p:pic>
+    </p:spTree>
+    <p:extLst>
+      <p:ext uri="{BB962C8B-B14F-4D97-AF65-F5344CB8AC3E}">
+        <p14:creationId xmlns:p14="http://schemas.microsoft.com/office/powerpoint/2010/main" val="1531663178"/>
+      </p:ext>
+    </p:extLst>
+  </p:cSld>
+  <p:clrMapOvr>
+    <a:masterClrMapping/>
+  </p:clrMapOvr>
+</p:sld>
+</file>
+
+<file path=ppt/slides/slide35.xml><?xml version="1.0" encoding="utf-8"?>
 <p:sld xmlns:a="http://schemas.openxmlformats.org/drawingml/2006/main" xmlns:r="http://schemas.openxmlformats.org/officeDocument/2006/relationships" xmlns:p="http://schemas.openxmlformats.org/presentationml/2006/main">
   <p:cSld>
     <p:spTree>
@@ -18915,7 +20975,7 @@
             </a:pPr>
             <a:fld id="{81D60167-4931-47E6-BA6A-407CBD079E47}" type="slidenum">
               <a:rPr spc="-25" dirty="0"/>
-              <a:t>31</a:t>
+              <a:t>35</a:t>
             </a:fld>
             <a:endParaRPr spc="-25" dirty="0"/>
           </a:p>
@@ -18993,7 +21053,7 @@
 </p:sld>
 </file>
 
-<file path=ppt/slides/slide32.xml><?xml version="1.0" encoding="utf-8"?>
+<file path=ppt/slides/slide36.xml><?xml version="1.0" encoding="utf-8"?>
 <p:sld xmlns:a="http://schemas.openxmlformats.org/drawingml/2006/main" xmlns:r="http://schemas.openxmlformats.org/officeDocument/2006/relationships" xmlns:p="http://schemas.openxmlformats.org/presentationml/2006/main" showMasterSp="0">
   <p:cSld>
     <p:spTree>
@@ -19221,7 +21281,7 @@
             </a:pPr>
             <a:fld id="{81D60167-4931-47E6-BA6A-407CBD079E47}" type="slidenum">
               <a:rPr spc="-25" dirty="0"/>
-              <a:t>32</a:t>
+              <a:t>36</a:t>
             </a:fld>
             <a:endParaRPr spc="-25" dirty="0"/>
           </a:p>
@@ -19464,7 +21524,7 @@
 </p:sld>
 </file>
 
-<file path=ppt/slides/slide33.xml><?xml version="1.0" encoding="utf-8"?>
+<file path=ppt/slides/slide37.xml><?xml version="1.0" encoding="utf-8"?>
 <p:sld xmlns:a="http://schemas.openxmlformats.org/drawingml/2006/main" xmlns:r="http://schemas.openxmlformats.org/officeDocument/2006/relationships" xmlns:p="http://schemas.openxmlformats.org/presentationml/2006/main" showMasterSp="0">
   <p:cSld>
     <p:spTree>
@@ -19722,7 +21782,7 @@
             </a:pPr>
             <a:fld id="{81D60167-4931-47E6-BA6A-407CBD079E47}" type="slidenum">
               <a:rPr spc="-25" dirty="0"/>
-              <a:t>33</a:t>
+              <a:t>37</a:t>
             </a:fld>
             <a:endParaRPr spc="-25" dirty="0"/>
           </a:p>
@@ -19897,7 +21957,7 @@
 </p:sld>
 </file>
 
-<file path=ppt/slides/slide34.xml><?xml version="1.0" encoding="utf-8"?>
+<file path=ppt/slides/slide38.xml><?xml version="1.0" encoding="utf-8"?>
 <p:sld xmlns:a="http://schemas.openxmlformats.org/drawingml/2006/main" xmlns:r="http://schemas.openxmlformats.org/officeDocument/2006/relationships" xmlns:p="http://schemas.openxmlformats.org/presentationml/2006/main" showMasterSp="0">
   <p:cSld>
     <p:spTree>
@@ -20155,7 +22215,7 @@
             </a:pPr>
             <a:fld id="{81D60167-4931-47E6-BA6A-407CBD079E47}" type="slidenum">
               <a:rPr spc="-25" dirty="0"/>
-              <a:t>34</a:t>
+              <a:t>38</a:t>
             </a:fld>
             <a:endParaRPr spc="-25" dirty="0"/>
           </a:p>
@@ -20628,7 +22688,7 @@
 </p:sld>
 </file>
 
-<file path=ppt/slides/slide35.xml><?xml version="1.0" encoding="utf-8"?>
+<file path=ppt/slides/slide39.xml><?xml version="1.0" encoding="utf-8"?>
 <p:sld xmlns:a="http://schemas.openxmlformats.org/drawingml/2006/main" xmlns:r="http://schemas.openxmlformats.org/officeDocument/2006/relationships" xmlns:p="http://schemas.openxmlformats.org/presentationml/2006/main" showMasterSp="0">
   <p:cSld>
     <p:spTree>
@@ -20886,7 +22946,7 @@
             </a:pPr>
             <a:fld id="{81D60167-4931-47E6-BA6A-407CBD079E47}" type="slidenum">
               <a:rPr spc="-25" dirty="0"/>
-              <a:t>35</a:t>
+              <a:t>39</a:t>
             </a:fld>
             <a:endParaRPr spc="-25" dirty="0"/>
           </a:p>
@@ -21061,7 +23121,420 @@
 </p:sld>
 </file>
 
-<file path=ppt/slides/slide36.xml><?xml version="1.0" encoding="utf-8"?>
+<file path=ppt/slides/slide4.xml><?xml version="1.0" encoding="utf-8"?>
+<p:sld xmlns:a="http://schemas.openxmlformats.org/drawingml/2006/main" xmlns:r="http://schemas.openxmlformats.org/officeDocument/2006/relationships" xmlns:p="http://schemas.openxmlformats.org/presentationml/2006/main" showMasterSp="0">
+  <p:cSld>
+    <p:spTree>
+      <p:nvGrpSpPr>
+        <p:cNvPr id="1" name=""/>
+        <p:cNvGrpSpPr/>
+        <p:nvPr/>
+      </p:nvGrpSpPr>
+      <p:grpSpPr>
+        <a:xfrm>
+          <a:off x="0" y="0"/>
+          <a:ext cx="0" cy="0"/>
+          <a:chOff x="0" y="0"/>
+          <a:chExt cx="0" cy="0"/>
+        </a:xfrm>
+      </p:grpSpPr>
+      <p:sp>
+        <p:nvSpPr>
+          <p:cNvPr id="4" name="object 4"/>
+          <p:cNvSpPr txBox="1">
+            <a:spLocks noGrp="1"/>
+          </p:cNvSpPr>
+          <p:nvPr>
+            <p:ph type="dt" sz="half" idx="6"/>
+          </p:nvPr>
+        </p:nvSpPr>
+        <p:spPr>
+          <a:prstGeom prst="rect">
+            <a:avLst/>
+          </a:prstGeom>
+        </p:spPr>
+        <p:txBody>
+          <a:bodyPr vert="horz" wrap="square" lIns="0" tIns="6350" rIns="0" bIns="0" rtlCol="0">
+            <a:spAutoFit/>
+          </a:bodyPr>
+          <a:lstStyle/>
+          <a:p>
+            <a:pPr marL="12700">
+              <a:lnSpc>
+                <a:spcPct val="100000"/>
+              </a:lnSpc>
+              <a:spcBef>
+                <a:spcPts val="50"/>
+              </a:spcBef>
+            </a:pPr>
+            <a:r>
+              <a:rPr dirty="0"/>
+              <a:t>Thiết</a:t>
+            </a:r>
+            <a:r>
+              <a:rPr spc="-20" dirty="0"/>
+              <a:t> </a:t>
+            </a:r>
+            <a:r>
+              <a:rPr dirty="0"/>
+              <a:t>Kế</a:t>
+            </a:r>
+            <a:r>
+              <a:rPr spc="-40" dirty="0"/>
+              <a:t> </a:t>
+            </a:r>
+            <a:r>
+              <a:rPr dirty="0"/>
+              <a:t>Vi</a:t>
+            </a:r>
+            <a:r>
+              <a:rPr spc="10" dirty="0"/>
+              <a:t> </a:t>
+            </a:r>
+            <a:r>
+              <a:rPr spc="-20" dirty="0"/>
+              <a:t>Mạch</a:t>
+            </a:r>
+          </a:p>
+        </p:txBody>
+      </p:sp>
+      <p:sp>
+        <p:nvSpPr>
+          <p:cNvPr id="5" name="object 5"/>
+          <p:cNvSpPr txBox="1">
+            <a:spLocks noGrp="1"/>
+          </p:cNvSpPr>
+          <p:nvPr>
+            <p:ph type="sldNum" sz="quarter" idx="7"/>
+          </p:nvPr>
+        </p:nvSpPr>
+        <p:spPr>
+          <a:prstGeom prst="rect">
+            <a:avLst/>
+          </a:prstGeom>
+        </p:spPr>
+        <p:txBody>
+          <a:bodyPr vert="horz" wrap="square" lIns="0" tIns="6350" rIns="0" bIns="0" rtlCol="0">
+            <a:spAutoFit/>
+          </a:bodyPr>
+          <a:lstStyle/>
+          <a:p>
+            <a:pPr marL="38100">
+              <a:lnSpc>
+                <a:spcPct val="100000"/>
+              </a:lnSpc>
+              <a:spcBef>
+                <a:spcPts val="50"/>
+              </a:spcBef>
+            </a:pPr>
+            <a:fld id="{81D60167-4931-47E6-BA6A-407CBD079E47}" type="slidenum">
+              <a:rPr spc="-25" dirty="0"/>
+              <a:t>4</a:t>
+            </a:fld>
+            <a:endParaRPr spc="-25" dirty="0"/>
+          </a:p>
+        </p:txBody>
+      </p:sp>
+      <p:sp>
+        <p:nvSpPr>
+          <p:cNvPr id="6" name="object 6"/>
+          <p:cNvSpPr txBox="1">
+            <a:spLocks noGrp="1"/>
+          </p:cNvSpPr>
+          <p:nvPr>
+            <p:ph type="ftr" sz="quarter" idx="5"/>
+          </p:nvPr>
+        </p:nvSpPr>
+        <p:spPr>
+          <a:prstGeom prst="rect">
+            <a:avLst/>
+          </a:prstGeom>
+        </p:spPr>
+        <p:txBody>
+          <a:bodyPr vert="horz" wrap="square" lIns="0" tIns="5715" rIns="0" bIns="0" rtlCol="0">
+            <a:spAutoFit/>
+          </a:bodyPr>
+          <a:lstStyle/>
+          <a:p>
+            <a:pPr marL="12700">
+              <a:lnSpc>
+                <a:spcPct val="100000"/>
+              </a:lnSpc>
+              <a:spcBef>
+                <a:spcPts val="45"/>
+              </a:spcBef>
+            </a:pPr>
+            <a:r>
+              <a:rPr dirty="0"/>
+              <a:t>©</a:t>
+            </a:r>
+            <a:r>
+              <a:rPr spc="-45" dirty="0"/>
+              <a:t> </a:t>
+            </a:r>
+            <a:r>
+              <a:rPr dirty="0"/>
+              <a:t>2025</a:t>
+            </a:r>
+            <a:r>
+              <a:rPr spc="-15" dirty="0"/>
+              <a:t> </a:t>
+            </a:r>
+            <a:r>
+              <a:rPr dirty="0"/>
+              <a:t>–</a:t>
+            </a:r>
+            <a:r>
+              <a:rPr spc="-20" dirty="0"/>
+              <a:t> </a:t>
+            </a:r>
+            <a:r>
+              <a:rPr dirty="0"/>
+              <a:t>Long</a:t>
+            </a:r>
+            <a:r>
+              <a:rPr spc="-10" dirty="0"/>
+              <a:t> Hoang</a:t>
+            </a:r>
+          </a:p>
+        </p:txBody>
+      </p:sp>
+      <p:sp>
+        <p:nvSpPr>
+          <p:cNvPr id="2" name="object 2"/>
+          <p:cNvSpPr txBox="1">
+            <a:spLocks noGrp="1"/>
+          </p:cNvSpPr>
+          <p:nvPr>
+            <p:ph type="title"/>
+          </p:nvPr>
+        </p:nvSpPr>
+        <p:spPr>
+          <a:xfrm>
+            <a:off x="508317" y="480313"/>
+            <a:ext cx="3589654" cy="575310"/>
+          </a:xfrm>
+          <a:prstGeom prst="rect">
+            <a:avLst/>
+          </a:prstGeom>
+        </p:spPr>
+        <p:txBody>
+          <a:bodyPr vert="horz" wrap="square" lIns="0" tIns="13335" rIns="0" bIns="0" rtlCol="0">
+            <a:spAutoFit/>
+          </a:bodyPr>
+          <a:lstStyle/>
+          <a:p>
+            <a:pPr marL="12700">
+              <a:lnSpc>
+                <a:spcPct val="100000"/>
+              </a:lnSpc>
+              <a:spcBef>
+                <a:spcPts val="105"/>
+              </a:spcBef>
+            </a:pPr>
+            <a:r>
+              <a:rPr dirty="0"/>
+              <a:t>1.</a:t>
+            </a:r>
+            <a:r>
+              <a:rPr spc="-105" dirty="0"/>
+              <a:t> </a:t>
+            </a:r>
+            <a:r>
+              <a:rPr spc="-20" dirty="0"/>
+              <a:t>Specifications</a:t>
+            </a:r>
+          </a:p>
+        </p:txBody>
+      </p:sp>
+      <p:sp>
+        <p:nvSpPr>
+          <p:cNvPr id="7" name="object 3">
+            <a:extLst>
+              <a:ext uri="{FF2B5EF4-FFF2-40B4-BE49-F238E27FC236}">
+                <a16:creationId xmlns:a16="http://schemas.microsoft.com/office/drawing/2014/main" id="{CA90AF8F-A1B1-B0EF-BD90-25C3457FA1F5}"/>
+              </a:ext>
+            </a:extLst>
+          </p:cNvPr>
+          <p:cNvSpPr txBox="1"/>
+          <p:nvPr/>
+        </p:nvSpPr>
+        <p:spPr>
+          <a:xfrm>
+            <a:off x="457200" y="1121155"/>
+            <a:ext cx="8026083" cy="475130"/>
+          </a:xfrm>
+          <a:prstGeom prst="rect">
+            <a:avLst/>
+          </a:prstGeom>
+        </p:spPr>
+        <p:txBody>
+          <a:bodyPr vert="horz" wrap="square" lIns="0" tIns="13335" rIns="0" bIns="0" rtlCol="0">
+            <a:spAutoFit/>
+          </a:bodyPr>
+          <a:lstStyle/>
+          <a:p>
+            <a:pPr marL="12700">
+              <a:lnSpc>
+                <a:spcPct val="100000"/>
+              </a:lnSpc>
+              <a:spcBef>
+                <a:spcPts val="105"/>
+              </a:spcBef>
+            </a:pPr>
+            <a:r>
+              <a:rPr lang="en-US" sz="3000" b="1">
+                <a:solidFill>
+                  <a:srgbClr val="7C45AD"/>
+                </a:solidFill>
+                <a:latin typeface="Arial"/>
+                <a:cs typeface="Arial"/>
+              </a:rPr>
+              <a:t>1</a:t>
+            </a:r>
+            <a:r>
+              <a:rPr sz="3000" b="1">
+                <a:solidFill>
+                  <a:srgbClr val="7C45AD"/>
+                </a:solidFill>
+                <a:latin typeface="Arial"/>
+                <a:cs typeface="Arial"/>
+              </a:rPr>
+              <a:t>.1</a:t>
+            </a:r>
+            <a:r>
+              <a:rPr lang="en-US" sz="3000" b="1">
+                <a:solidFill>
+                  <a:srgbClr val="7C45AD"/>
+                </a:solidFill>
+                <a:latin typeface="Arial"/>
+                <a:cs typeface="Arial"/>
+              </a:rPr>
+              <a:t> Overview of the AMBA specification</a:t>
+            </a:r>
+          </a:p>
+        </p:txBody>
+      </p:sp>
+      <p:sp>
+        <p:nvSpPr>
+          <p:cNvPr id="9" name="TextBox 8">
+            <a:extLst>
+              <a:ext uri="{FF2B5EF4-FFF2-40B4-BE49-F238E27FC236}">
+                <a16:creationId xmlns:a16="http://schemas.microsoft.com/office/drawing/2014/main" id="{370CF898-9432-7BB6-6633-F407E9A3D23A}"/>
+              </a:ext>
+            </a:extLst>
+          </p:cNvPr>
+          <p:cNvSpPr txBox="1"/>
+          <p:nvPr/>
+        </p:nvSpPr>
+        <p:spPr>
+          <a:xfrm>
+            <a:off x="508316" y="1905000"/>
+            <a:ext cx="11033443" cy="646331"/>
+          </a:xfrm>
+          <a:prstGeom prst="rect">
+            <a:avLst/>
+          </a:prstGeom>
+          <a:noFill/>
+        </p:spPr>
+        <p:txBody>
+          <a:bodyPr wrap="square">
+            <a:spAutoFit/>
+          </a:bodyPr>
+          <a:lstStyle/>
+          <a:p>
+            <a:pPr algn="just"/>
+            <a:r>
+              <a:rPr lang="en-US"/>
+              <a:t>The Advanced Microcontroller Bus Architecture (AMBA) specification defines an on-chip communications standard for designing high-performance embedded microcontrollers. </a:t>
+            </a:r>
+          </a:p>
+        </p:txBody>
+      </p:sp>
+      <p:sp>
+        <p:nvSpPr>
+          <p:cNvPr id="11" name="TextBox 10">
+            <a:extLst>
+              <a:ext uri="{FF2B5EF4-FFF2-40B4-BE49-F238E27FC236}">
+                <a16:creationId xmlns:a16="http://schemas.microsoft.com/office/drawing/2014/main" id="{AE1AFCB2-CB93-363F-C556-64F9790378B6}"/>
+              </a:ext>
+            </a:extLst>
+          </p:cNvPr>
+          <p:cNvSpPr txBox="1"/>
+          <p:nvPr/>
+        </p:nvSpPr>
+        <p:spPr>
+          <a:xfrm>
+            <a:off x="508315" y="2860046"/>
+            <a:ext cx="11033443" cy="1477328"/>
+          </a:xfrm>
+          <a:prstGeom prst="rect">
+            <a:avLst/>
+          </a:prstGeom>
+          <a:noFill/>
+        </p:spPr>
+        <p:txBody>
+          <a:bodyPr wrap="square">
+            <a:spAutoFit/>
+          </a:bodyPr>
+          <a:lstStyle/>
+          <a:p>
+            <a:r>
+              <a:rPr lang="en-US"/>
+              <a:t>Four distinct buses are defined within the AMBA specification: </a:t>
+            </a:r>
+          </a:p>
+          <a:p>
+            <a:pPr marL="285750" indent="-285750">
+              <a:buFont typeface="Arial" panose="020B0604020202020204" pitchFamily="34" charset="0"/>
+              <a:buChar char="•"/>
+            </a:pPr>
+            <a:r>
+              <a:rPr lang="en-US"/>
+              <a:t>The Advanced High-performance Bus (AHB) </a:t>
+            </a:r>
+          </a:p>
+          <a:p>
+            <a:pPr marL="285750" indent="-285750">
+              <a:buFont typeface="Arial" panose="020B0604020202020204" pitchFamily="34" charset="0"/>
+              <a:buChar char="•"/>
+            </a:pPr>
+            <a:r>
+              <a:rPr lang="en-US"/>
+              <a:t>The Advanced System Bus (ASB) </a:t>
+            </a:r>
+          </a:p>
+          <a:p>
+            <a:pPr marL="285750" indent="-285750">
+              <a:buFont typeface="Arial" panose="020B0604020202020204" pitchFamily="34" charset="0"/>
+              <a:buChar char="•"/>
+            </a:pPr>
+            <a:r>
+              <a:rPr lang="en-US"/>
+              <a:t>The Advanced Peripheral Bus (APB).</a:t>
+            </a:r>
+          </a:p>
+          <a:p>
+            <a:pPr marL="285750" indent="-285750">
+              <a:buFont typeface="Arial" panose="020B0604020202020204" pitchFamily="34" charset="0"/>
+              <a:buChar char="•"/>
+            </a:pPr>
+            <a:r>
+              <a:rPr lang="en-US"/>
+              <a:t>The Advanced eXtensible Interface (AXI)</a:t>
+            </a:r>
+          </a:p>
+        </p:txBody>
+      </p:sp>
+    </p:spTree>
+  </p:cSld>
+  <p:clrMapOvr>
+    <a:masterClrMapping/>
+  </p:clrMapOvr>
+</p:sld>
+</file>
+
+<file path=ppt/slides/slide40.xml><?xml version="1.0" encoding="utf-8"?>
 <p:sld xmlns:a="http://schemas.openxmlformats.org/drawingml/2006/main" xmlns:r="http://schemas.openxmlformats.org/officeDocument/2006/relationships" xmlns:p="http://schemas.openxmlformats.org/presentationml/2006/main" showMasterSp="0">
   <p:cSld>
     <p:spTree>
@@ -21319,7 +23792,7 @@
             </a:pPr>
             <a:fld id="{81D60167-4931-47E6-BA6A-407CBD079E47}" type="slidenum">
               <a:rPr spc="-25" dirty="0"/>
-              <a:t>36</a:t>
+              <a:t>40</a:t>
             </a:fld>
             <a:endParaRPr spc="-25" dirty="0"/>
           </a:p>
@@ -21494,7 +23967,7 @@
 </p:sld>
 </file>
 
-<file path=ppt/slides/slide37.xml><?xml version="1.0" encoding="utf-8"?>
+<file path=ppt/slides/slide41.xml><?xml version="1.0" encoding="utf-8"?>
 <p:sld xmlns:a="http://schemas.openxmlformats.org/drawingml/2006/main" xmlns:r="http://schemas.openxmlformats.org/officeDocument/2006/relationships" xmlns:p="http://schemas.openxmlformats.org/presentationml/2006/main">
   <p:cSld>
     <p:spTree>
@@ -21658,7 +24131,7 @@
             </a:pPr>
             <a:fld id="{81D60167-4931-47E6-BA6A-407CBD079E47}" type="slidenum">
               <a:rPr spc="-25" dirty="0"/>
-              <a:t>37</a:t>
+              <a:t>41</a:t>
             </a:fld>
             <a:endParaRPr spc="-25" dirty="0"/>
           </a:p>
@@ -21736,7 +24209,7 @@
 </p:sld>
 </file>
 
-<file path=ppt/slides/slide38.xml><?xml version="1.0" encoding="utf-8"?>
+<file path=ppt/slides/slide42.xml><?xml version="1.0" encoding="utf-8"?>
 <p:sld xmlns:a="http://schemas.openxmlformats.org/drawingml/2006/main" xmlns:r="http://schemas.openxmlformats.org/officeDocument/2006/relationships" xmlns:p="http://schemas.openxmlformats.org/presentationml/2006/main" showMasterSp="0">
   <p:cSld>
     <p:spTree>
@@ -21901,7 +24374,7 @@
             </a:pPr>
             <a:fld id="{81D60167-4931-47E6-BA6A-407CBD079E47}" type="slidenum">
               <a:rPr spc="-25" dirty="0"/>
-              <a:t>38</a:t>
+              <a:t>42</a:t>
             </a:fld>
             <a:endParaRPr spc="-25" dirty="0"/>
           </a:p>
@@ -22238,7 +24711,7 @@
 </p:sld>
 </file>
 
-<file path=ppt/slides/slide39.xml><?xml version="1.0" encoding="utf-8"?>
+<file path=ppt/slides/slide43.xml><?xml version="1.0" encoding="utf-8"?>
 <p:sld xmlns:a="http://schemas.openxmlformats.org/drawingml/2006/main" xmlns:r="http://schemas.openxmlformats.org/officeDocument/2006/relationships" xmlns:p="http://schemas.openxmlformats.org/presentationml/2006/main" showMasterSp="0">
   <p:cSld>
     <p:spTree>
@@ -22427,7 +24900,7 @@
             </a:pPr>
             <a:fld id="{81D60167-4931-47E6-BA6A-407CBD079E47}" type="slidenum">
               <a:rPr spc="-25" dirty="0"/>
-              <a:t>39</a:t>
+              <a:t>43</a:t>
             </a:fld>
             <a:endParaRPr spc="-25" dirty="0"/>
           </a:p>
@@ -23491,420 +25964,7 @@
 </p:sld>
 </file>
 
-<file path=ppt/slides/slide4.xml><?xml version="1.0" encoding="utf-8"?>
-<p:sld xmlns:a="http://schemas.openxmlformats.org/drawingml/2006/main" xmlns:r="http://schemas.openxmlformats.org/officeDocument/2006/relationships" xmlns:p="http://schemas.openxmlformats.org/presentationml/2006/main" showMasterSp="0">
-  <p:cSld>
-    <p:spTree>
-      <p:nvGrpSpPr>
-        <p:cNvPr id="1" name=""/>
-        <p:cNvGrpSpPr/>
-        <p:nvPr/>
-      </p:nvGrpSpPr>
-      <p:grpSpPr>
-        <a:xfrm>
-          <a:off x="0" y="0"/>
-          <a:ext cx="0" cy="0"/>
-          <a:chOff x="0" y="0"/>
-          <a:chExt cx="0" cy="0"/>
-        </a:xfrm>
-      </p:grpSpPr>
-      <p:sp>
-        <p:nvSpPr>
-          <p:cNvPr id="4" name="object 4"/>
-          <p:cNvSpPr txBox="1">
-            <a:spLocks noGrp="1"/>
-          </p:cNvSpPr>
-          <p:nvPr>
-            <p:ph type="dt" sz="half" idx="6"/>
-          </p:nvPr>
-        </p:nvSpPr>
-        <p:spPr>
-          <a:prstGeom prst="rect">
-            <a:avLst/>
-          </a:prstGeom>
-        </p:spPr>
-        <p:txBody>
-          <a:bodyPr vert="horz" wrap="square" lIns="0" tIns="6350" rIns="0" bIns="0" rtlCol="0">
-            <a:spAutoFit/>
-          </a:bodyPr>
-          <a:lstStyle/>
-          <a:p>
-            <a:pPr marL="12700">
-              <a:lnSpc>
-                <a:spcPct val="100000"/>
-              </a:lnSpc>
-              <a:spcBef>
-                <a:spcPts val="50"/>
-              </a:spcBef>
-            </a:pPr>
-            <a:r>
-              <a:rPr dirty="0"/>
-              <a:t>Thiết</a:t>
-            </a:r>
-            <a:r>
-              <a:rPr spc="-20" dirty="0"/>
-              <a:t> </a:t>
-            </a:r>
-            <a:r>
-              <a:rPr dirty="0"/>
-              <a:t>Kế</a:t>
-            </a:r>
-            <a:r>
-              <a:rPr spc="-40" dirty="0"/>
-              <a:t> </a:t>
-            </a:r>
-            <a:r>
-              <a:rPr dirty="0"/>
-              <a:t>Vi</a:t>
-            </a:r>
-            <a:r>
-              <a:rPr spc="10" dirty="0"/>
-              <a:t> </a:t>
-            </a:r>
-            <a:r>
-              <a:rPr spc="-20" dirty="0"/>
-              <a:t>Mạch</a:t>
-            </a:r>
-          </a:p>
-        </p:txBody>
-      </p:sp>
-      <p:sp>
-        <p:nvSpPr>
-          <p:cNvPr id="5" name="object 5"/>
-          <p:cNvSpPr txBox="1">
-            <a:spLocks noGrp="1"/>
-          </p:cNvSpPr>
-          <p:nvPr>
-            <p:ph type="sldNum" sz="quarter" idx="7"/>
-          </p:nvPr>
-        </p:nvSpPr>
-        <p:spPr>
-          <a:prstGeom prst="rect">
-            <a:avLst/>
-          </a:prstGeom>
-        </p:spPr>
-        <p:txBody>
-          <a:bodyPr vert="horz" wrap="square" lIns="0" tIns="6350" rIns="0" bIns="0" rtlCol="0">
-            <a:spAutoFit/>
-          </a:bodyPr>
-          <a:lstStyle/>
-          <a:p>
-            <a:pPr marL="38100">
-              <a:lnSpc>
-                <a:spcPct val="100000"/>
-              </a:lnSpc>
-              <a:spcBef>
-                <a:spcPts val="50"/>
-              </a:spcBef>
-            </a:pPr>
-            <a:fld id="{81D60167-4931-47E6-BA6A-407CBD079E47}" type="slidenum">
-              <a:rPr spc="-25" dirty="0"/>
-              <a:t>4</a:t>
-            </a:fld>
-            <a:endParaRPr spc="-25" dirty="0"/>
-          </a:p>
-        </p:txBody>
-      </p:sp>
-      <p:sp>
-        <p:nvSpPr>
-          <p:cNvPr id="6" name="object 6"/>
-          <p:cNvSpPr txBox="1">
-            <a:spLocks noGrp="1"/>
-          </p:cNvSpPr>
-          <p:nvPr>
-            <p:ph type="ftr" sz="quarter" idx="5"/>
-          </p:nvPr>
-        </p:nvSpPr>
-        <p:spPr>
-          <a:prstGeom prst="rect">
-            <a:avLst/>
-          </a:prstGeom>
-        </p:spPr>
-        <p:txBody>
-          <a:bodyPr vert="horz" wrap="square" lIns="0" tIns="5715" rIns="0" bIns="0" rtlCol="0">
-            <a:spAutoFit/>
-          </a:bodyPr>
-          <a:lstStyle/>
-          <a:p>
-            <a:pPr marL="12700">
-              <a:lnSpc>
-                <a:spcPct val="100000"/>
-              </a:lnSpc>
-              <a:spcBef>
-                <a:spcPts val="45"/>
-              </a:spcBef>
-            </a:pPr>
-            <a:r>
-              <a:rPr dirty="0"/>
-              <a:t>©</a:t>
-            </a:r>
-            <a:r>
-              <a:rPr spc="-45" dirty="0"/>
-              <a:t> </a:t>
-            </a:r>
-            <a:r>
-              <a:rPr dirty="0"/>
-              <a:t>2025</a:t>
-            </a:r>
-            <a:r>
-              <a:rPr spc="-15" dirty="0"/>
-              <a:t> </a:t>
-            </a:r>
-            <a:r>
-              <a:rPr dirty="0"/>
-              <a:t>–</a:t>
-            </a:r>
-            <a:r>
-              <a:rPr spc="-20" dirty="0"/>
-              <a:t> </a:t>
-            </a:r>
-            <a:r>
-              <a:rPr dirty="0"/>
-              <a:t>Long</a:t>
-            </a:r>
-            <a:r>
-              <a:rPr spc="-10" dirty="0"/>
-              <a:t> Hoang</a:t>
-            </a:r>
-          </a:p>
-        </p:txBody>
-      </p:sp>
-      <p:sp>
-        <p:nvSpPr>
-          <p:cNvPr id="2" name="object 2"/>
-          <p:cNvSpPr txBox="1">
-            <a:spLocks noGrp="1"/>
-          </p:cNvSpPr>
-          <p:nvPr>
-            <p:ph type="title"/>
-          </p:nvPr>
-        </p:nvSpPr>
-        <p:spPr>
-          <a:xfrm>
-            <a:off x="508317" y="480313"/>
-            <a:ext cx="3589654" cy="575310"/>
-          </a:xfrm>
-          <a:prstGeom prst="rect">
-            <a:avLst/>
-          </a:prstGeom>
-        </p:spPr>
-        <p:txBody>
-          <a:bodyPr vert="horz" wrap="square" lIns="0" tIns="13335" rIns="0" bIns="0" rtlCol="0">
-            <a:spAutoFit/>
-          </a:bodyPr>
-          <a:lstStyle/>
-          <a:p>
-            <a:pPr marL="12700">
-              <a:lnSpc>
-                <a:spcPct val="100000"/>
-              </a:lnSpc>
-              <a:spcBef>
-                <a:spcPts val="105"/>
-              </a:spcBef>
-            </a:pPr>
-            <a:r>
-              <a:rPr dirty="0"/>
-              <a:t>1.</a:t>
-            </a:r>
-            <a:r>
-              <a:rPr spc="-105" dirty="0"/>
-              <a:t> </a:t>
-            </a:r>
-            <a:r>
-              <a:rPr spc="-20" dirty="0"/>
-              <a:t>Specifications</a:t>
-            </a:r>
-          </a:p>
-        </p:txBody>
-      </p:sp>
-      <p:sp>
-        <p:nvSpPr>
-          <p:cNvPr id="7" name="object 3">
-            <a:extLst>
-              <a:ext uri="{FF2B5EF4-FFF2-40B4-BE49-F238E27FC236}">
-                <a16:creationId xmlns:a16="http://schemas.microsoft.com/office/drawing/2014/main" id="{CA90AF8F-A1B1-B0EF-BD90-25C3457FA1F5}"/>
-              </a:ext>
-            </a:extLst>
-          </p:cNvPr>
-          <p:cNvSpPr txBox="1"/>
-          <p:nvPr/>
-        </p:nvSpPr>
-        <p:spPr>
-          <a:xfrm>
-            <a:off x="457200" y="1121155"/>
-            <a:ext cx="8026083" cy="475130"/>
-          </a:xfrm>
-          <a:prstGeom prst="rect">
-            <a:avLst/>
-          </a:prstGeom>
-        </p:spPr>
-        <p:txBody>
-          <a:bodyPr vert="horz" wrap="square" lIns="0" tIns="13335" rIns="0" bIns="0" rtlCol="0">
-            <a:spAutoFit/>
-          </a:bodyPr>
-          <a:lstStyle/>
-          <a:p>
-            <a:pPr marL="12700">
-              <a:lnSpc>
-                <a:spcPct val="100000"/>
-              </a:lnSpc>
-              <a:spcBef>
-                <a:spcPts val="105"/>
-              </a:spcBef>
-            </a:pPr>
-            <a:r>
-              <a:rPr lang="en-US" sz="3000" b="1">
-                <a:solidFill>
-                  <a:srgbClr val="7C45AD"/>
-                </a:solidFill>
-                <a:latin typeface="Arial"/>
-                <a:cs typeface="Arial"/>
-              </a:rPr>
-              <a:t>1</a:t>
-            </a:r>
-            <a:r>
-              <a:rPr sz="3000" b="1">
-                <a:solidFill>
-                  <a:srgbClr val="7C45AD"/>
-                </a:solidFill>
-                <a:latin typeface="Arial"/>
-                <a:cs typeface="Arial"/>
-              </a:rPr>
-              <a:t>.1</a:t>
-            </a:r>
-            <a:r>
-              <a:rPr lang="en-US" sz="3000" b="1">
-                <a:solidFill>
-                  <a:srgbClr val="7C45AD"/>
-                </a:solidFill>
-                <a:latin typeface="Arial"/>
-                <a:cs typeface="Arial"/>
-              </a:rPr>
-              <a:t> Overview of the AMBA specification</a:t>
-            </a:r>
-          </a:p>
-        </p:txBody>
-      </p:sp>
-      <p:sp>
-        <p:nvSpPr>
-          <p:cNvPr id="9" name="TextBox 8">
-            <a:extLst>
-              <a:ext uri="{FF2B5EF4-FFF2-40B4-BE49-F238E27FC236}">
-                <a16:creationId xmlns:a16="http://schemas.microsoft.com/office/drawing/2014/main" id="{370CF898-9432-7BB6-6633-F407E9A3D23A}"/>
-              </a:ext>
-            </a:extLst>
-          </p:cNvPr>
-          <p:cNvSpPr txBox="1"/>
-          <p:nvPr/>
-        </p:nvSpPr>
-        <p:spPr>
-          <a:xfrm>
-            <a:off x="508316" y="1905000"/>
-            <a:ext cx="11033443" cy="646331"/>
-          </a:xfrm>
-          <a:prstGeom prst="rect">
-            <a:avLst/>
-          </a:prstGeom>
-          <a:noFill/>
-        </p:spPr>
-        <p:txBody>
-          <a:bodyPr wrap="square">
-            <a:spAutoFit/>
-          </a:bodyPr>
-          <a:lstStyle/>
-          <a:p>
-            <a:pPr algn="just"/>
-            <a:r>
-              <a:rPr lang="en-US"/>
-              <a:t>The Advanced Microcontroller Bus Architecture (AMBA) specification defines an on-chip communications standard for designing high-performance embedded microcontrollers. </a:t>
-            </a:r>
-          </a:p>
-        </p:txBody>
-      </p:sp>
-      <p:sp>
-        <p:nvSpPr>
-          <p:cNvPr id="11" name="TextBox 10">
-            <a:extLst>
-              <a:ext uri="{FF2B5EF4-FFF2-40B4-BE49-F238E27FC236}">
-                <a16:creationId xmlns:a16="http://schemas.microsoft.com/office/drawing/2014/main" id="{AE1AFCB2-CB93-363F-C556-64F9790378B6}"/>
-              </a:ext>
-            </a:extLst>
-          </p:cNvPr>
-          <p:cNvSpPr txBox="1"/>
-          <p:nvPr/>
-        </p:nvSpPr>
-        <p:spPr>
-          <a:xfrm>
-            <a:off x="508315" y="2860046"/>
-            <a:ext cx="11033443" cy="1477328"/>
-          </a:xfrm>
-          <a:prstGeom prst="rect">
-            <a:avLst/>
-          </a:prstGeom>
-          <a:noFill/>
-        </p:spPr>
-        <p:txBody>
-          <a:bodyPr wrap="square">
-            <a:spAutoFit/>
-          </a:bodyPr>
-          <a:lstStyle/>
-          <a:p>
-            <a:r>
-              <a:rPr lang="en-US"/>
-              <a:t>Four distinct buses are defined within the AMBA specification: </a:t>
-            </a:r>
-          </a:p>
-          <a:p>
-            <a:pPr marL="285750" indent="-285750">
-              <a:buFont typeface="Arial" panose="020B0604020202020204" pitchFamily="34" charset="0"/>
-              <a:buChar char="•"/>
-            </a:pPr>
-            <a:r>
-              <a:rPr lang="en-US"/>
-              <a:t>The Advanced High-performance Bus (AHB) </a:t>
-            </a:r>
-          </a:p>
-          <a:p>
-            <a:pPr marL="285750" indent="-285750">
-              <a:buFont typeface="Arial" panose="020B0604020202020204" pitchFamily="34" charset="0"/>
-              <a:buChar char="•"/>
-            </a:pPr>
-            <a:r>
-              <a:rPr lang="en-US"/>
-              <a:t>The Advanced System Bus (ASB) </a:t>
-            </a:r>
-          </a:p>
-          <a:p>
-            <a:pPr marL="285750" indent="-285750">
-              <a:buFont typeface="Arial" panose="020B0604020202020204" pitchFamily="34" charset="0"/>
-              <a:buChar char="•"/>
-            </a:pPr>
-            <a:r>
-              <a:rPr lang="en-US"/>
-              <a:t>The Advanced Peripheral Bus (APB).</a:t>
-            </a:r>
-          </a:p>
-          <a:p>
-            <a:pPr marL="285750" indent="-285750">
-              <a:buFont typeface="Arial" panose="020B0604020202020204" pitchFamily="34" charset="0"/>
-              <a:buChar char="•"/>
-            </a:pPr>
-            <a:r>
-              <a:rPr lang="en-US"/>
-              <a:t>The Advanced eXtensible Interface (AXI)</a:t>
-            </a:r>
-          </a:p>
-        </p:txBody>
-      </p:sp>
-    </p:spTree>
-  </p:cSld>
-  <p:clrMapOvr>
-    <a:masterClrMapping/>
-  </p:clrMapOvr>
-</p:sld>
-</file>
-
-<file path=ppt/slides/slide40.xml><?xml version="1.0" encoding="utf-8"?>
+<file path=ppt/slides/slide44.xml><?xml version="1.0" encoding="utf-8"?>
 <p:sld xmlns:a="http://schemas.openxmlformats.org/drawingml/2006/main" xmlns:r="http://schemas.openxmlformats.org/officeDocument/2006/relationships" xmlns:p="http://schemas.openxmlformats.org/presentationml/2006/main" showMasterSp="0">
   <p:cSld>
     <p:spTree>
@@ -24093,7 +26153,7 @@
             </a:pPr>
             <a:fld id="{81D60167-4931-47E6-BA6A-407CBD079E47}" type="slidenum">
               <a:rPr spc="-25" dirty="0"/>
-              <a:t>40</a:t>
+              <a:t>44</a:t>
             </a:fld>
             <a:endParaRPr spc="-25" dirty="0"/>
           </a:p>
@@ -24693,7 +26753,7 @@
 </p:sld>
 </file>
 
-<file path=ppt/slides/slide41.xml><?xml version="1.0" encoding="utf-8"?>
+<file path=ppt/slides/slide45.xml><?xml version="1.0" encoding="utf-8"?>
 <p:sld xmlns:a="http://schemas.openxmlformats.org/drawingml/2006/main" xmlns:r="http://schemas.openxmlformats.org/officeDocument/2006/relationships" xmlns:p="http://schemas.openxmlformats.org/presentationml/2006/main" showMasterSp="0">
   <p:cSld>
     <p:spTree>
@@ -24882,7 +26942,7 @@
             </a:pPr>
             <a:fld id="{81D60167-4931-47E6-BA6A-407CBD079E47}" type="slidenum">
               <a:rPr spc="-25" dirty="0"/>
-              <a:t>41</a:t>
+              <a:t>45</a:t>
             </a:fld>
             <a:endParaRPr spc="-25" dirty="0"/>
           </a:p>
@@ -25012,36 +27072,6 @@
       </p:sp>
       <p:pic>
         <p:nvPicPr>
-          <p:cNvPr id="5" name="Picture 4">
-            <a:extLst>
-              <a:ext uri="{FF2B5EF4-FFF2-40B4-BE49-F238E27FC236}">
-                <a16:creationId xmlns:a16="http://schemas.microsoft.com/office/drawing/2014/main" id="{E1D87966-108E-D2D9-C9F4-7D85CC38DF98}"/>
-              </a:ext>
-            </a:extLst>
-          </p:cNvPr>
-          <p:cNvPicPr>
-            <a:picLocks noChangeAspect="1"/>
-          </p:cNvPicPr>
-          <p:nvPr/>
-        </p:nvPicPr>
-        <p:blipFill>
-          <a:blip r:embed="rId2"/>
-          <a:stretch>
-            <a:fillRect/>
-          </a:stretch>
-        </p:blipFill>
-        <p:spPr>
-          <a:xfrm>
-            <a:off x="6522810" y="3221756"/>
-            <a:ext cx="4644680" cy="3141007"/>
-          </a:xfrm>
-          <a:prstGeom prst="rect">
-            <a:avLst/>
-          </a:prstGeom>
-        </p:spPr>
-      </p:pic>
-      <p:pic>
-        <p:nvPicPr>
           <p:cNvPr id="6" name="Picture 5">
             <a:extLst>
               <a:ext uri="{FF2B5EF4-FFF2-40B4-BE49-F238E27FC236}">
@@ -25055,7 +27085,7 @@
           <p:nvPr/>
         </p:nvPicPr>
         <p:blipFill>
-          <a:blip r:embed="rId3"/>
+          <a:blip r:embed="rId2"/>
           <a:stretch>
             <a:fillRect/>
           </a:stretch>
@@ -25085,7 +27115,7 @@
           <p:nvPr/>
         </p:nvPicPr>
         <p:blipFill>
-          <a:blip r:embed="rId4"/>
+          <a:blip r:embed="rId3"/>
           <a:stretch>
             <a:fillRect/>
           </a:stretch>
@@ -25115,6 +27145,36 @@
           <p:nvPr/>
         </p:nvPicPr>
         <p:blipFill>
+          <a:blip r:embed="rId4"/>
+          <a:stretch>
+            <a:fillRect/>
+          </a:stretch>
+        </p:blipFill>
+        <p:spPr>
+          <a:xfrm>
+            <a:off x="6639719" y="914400"/>
+            <a:ext cx="4369391" cy="2075879"/>
+          </a:xfrm>
+          <a:prstGeom prst="rect">
+            <a:avLst/>
+          </a:prstGeom>
+        </p:spPr>
+      </p:pic>
+      <p:pic>
+        <p:nvPicPr>
+          <p:cNvPr id="10" name="Picture 9">
+            <a:extLst>
+              <a:ext uri="{FF2B5EF4-FFF2-40B4-BE49-F238E27FC236}">
+                <a16:creationId xmlns:a16="http://schemas.microsoft.com/office/drawing/2014/main" id="{B713BE55-8190-C1DF-1152-00D86A7CCE1A}"/>
+              </a:ext>
+            </a:extLst>
+          </p:cNvPr>
+          <p:cNvPicPr>
+            <a:picLocks noChangeAspect="1"/>
+          </p:cNvPicPr>
+          <p:nvPr/>
+        </p:nvPicPr>
+        <p:blipFill>
           <a:blip r:embed="rId5"/>
           <a:stretch>
             <a:fillRect/>
@@ -25122,8 +27182,8 @@
         </p:blipFill>
         <p:spPr>
           <a:xfrm>
-            <a:off x="6639719" y="914400"/>
-            <a:ext cx="4369391" cy="2075879"/>
+            <a:off x="6644675" y="3123639"/>
+            <a:ext cx="4484715" cy="3418878"/>
           </a:xfrm>
           <a:prstGeom prst="rect">
             <a:avLst/>
@@ -25143,7 +27203,7 @@
 </p:sld>
 </file>
 
-<file path=ppt/slides/slide42.xml><?xml version="1.0" encoding="utf-8"?>
+<file path=ppt/slides/slide46.xml><?xml version="1.0" encoding="utf-8"?>
 <p:sld xmlns:a="http://schemas.openxmlformats.org/drawingml/2006/main" xmlns:r="http://schemas.openxmlformats.org/officeDocument/2006/relationships" xmlns:p="http://schemas.openxmlformats.org/presentationml/2006/main" showMasterSp="0">
   <p:cSld>
     <p:spTree>
@@ -25332,7 +27392,7 @@
             </a:pPr>
             <a:fld id="{81D60167-4931-47E6-BA6A-407CBD079E47}" type="slidenum">
               <a:rPr spc="-25" dirty="0"/>
-              <a:t>42</a:t>
+              <a:t>46</a:t>
             </a:fld>
             <a:endParaRPr spc="-25" dirty="0"/>
           </a:p>
@@ -25462,10 +27522,10 @@
       </p:sp>
       <p:pic>
         <p:nvPicPr>
-          <p:cNvPr id="6" name="Picture 5">
+          <p:cNvPr id="5" name="Picture 4">
             <a:extLst>
               <a:ext uri="{FF2B5EF4-FFF2-40B4-BE49-F238E27FC236}">
-                <a16:creationId xmlns:a16="http://schemas.microsoft.com/office/drawing/2014/main" id="{5F1FEAE1-EE9A-8DF2-3E57-E8D780A9FBDB}"/>
+                <a16:creationId xmlns:a16="http://schemas.microsoft.com/office/drawing/2014/main" id="{BF1126A6-810E-D026-9680-E369FAB87065}"/>
               </a:ext>
             </a:extLst>
           </p:cNvPr>
@@ -25482,8 +27542,8 @@
         </p:blipFill>
         <p:spPr>
           <a:xfrm>
-            <a:off x="0" y="2089302"/>
-            <a:ext cx="12192000" cy="2679396"/>
+            <a:off x="0" y="2092739"/>
+            <a:ext cx="12192000" cy="2672522"/>
           </a:xfrm>
           <a:prstGeom prst="rect">
             <a:avLst/>
@@ -25503,7 +27563,7 @@
 </p:sld>
 </file>
 
-<file path=ppt/slides/slide43.xml><?xml version="1.0" encoding="utf-8"?>
+<file path=ppt/slides/slide47.xml><?xml version="1.0" encoding="utf-8"?>
 <p:sld xmlns:a="http://schemas.openxmlformats.org/drawingml/2006/main" xmlns:r="http://schemas.openxmlformats.org/officeDocument/2006/relationships" xmlns:p="http://schemas.openxmlformats.org/presentationml/2006/main" showMasterSp="0">
   <p:cSld>
     <p:spTree>
